--- a/花蓮/花蓮地區(1).pptx
+++ b/花蓮/花蓮地區(1).pptx
@@ -197,7 +197,7 @@
           <a:p>
             <a:fld id="{51921D14-EC95-4E5F-9139-AB73F2AD64D4}" type="datetimeFigureOut">
               <a:rPr lang="zh-TW" altLang="en-US" smtClean="0"/>
-              <a:t>2026/6/8</a:t>
+              <a:t>2026/6/10</a:t>
             </a:fld>
             <a:endParaRPr lang="zh-TW" altLang="en-US"/>
           </a:p>
@@ -887,7 +887,7 @@
           <a:p>
             <a:fld id="{A55BD1D6-D52A-4D41-A894-4910E637779A}" type="datetimeFigureOut">
               <a:rPr lang="zh-TW" altLang="en-US" smtClean="0"/>
-              <a:t>2026/6/8</a:t>
+              <a:t>2026/6/10</a:t>
             </a:fld>
             <a:endParaRPr lang="zh-TW" altLang="en-US"/>
           </a:p>
@@ -1055,7 +1055,7 @@
           <a:p>
             <a:fld id="{A55BD1D6-D52A-4D41-A894-4910E637779A}" type="datetimeFigureOut">
               <a:rPr lang="zh-TW" altLang="en-US" smtClean="0"/>
-              <a:t>2026/6/8</a:t>
+              <a:t>2026/6/10</a:t>
             </a:fld>
             <a:endParaRPr lang="zh-TW" altLang="en-US"/>
           </a:p>
@@ -1233,7 +1233,7 @@
           <a:p>
             <a:fld id="{A55BD1D6-D52A-4D41-A894-4910E637779A}" type="datetimeFigureOut">
               <a:rPr lang="zh-TW" altLang="en-US" smtClean="0"/>
-              <a:t>2026/6/8</a:t>
+              <a:t>2026/6/10</a:t>
             </a:fld>
             <a:endParaRPr lang="zh-TW" altLang="en-US"/>
           </a:p>
@@ -1336,7 +1336,7 @@
           <a:p>
             <a:fld id="{485E856B-4AC6-4669-8DCE-858B3EDEEC92}" type="datetimeFigureOut">
               <a:rPr lang="zh-TW" altLang="en-US" smtClean="0"/>
-              <a:t>2026/6/8</a:t>
+              <a:t>2026/6/10</a:t>
             </a:fld>
             <a:endParaRPr lang="zh-TW" altLang="en-US"/>
           </a:p>
@@ -1397,7 +1397,7 @@
           <a:p>
             <a:fld id="{485E856B-4AC6-4669-8DCE-858B3EDEEC92}" type="datetimeFigureOut">
               <a:rPr lang="zh-TW" altLang="en-US" smtClean="0"/>
-              <a:t>2026/6/8</a:t>
+              <a:t>2026/6/10</a:t>
             </a:fld>
             <a:endParaRPr lang="zh-TW" altLang="en-US"/>
           </a:p>
@@ -1641,7 +1641,7 @@
           <a:p>
             <a:fld id="{A55BD1D6-D52A-4D41-A894-4910E637779A}" type="datetimeFigureOut">
               <a:rPr lang="zh-TW" altLang="en-US" smtClean="0"/>
-              <a:t>2026/6/8</a:t>
+              <a:t>2026/6/10</a:t>
             </a:fld>
             <a:endParaRPr lang="zh-TW" altLang="en-US"/>
           </a:p>
@@ -1886,7 +1886,7 @@
           <a:p>
             <a:fld id="{A55BD1D6-D52A-4D41-A894-4910E637779A}" type="datetimeFigureOut">
               <a:rPr lang="zh-TW" altLang="en-US" smtClean="0"/>
-              <a:t>2026/6/8</a:t>
+              <a:t>2026/6/10</a:t>
             </a:fld>
             <a:endParaRPr lang="zh-TW" altLang="en-US"/>
           </a:p>
@@ -2115,7 +2115,7 @@
           <a:p>
             <a:fld id="{A55BD1D6-D52A-4D41-A894-4910E637779A}" type="datetimeFigureOut">
               <a:rPr lang="zh-TW" altLang="en-US" smtClean="0"/>
-              <a:t>2026/6/8</a:t>
+              <a:t>2026/6/10</a:t>
             </a:fld>
             <a:endParaRPr lang="zh-TW" altLang="en-US"/>
           </a:p>
@@ -2479,7 +2479,7 @@
           <a:p>
             <a:fld id="{A55BD1D6-D52A-4D41-A894-4910E637779A}" type="datetimeFigureOut">
               <a:rPr lang="zh-TW" altLang="en-US" smtClean="0"/>
-              <a:t>2026/6/8</a:t>
+              <a:t>2026/6/10</a:t>
             </a:fld>
             <a:endParaRPr lang="zh-TW" altLang="en-US"/>
           </a:p>
@@ -2596,7 +2596,7 @@
           <a:p>
             <a:fld id="{A55BD1D6-D52A-4D41-A894-4910E637779A}" type="datetimeFigureOut">
               <a:rPr lang="zh-TW" altLang="en-US" smtClean="0"/>
-              <a:t>2026/6/8</a:t>
+              <a:t>2026/6/10</a:t>
             </a:fld>
             <a:endParaRPr lang="zh-TW" altLang="en-US"/>
           </a:p>
@@ -2691,7 +2691,7 @@
           <a:p>
             <a:fld id="{A55BD1D6-D52A-4D41-A894-4910E637779A}" type="datetimeFigureOut">
               <a:rPr lang="zh-TW" altLang="en-US" smtClean="0"/>
-              <a:t>2026/6/8</a:t>
+              <a:t>2026/6/10</a:t>
             </a:fld>
             <a:endParaRPr lang="zh-TW" altLang="en-US"/>
           </a:p>
@@ -2966,7 +2966,7 @@
           <a:p>
             <a:fld id="{A55BD1D6-D52A-4D41-A894-4910E637779A}" type="datetimeFigureOut">
               <a:rPr lang="zh-TW" altLang="en-US" smtClean="0"/>
-              <a:t>2026/6/8</a:t>
+              <a:t>2026/6/10</a:t>
             </a:fld>
             <a:endParaRPr lang="zh-TW" altLang="en-US"/>
           </a:p>
@@ -3218,7 +3218,7 @@
           <a:p>
             <a:fld id="{A55BD1D6-D52A-4D41-A894-4910E637779A}" type="datetimeFigureOut">
               <a:rPr lang="zh-TW" altLang="en-US" smtClean="0"/>
-              <a:t>2026/6/8</a:t>
+              <a:t>2026/6/10</a:t>
             </a:fld>
             <a:endParaRPr lang="zh-TW" altLang="en-US"/>
           </a:p>
@@ -3429,7 +3429,7 @@
           <a:p>
             <a:fld id="{A55BD1D6-D52A-4D41-A894-4910E637779A}" type="datetimeFigureOut">
               <a:rPr lang="zh-TW" altLang="en-US" smtClean="0"/>
-              <a:t>2026/6/8</a:t>
+              <a:t>2026/6/10</a:t>
             </a:fld>
             <a:endParaRPr lang="zh-TW" altLang="en-US"/>
           </a:p>
@@ -3982,14 +3982,14 @@
           <p:nvPr>
             <p:extLst>
               <p:ext uri="{D42A27DB-BD31-4B8C-83A1-F6EECF244321}">
-                <p14:modId xmlns:p14="http://schemas.microsoft.com/office/powerpoint/2010/main" val="2590152602"/>
+                <p14:modId xmlns:p14="http://schemas.microsoft.com/office/powerpoint/2010/main" val="2068262368"/>
               </p:ext>
             </p:extLst>
           </p:nvPr>
         </p:nvGraphicFramePr>
         <p:xfrm>
           <a:off x="310284" y="572334"/>
-          <a:ext cx="11714077" cy="5830647"/>
+          <a:ext cx="11714076" cy="5830647"/>
         </p:xfrm>
         <a:graphic>
           <a:graphicData uri="http://schemas.openxmlformats.org/drawingml/2006/table">
@@ -3998,66 +3998,73 @@
                 <a:tableStyleId>{616DA210-FB5B-4158-B5E0-FEB733F419BA}</a:tableStyleId>
               </a:tblPr>
               <a:tblGrid>
-                <a:gridCol w="578687">
+                <a:gridCol w="508707">
                   <a:extLst>
                     <a:ext uri="{9D8B030D-6E8A-4147-A177-3AD203B41FA5}">
                       <a16:colId xmlns:a16="http://schemas.microsoft.com/office/drawing/2014/main" val="462600346"/>
                     </a:ext>
                   </a:extLst>
                 </a:gridCol>
-                <a:gridCol w="925405">
+                <a:gridCol w="634905">
                   <a:extLst>
                     <a:ext uri="{9D8B030D-6E8A-4147-A177-3AD203B41FA5}">
                       <a16:colId xmlns:a16="http://schemas.microsoft.com/office/drawing/2014/main" val="3488823732"/>
                     </a:ext>
                   </a:extLst>
                 </a:gridCol>
-                <a:gridCol w="538374">
+                <a:gridCol w="651860">
                   <a:extLst>
                     <a:ext uri="{9D8B030D-6E8A-4147-A177-3AD203B41FA5}">
-                      <a16:colId xmlns:a16="http://schemas.microsoft.com/office/drawing/2014/main" val="1408834963"/>
+                      <a16:colId xmlns:a16="http://schemas.microsoft.com/office/drawing/2014/main" val="2681745499"/>
                     </a:ext>
                   </a:extLst>
                 </a:gridCol>
-                <a:gridCol w="1588902">
+                <a:gridCol w="1396757">
                   <a:extLst>
                     <a:ext uri="{9D8B030D-6E8A-4147-A177-3AD203B41FA5}">
                       <a16:colId xmlns:a16="http://schemas.microsoft.com/office/drawing/2014/main" val="805301024"/>
                     </a:ext>
                   </a:extLst>
                 </a:gridCol>
-                <a:gridCol w="1565000">
+                <a:gridCol w="1375745">
                   <a:extLst>
                     <a:ext uri="{9D8B030D-6E8A-4147-A177-3AD203B41FA5}">
                       <a16:colId xmlns:a16="http://schemas.microsoft.com/office/drawing/2014/main" val="1635948814"/>
                     </a:ext>
                   </a:extLst>
                 </a:gridCol>
-                <a:gridCol w="1683362">
+                <a:gridCol w="1479794">
                   <a:extLst>
                     <a:ext uri="{9D8B030D-6E8A-4147-A177-3AD203B41FA5}">
                       <a16:colId xmlns:a16="http://schemas.microsoft.com/office/drawing/2014/main" val="2716375029"/>
                     </a:ext>
                   </a:extLst>
                 </a:gridCol>
-                <a:gridCol w="1611449">
+                <a:gridCol w="1416577">
                   <a:extLst>
                     <a:ext uri="{9D8B030D-6E8A-4147-A177-3AD203B41FA5}">
                       <a16:colId xmlns:a16="http://schemas.microsoft.com/office/drawing/2014/main" val="2835601013"/>
                     </a:ext>
                   </a:extLst>
                 </a:gridCol>
-                <a:gridCol w="1611449">
+                <a:gridCol w="1416577">
                   <a:extLst>
                     <a:ext uri="{9D8B030D-6E8A-4147-A177-3AD203B41FA5}">
                       <a16:colId xmlns:a16="http://schemas.microsoft.com/office/drawing/2014/main" val="313055658"/>
                     </a:ext>
                   </a:extLst>
                 </a:gridCol>
-                <a:gridCol w="1611449">
+                <a:gridCol w="1416577">
                   <a:extLst>
                     <a:ext uri="{9D8B030D-6E8A-4147-A177-3AD203B41FA5}">
                       <a16:colId xmlns:a16="http://schemas.microsoft.com/office/drawing/2014/main" val="2458911595"/>
+                    </a:ext>
+                  </a:extLst>
+                </a:gridCol>
+                <a:gridCol w="1416577">
+                  <a:extLst>
+                    <a:ext uri="{9D8B030D-6E8A-4147-A177-3AD203B41FA5}">
+                      <a16:colId xmlns:a16="http://schemas.microsoft.com/office/drawing/2014/main" val="2432965617"/>
                     </a:ext>
                   </a:extLst>
                 </a:gridCol>
@@ -4268,9 +4275,140 @@
                     <a:bodyPr/>
                     <a:lstStyle/>
                     <a:p>
+                      <a:endParaRPr lang="zh-TW" altLang="en-US"/>
+                    </a:p>
+                  </a:txBody>
+                  <a:tcPr/>
+                </a:tc>
+                <a:tc>
+                  <a:txBody>
+                    <a:bodyPr/>
+                    <a:lstStyle>
+                      <a:lvl1pPr>
+                        <a:spcBef>
+                          <a:spcPct val="20000"/>
+                        </a:spcBef>
+                        <a:defRPr kumimoji="1" sz="2800">
+                          <a:solidFill>
+                            <a:schemeClr val="tx1"/>
+                          </a:solidFill>
+                          <a:latin typeface="Arial" panose="020B0604020202020204" pitchFamily="34" charset="0"/>
+                          <a:ea typeface="新細明體" panose="02020500000000000000" pitchFamily="18" charset="-120"/>
+                        </a:defRPr>
+                      </a:lvl1pPr>
+                      <a:lvl2pPr marL="471488">
+                        <a:spcBef>
+                          <a:spcPct val="20000"/>
+                        </a:spcBef>
+                        <a:defRPr kumimoji="1" sz="2400">
+                          <a:solidFill>
+                            <a:schemeClr val="tx1"/>
+                          </a:solidFill>
+                          <a:latin typeface="Arial" panose="020B0604020202020204" pitchFamily="34" charset="0"/>
+                          <a:ea typeface="新細明體" panose="02020500000000000000" pitchFamily="18" charset="-120"/>
+                        </a:defRPr>
+                      </a:lvl2pPr>
+                      <a:lvl3pPr marL="909638">
+                        <a:spcBef>
+                          <a:spcPct val="20000"/>
+                        </a:spcBef>
+                        <a:defRPr kumimoji="1" sz="2000">
+                          <a:solidFill>
+                            <a:schemeClr val="tx1"/>
+                          </a:solidFill>
+                          <a:latin typeface="Arial" panose="020B0604020202020204" pitchFamily="34" charset="0"/>
+                          <a:ea typeface="新細明體" panose="02020500000000000000" pitchFamily="18" charset="-120"/>
+                        </a:defRPr>
+                      </a:lvl3pPr>
+                      <a:lvl4pPr marL="1306513">
+                        <a:spcBef>
+                          <a:spcPct val="20000"/>
+                        </a:spcBef>
+                        <a:defRPr kumimoji="1">
+                          <a:solidFill>
+                            <a:schemeClr val="tx1"/>
+                          </a:solidFill>
+                          <a:latin typeface="Arial" panose="020B0604020202020204" pitchFamily="34" charset="0"/>
+                          <a:ea typeface="新細明體" panose="02020500000000000000" pitchFamily="18" charset="-120"/>
+                        </a:defRPr>
+                      </a:lvl4pPr>
+                      <a:lvl5pPr marL="1695450">
+                        <a:spcBef>
+                          <a:spcPct val="20000"/>
+                        </a:spcBef>
+                        <a:defRPr kumimoji="1">
+                          <a:solidFill>
+                            <a:schemeClr val="tx1"/>
+                          </a:solidFill>
+                          <a:latin typeface="Arial" panose="020B0604020202020204" pitchFamily="34" charset="0"/>
+                          <a:ea typeface="新細明體" panose="02020500000000000000" pitchFamily="18" charset="-120"/>
+                        </a:defRPr>
+                      </a:lvl5pPr>
+                      <a:lvl6pPr marL="2152650" fontAlgn="base">
+                        <a:spcBef>
+                          <a:spcPct val="20000"/>
+                        </a:spcBef>
+                        <a:spcAft>
+                          <a:spcPct val="0"/>
+                        </a:spcAft>
+                        <a:defRPr kumimoji="1">
+                          <a:solidFill>
+                            <a:schemeClr val="tx1"/>
+                          </a:solidFill>
+                          <a:latin typeface="Arial" panose="020B0604020202020204" pitchFamily="34" charset="0"/>
+                          <a:ea typeface="新細明體" panose="02020500000000000000" pitchFamily="18" charset="-120"/>
+                        </a:defRPr>
+                      </a:lvl6pPr>
+                      <a:lvl7pPr marL="2609850" fontAlgn="base">
+                        <a:spcBef>
+                          <a:spcPct val="20000"/>
+                        </a:spcBef>
+                        <a:spcAft>
+                          <a:spcPct val="0"/>
+                        </a:spcAft>
+                        <a:defRPr kumimoji="1">
+                          <a:solidFill>
+                            <a:schemeClr val="tx1"/>
+                          </a:solidFill>
+                          <a:latin typeface="Arial" panose="020B0604020202020204" pitchFamily="34" charset="0"/>
+                          <a:ea typeface="新細明體" panose="02020500000000000000" pitchFamily="18" charset="-120"/>
+                        </a:defRPr>
+                      </a:lvl7pPr>
+                      <a:lvl8pPr marL="3067050" fontAlgn="base">
+                        <a:spcBef>
+                          <a:spcPct val="20000"/>
+                        </a:spcBef>
+                        <a:spcAft>
+                          <a:spcPct val="0"/>
+                        </a:spcAft>
+                        <a:defRPr kumimoji="1">
+                          <a:solidFill>
+                            <a:schemeClr val="tx1"/>
+                          </a:solidFill>
+                          <a:latin typeface="Arial" panose="020B0604020202020204" pitchFamily="34" charset="0"/>
+                          <a:ea typeface="新細明體" panose="02020500000000000000" pitchFamily="18" charset="-120"/>
+                        </a:defRPr>
+                      </a:lvl8pPr>
+                      <a:lvl9pPr marL="3524250" fontAlgn="base">
+                        <a:spcBef>
+                          <a:spcPct val="20000"/>
+                        </a:spcBef>
+                        <a:spcAft>
+                          <a:spcPct val="0"/>
+                        </a:spcAft>
+                        <a:defRPr kumimoji="1">
+                          <a:solidFill>
+                            <a:schemeClr val="tx1"/>
+                          </a:solidFill>
+                          <a:latin typeface="Arial" panose="020B0604020202020204" pitchFamily="34" charset="0"/>
+                          <a:ea typeface="新細明體" panose="02020500000000000000" pitchFamily="18" charset="-120"/>
+                        </a:defRPr>
+                      </a:lvl9pPr>
+                    </a:lstStyle>
+                    <a:p>
                       <a:pPr marL="0" marR="0" lvl="0" indent="0" algn="ctr" defTabSz="914400" rtl="0" eaLnBrk="1" fontAlgn="base" latinLnBrk="0" hangingPunct="1">
                         <a:lnSpc>
-                          <a:spcPct val="80000"/>
+                          <a:spcPct val="100000"/>
                         </a:lnSpc>
                         <a:spcBef>
                           <a:spcPct val="20000"/>
@@ -4284,6 +4422,54 @@
                         <a:buNone/>
                         <a:tabLst/>
                       </a:pPr>
+                      <a:r>
+                        <a:rPr kumimoji="1" lang="zh-TW" altLang="en-US" sz="1800" b="1" u="none" strike="noStrike" cap="none" normalizeH="0" baseline="0" dirty="0">
+                          <a:ln>
+                            <a:noFill/>
+                          </a:ln>
+                          <a:effectLst/>
+                          <a:latin typeface="Microsoft YaHei" panose="020B0503020204020204" pitchFamily="34" charset="-122"/>
+                          <a:ea typeface="Microsoft YaHei" panose="020B0503020204020204" pitchFamily="34" charset="-122"/>
+                        </a:rPr>
+                        <a:t>亞東</a:t>
+                      </a:r>
+                      <a:endParaRPr kumimoji="1" lang="en-US" altLang="zh-TW" sz="1800" b="1" u="none" strike="noStrike" cap="none" normalizeH="0" baseline="0" dirty="0">
+                        <a:ln>
+                          <a:noFill/>
+                        </a:ln>
+                        <a:effectLst/>
+                        <a:latin typeface="Microsoft YaHei" panose="020B0503020204020204" pitchFamily="34" charset="-122"/>
+                        <a:ea typeface="Microsoft YaHei" panose="020B0503020204020204" pitchFamily="34" charset="-122"/>
+                      </a:endParaRPr>
+                    </a:p>
+                    <a:p>
+                      <a:pPr marL="0" marR="0" lvl="0" indent="0" algn="ctr" defTabSz="914400" rtl="0" eaLnBrk="1" fontAlgn="base" latinLnBrk="0" hangingPunct="1">
+                        <a:lnSpc>
+                          <a:spcPct val="100000"/>
+                        </a:lnSpc>
+                        <a:spcBef>
+                          <a:spcPct val="20000"/>
+                        </a:spcBef>
+                        <a:spcAft>
+                          <a:spcPct val="0"/>
+                        </a:spcAft>
+                        <a:buClrTx/>
+                        <a:buSzTx/>
+                        <a:buFontTx/>
+                        <a:buNone/>
+                        <a:tabLst/>
+                      </a:pPr>
+                      <a:r>
+                        <a:rPr kumimoji="1" lang="zh-TW" altLang="en-US" sz="1800" b="1" u="none" strike="noStrike" cap="none" normalizeH="0" baseline="0" dirty="0">
+                          <a:ln>
+                            <a:noFill/>
+                          </a:ln>
+                          <a:effectLst/>
+                          <a:latin typeface="Microsoft YaHei" panose="020B0503020204020204" pitchFamily="34" charset="-122"/>
+                          <a:ea typeface="Microsoft YaHei" panose="020B0503020204020204" pitchFamily="34" charset="-122"/>
+                        </a:rPr>
+                        <a:t>美崙廠</a:t>
+                      </a:r>
                       <a:endParaRPr kumimoji="1" lang="zh-TW" altLang="en-US" sz="1800" b="1" i="0" u="none" strike="noStrike" cap="none" normalizeH="0" baseline="0" dirty="0">
                         <a:ln>
                           <a:noFill/>
@@ -4450,7 +4636,7 @@
                           <a:latin typeface="Microsoft YaHei" panose="020B0503020204020204" pitchFamily="34" charset="-122"/>
                           <a:ea typeface="Microsoft YaHei" panose="020B0503020204020204" pitchFamily="34" charset="-122"/>
                         </a:rPr>
-                        <a:t>亞東</a:t>
+                        <a:t>台泥</a:t>
                       </a:r>
                       <a:endParaRPr kumimoji="1" lang="en-US" altLang="zh-TW" sz="1800" b="1" u="none" strike="noStrike" cap="none" normalizeH="0" baseline="0" dirty="0">
                         <a:ln>
@@ -4487,7 +4673,201 @@
                           <a:latin typeface="Microsoft YaHei" panose="020B0503020204020204" pitchFamily="34" charset="-122"/>
                           <a:ea typeface="Microsoft YaHei" panose="020B0503020204020204" pitchFamily="34" charset="-122"/>
                         </a:rPr>
-                        <a:t>美崙廠</a:t>
+                        <a:t>花蓮廠</a:t>
+                      </a:r>
+                    </a:p>
+                  </a:txBody>
+                  <a:tcPr marL="36000" marR="36000" marT="18000" marB="18000" anchor="ctr" horzOverflow="overflow"/>
+                </a:tc>
+                <a:tc>
+                  <a:txBody>
+                    <a:bodyPr/>
+                    <a:lstStyle>
+                      <a:lvl1pPr>
+                        <a:spcBef>
+                          <a:spcPct val="20000"/>
+                        </a:spcBef>
+                        <a:defRPr kumimoji="1" sz="2800">
+                          <a:solidFill>
+                            <a:schemeClr val="tx1"/>
+                          </a:solidFill>
+                          <a:latin typeface="Arial" panose="020B0604020202020204" pitchFamily="34" charset="0"/>
+                          <a:ea typeface="新細明體" panose="02020500000000000000" pitchFamily="18" charset="-120"/>
+                        </a:defRPr>
+                      </a:lvl1pPr>
+                      <a:lvl2pPr marL="471488">
+                        <a:spcBef>
+                          <a:spcPct val="20000"/>
+                        </a:spcBef>
+                        <a:defRPr kumimoji="1" sz="2400">
+                          <a:solidFill>
+                            <a:schemeClr val="tx1"/>
+                          </a:solidFill>
+                          <a:latin typeface="Arial" panose="020B0604020202020204" pitchFamily="34" charset="0"/>
+                          <a:ea typeface="新細明體" panose="02020500000000000000" pitchFamily="18" charset="-120"/>
+                        </a:defRPr>
+                      </a:lvl2pPr>
+                      <a:lvl3pPr marL="909638">
+                        <a:spcBef>
+                          <a:spcPct val="20000"/>
+                        </a:spcBef>
+                        <a:defRPr kumimoji="1" sz="2000">
+                          <a:solidFill>
+                            <a:schemeClr val="tx1"/>
+                          </a:solidFill>
+                          <a:latin typeface="Arial" panose="020B0604020202020204" pitchFamily="34" charset="0"/>
+                          <a:ea typeface="新細明體" panose="02020500000000000000" pitchFamily="18" charset="-120"/>
+                        </a:defRPr>
+                      </a:lvl3pPr>
+                      <a:lvl4pPr marL="1306513">
+                        <a:spcBef>
+                          <a:spcPct val="20000"/>
+                        </a:spcBef>
+                        <a:defRPr kumimoji="1">
+                          <a:solidFill>
+                            <a:schemeClr val="tx1"/>
+                          </a:solidFill>
+                          <a:latin typeface="Arial" panose="020B0604020202020204" pitchFamily="34" charset="0"/>
+                          <a:ea typeface="新細明體" panose="02020500000000000000" pitchFamily="18" charset="-120"/>
+                        </a:defRPr>
+                      </a:lvl4pPr>
+                      <a:lvl5pPr marL="1695450">
+                        <a:spcBef>
+                          <a:spcPct val="20000"/>
+                        </a:spcBef>
+                        <a:defRPr kumimoji="1">
+                          <a:solidFill>
+                            <a:schemeClr val="tx1"/>
+                          </a:solidFill>
+                          <a:latin typeface="Arial" panose="020B0604020202020204" pitchFamily="34" charset="0"/>
+                          <a:ea typeface="新細明體" panose="02020500000000000000" pitchFamily="18" charset="-120"/>
+                        </a:defRPr>
+                      </a:lvl5pPr>
+                      <a:lvl6pPr marL="2152650" fontAlgn="base">
+                        <a:spcBef>
+                          <a:spcPct val="20000"/>
+                        </a:spcBef>
+                        <a:spcAft>
+                          <a:spcPct val="0"/>
+                        </a:spcAft>
+                        <a:defRPr kumimoji="1">
+                          <a:solidFill>
+                            <a:schemeClr val="tx1"/>
+                          </a:solidFill>
+                          <a:latin typeface="Arial" panose="020B0604020202020204" pitchFamily="34" charset="0"/>
+                          <a:ea typeface="新細明體" panose="02020500000000000000" pitchFamily="18" charset="-120"/>
+                        </a:defRPr>
+                      </a:lvl6pPr>
+                      <a:lvl7pPr marL="2609850" fontAlgn="base">
+                        <a:spcBef>
+                          <a:spcPct val="20000"/>
+                        </a:spcBef>
+                        <a:spcAft>
+                          <a:spcPct val="0"/>
+                        </a:spcAft>
+                        <a:defRPr kumimoji="1">
+                          <a:solidFill>
+                            <a:schemeClr val="tx1"/>
+                          </a:solidFill>
+                          <a:latin typeface="Arial" panose="020B0604020202020204" pitchFamily="34" charset="0"/>
+                          <a:ea typeface="新細明體" panose="02020500000000000000" pitchFamily="18" charset="-120"/>
+                        </a:defRPr>
+                      </a:lvl7pPr>
+                      <a:lvl8pPr marL="3067050" fontAlgn="base">
+                        <a:spcBef>
+                          <a:spcPct val="20000"/>
+                        </a:spcBef>
+                        <a:spcAft>
+                          <a:spcPct val="0"/>
+                        </a:spcAft>
+                        <a:defRPr kumimoji="1">
+                          <a:solidFill>
+                            <a:schemeClr val="tx1"/>
+                          </a:solidFill>
+                          <a:latin typeface="Arial" panose="020B0604020202020204" pitchFamily="34" charset="0"/>
+                          <a:ea typeface="新細明體" panose="02020500000000000000" pitchFamily="18" charset="-120"/>
+                        </a:defRPr>
+                      </a:lvl8pPr>
+                      <a:lvl9pPr marL="3524250" fontAlgn="base">
+                        <a:spcBef>
+                          <a:spcPct val="20000"/>
+                        </a:spcBef>
+                        <a:spcAft>
+                          <a:spcPct val="0"/>
+                        </a:spcAft>
+                        <a:defRPr kumimoji="1">
+                          <a:solidFill>
+                            <a:schemeClr val="tx1"/>
+                          </a:solidFill>
+                          <a:latin typeface="Arial" panose="020B0604020202020204" pitchFamily="34" charset="0"/>
+                          <a:ea typeface="新細明體" panose="02020500000000000000" pitchFamily="18" charset="-120"/>
+                        </a:defRPr>
+                      </a:lvl9pPr>
+                    </a:lstStyle>
+                    <a:p>
+                      <a:pPr marL="0" marR="0" lvl="0" indent="0" algn="ctr" defTabSz="914400" rtl="0" eaLnBrk="1" fontAlgn="base" latinLnBrk="0" hangingPunct="1">
+                        <a:lnSpc>
+                          <a:spcPct val="100000"/>
+                        </a:lnSpc>
+                        <a:spcBef>
+                          <a:spcPct val="20000"/>
+                        </a:spcBef>
+                        <a:spcAft>
+                          <a:spcPct val="0"/>
+                        </a:spcAft>
+                        <a:buClrTx/>
+                        <a:buSzTx/>
+                        <a:buFontTx/>
+                        <a:buNone/>
+                        <a:tabLst/>
+                      </a:pPr>
+                      <a:r>
+                        <a:rPr kumimoji="1" lang="zh-TW" altLang="en-US" sz="1800" b="1" u="none" strike="noStrike" cap="none" normalizeH="0" baseline="0" dirty="0">
+                          <a:ln>
+                            <a:noFill/>
+                          </a:ln>
+                          <a:effectLst/>
+                          <a:latin typeface="Microsoft YaHei" panose="020B0503020204020204" pitchFamily="34" charset="-122"/>
+                          <a:ea typeface="Microsoft YaHei" panose="020B0503020204020204" pitchFamily="34" charset="-122"/>
+                        </a:rPr>
+                        <a:t>鳳勝</a:t>
+                      </a:r>
+                      <a:endParaRPr kumimoji="1" lang="en-US" altLang="zh-TW" sz="1800" b="1" u="none" strike="noStrike" cap="none" normalizeH="0" baseline="0" dirty="0">
+                        <a:ln>
+                          <a:noFill/>
+                        </a:ln>
+                        <a:effectLst/>
+                        <a:latin typeface="Microsoft YaHei" panose="020B0503020204020204" pitchFamily="34" charset="-122"/>
+                        <a:ea typeface="Microsoft YaHei" panose="020B0503020204020204" pitchFamily="34" charset="-122"/>
+                      </a:endParaRPr>
+                    </a:p>
+                    <a:p>
+                      <a:pPr marL="0" marR="0" lvl="0" indent="0" algn="ctr" defTabSz="914400" rtl="0" eaLnBrk="1" fontAlgn="base" latinLnBrk="0" hangingPunct="1">
+                        <a:lnSpc>
+                          <a:spcPct val="100000"/>
+                        </a:lnSpc>
+                        <a:spcBef>
+                          <a:spcPct val="20000"/>
+                        </a:spcBef>
+                        <a:spcAft>
+                          <a:spcPct val="0"/>
+                        </a:spcAft>
+                        <a:buClrTx/>
+                        <a:buSzTx/>
+                        <a:buFontTx/>
+                        <a:buNone/>
+                        <a:tabLst/>
+                      </a:pPr>
+                      <a:r>
+                        <a:rPr kumimoji="1" lang="zh-TW" altLang="en-US" sz="1800" b="1" u="none" strike="noStrike" cap="none" normalizeH="0" baseline="0" dirty="0">
+                          <a:ln>
+                            <a:noFill/>
+                          </a:ln>
+                          <a:effectLst/>
+                          <a:latin typeface="Microsoft YaHei" panose="020B0503020204020204" pitchFamily="34" charset="-122"/>
+                          <a:ea typeface="Microsoft YaHei" panose="020B0503020204020204" pitchFamily="34" charset="-122"/>
+                        </a:rPr>
+                        <a:t>花蓮廠</a:t>
                       </a:r>
                       <a:endParaRPr kumimoji="1" lang="zh-TW" altLang="en-US" sz="1800" b="1" i="0" u="none" strike="noStrike" cap="none" normalizeH="0" baseline="0" dirty="0">
                         <a:ln>
@@ -4647,24 +5027,19 @@
                         <a:tabLst/>
                       </a:pPr>
                       <a:r>
-                        <a:rPr kumimoji="1" lang="zh-TW" altLang="en-US" sz="1800" b="1" u="none" strike="noStrike" cap="none" normalizeH="0" baseline="0" dirty="0">
-                          <a:ln>
-                            <a:noFill/>
-                          </a:ln>
-                          <a:effectLst/>
-                          <a:latin typeface="Microsoft YaHei" panose="020B0503020204020204" pitchFamily="34" charset="-122"/>
-                          <a:ea typeface="Microsoft YaHei" panose="020B0503020204020204" pitchFamily="34" charset="-122"/>
-                        </a:rPr>
-                        <a:t>台泥</a:t>
-                      </a:r>
-                      <a:endParaRPr kumimoji="1" lang="en-US" altLang="zh-TW" sz="1800" b="1" u="none" strike="noStrike" cap="none" normalizeH="0" baseline="0" dirty="0">
-                        <a:ln>
-                          <a:noFill/>
-                        </a:ln>
-                        <a:effectLst/>
-                        <a:latin typeface="Microsoft YaHei" panose="020B0503020204020204" pitchFamily="34" charset="-122"/>
-                        <a:ea typeface="Microsoft YaHei" panose="020B0503020204020204" pitchFamily="34" charset="-122"/>
-                      </a:endParaRPr>
+                        <a:rPr kumimoji="1" lang="zh-TW" altLang="en-US" sz="1800" b="1" i="0" u="none" strike="noStrike" cap="none" normalizeH="0" baseline="0" dirty="0">
+                          <a:ln>
+                            <a:noFill/>
+                          </a:ln>
+                          <a:solidFill>
+                            <a:schemeClr val="tx1"/>
+                          </a:solidFill>
+                          <a:effectLst/>
+                          <a:latin typeface="Microsoft YaHei" panose="020B0503020204020204" pitchFamily="34" charset="-122"/>
+                          <a:ea typeface="Microsoft YaHei" panose="020B0503020204020204" pitchFamily="34" charset="-122"/>
+                        </a:rPr>
+                        <a:t>友正</a:t>
+                      </a:r>
                     </a:p>
                     <a:p>
                       <a:pPr marL="0" marR="0" lvl="0" indent="0" algn="ctr" defTabSz="914400" rtl="0" eaLnBrk="1" fontAlgn="base" latinLnBrk="0" hangingPunct="1">
@@ -4692,201 +5067,18 @@
                           <a:latin typeface="Microsoft YaHei" panose="020B0503020204020204" pitchFamily="34" charset="-122"/>
                           <a:ea typeface="Microsoft YaHei" panose="020B0503020204020204" pitchFamily="34" charset="-122"/>
                         </a:rPr>
-                        <a:t>花蓮廠</a:t>
-                      </a:r>
-                    </a:p>
-                  </a:txBody>
-                  <a:tcPr marL="36000" marR="36000" marT="18000" marB="18000" anchor="ctr" horzOverflow="overflow"/>
-                </a:tc>
-                <a:tc>
-                  <a:txBody>
-                    <a:bodyPr/>
-                    <a:lstStyle>
-                      <a:lvl1pPr>
-                        <a:spcBef>
-                          <a:spcPct val="20000"/>
-                        </a:spcBef>
-                        <a:defRPr kumimoji="1" sz="2800">
-                          <a:solidFill>
-                            <a:schemeClr val="tx1"/>
-                          </a:solidFill>
-                          <a:latin typeface="Arial" panose="020B0604020202020204" pitchFamily="34" charset="0"/>
-                          <a:ea typeface="新細明體" panose="02020500000000000000" pitchFamily="18" charset="-120"/>
-                        </a:defRPr>
-                      </a:lvl1pPr>
-                      <a:lvl2pPr marL="471488">
-                        <a:spcBef>
-                          <a:spcPct val="20000"/>
-                        </a:spcBef>
-                        <a:defRPr kumimoji="1" sz="2400">
-                          <a:solidFill>
-                            <a:schemeClr val="tx1"/>
-                          </a:solidFill>
-                          <a:latin typeface="Arial" panose="020B0604020202020204" pitchFamily="34" charset="0"/>
-                          <a:ea typeface="新細明體" panose="02020500000000000000" pitchFamily="18" charset="-120"/>
-                        </a:defRPr>
-                      </a:lvl2pPr>
-                      <a:lvl3pPr marL="909638">
-                        <a:spcBef>
-                          <a:spcPct val="20000"/>
-                        </a:spcBef>
-                        <a:defRPr kumimoji="1" sz="2000">
-                          <a:solidFill>
-                            <a:schemeClr val="tx1"/>
-                          </a:solidFill>
-                          <a:latin typeface="Arial" panose="020B0604020202020204" pitchFamily="34" charset="0"/>
-                          <a:ea typeface="新細明體" panose="02020500000000000000" pitchFamily="18" charset="-120"/>
-                        </a:defRPr>
-                      </a:lvl3pPr>
-                      <a:lvl4pPr marL="1306513">
-                        <a:spcBef>
-                          <a:spcPct val="20000"/>
-                        </a:spcBef>
-                        <a:defRPr kumimoji="1">
-                          <a:solidFill>
-                            <a:schemeClr val="tx1"/>
-                          </a:solidFill>
-                          <a:latin typeface="Arial" panose="020B0604020202020204" pitchFamily="34" charset="0"/>
-                          <a:ea typeface="新細明體" panose="02020500000000000000" pitchFamily="18" charset="-120"/>
-                        </a:defRPr>
-                      </a:lvl4pPr>
-                      <a:lvl5pPr marL="1695450">
-                        <a:spcBef>
-                          <a:spcPct val="20000"/>
-                        </a:spcBef>
-                        <a:defRPr kumimoji="1">
-                          <a:solidFill>
-                            <a:schemeClr val="tx1"/>
-                          </a:solidFill>
-                          <a:latin typeface="Arial" panose="020B0604020202020204" pitchFamily="34" charset="0"/>
-                          <a:ea typeface="新細明體" panose="02020500000000000000" pitchFamily="18" charset="-120"/>
-                        </a:defRPr>
-                      </a:lvl5pPr>
-                      <a:lvl6pPr marL="2152650" fontAlgn="base">
-                        <a:spcBef>
-                          <a:spcPct val="20000"/>
-                        </a:spcBef>
-                        <a:spcAft>
-                          <a:spcPct val="0"/>
-                        </a:spcAft>
-                        <a:defRPr kumimoji="1">
-                          <a:solidFill>
-                            <a:schemeClr val="tx1"/>
-                          </a:solidFill>
-                          <a:latin typeface="Arial" panose="020B0604020202020204" pitchFamily="34" charset="0"/>
-                          <a:ea typeface="新細明體" panose="02020500000000000000" pitchFamily="18" charset="-120"/>
-                        </a:defRPr>
-                      </a:lvl6pPr>
-                      <a:lvl7pPr marL="2609850" fontAlgn="base">
-                        <a:spcBef>
-                          <a:spcPct val="20000"/>
-                        </a:spcBef>
-                        <a:spcAft>
-                          <a:spcPct val="0"/>
-                        </a:spcAft>
-                        <a:defRPr kumimoji="1">
-                          <a:solidFill>
-                            <a:schemeClr val="tx1"/>
-                          </a:solidFill>
-                          <a:latin typeface="Arial" panose="020B0604020202020204" pitchFamily="34" charset="0"/>
-                          <a:ea typeface="新細明體" panose="02020500000000000000" pitchFamily="18" charset="-120"/>
-                        </a:defRPr>
-                      </a:lvl7pPr>
-                      <a:lvl8pPr marL="3067050" fontAlgn="base">
-                        <a:spcBef>
-                          <a:spcPct val="20000"/>
-                        </a:spcBef>
-                        <a:spcAft>
-                          <a:spcPct val="0"/>
-                        </a:spcAft>
-                        <a:defRPr kumimoji="1">
-                          <a:solidFill>
-                            <a:schemeClr val="tx1"/>
-                          </a:solidFill>
-                          <a:latin typeface="Arial" panose="020B0604020202020204" pitchFamily="34" charset="0"/>
-                          <a:ea typeface="新細明體" panose="02020500000000000000" pitchFamily="18" charset="-120"/>
-                        </a:defRPr>
-                      </a:lvl8pPr>
-                      <a:lvl9pPr marL="3524250" fontAlgn="base">
-                        <a:spcBef>
-                          <a:spcPct val="20000"/>
-                        </a:spcBef>
-                        <a:spcAft>
-                          <a:spcPct val="0"/>
-                        </a:spcAft>
-                        <a:defRPr kumimoji="1">
-                          <a:solidFill>
-                            <a:schemeClr val="tx1"/>
-                          </a:solidFill>
-                          <a:latin typeface="Arial" panose="020B0604020202020204" pitchFamily="34" charset="0"/>
-                          <a:ea typeface="新細明體" panose="02020500000000000000" pitchFamily="18" charset="-120"/>
-                        </a:defRPr>
-                      </a:lvl9pPr>
-                    </a:lstStyle>
-                    <a:p>
-                      <a:pPr marL="0" marR="0" lvl="0" indent="0" algn="ctr" defTabSz="914400" rtl="0" eaLnBrk="1" fontAlgn="base" latinLnBrk="0" hangingPunct="1">
-                        <a:lnSpc>
-                          <a:spcPct val="100000"/>
-                        </a:lnSpc>
-                        <a:spcBef>
-                          <a:spcPct val="20000"/>
-                        </a:spcBef>
-                        <a:spcAft>
-                          <a:spcPct val="0"/>
-                        </a:spcAft>
-                        <a:buClrTx/>
-                        <a:buSzTx/>
-                        <a:buFontTx/>
-                        <a:buNone/>
-                        <a:tabLst/>
-                      </a:pPr>
-                      <a:r>
-                        <a:rPr kumimoji="1" lang="zh-TW" altLang="en-US" sz="1800" b="1" u="none" strike="noStrike" cap="none" normalizeH="0" baseline="0" dirty="0">
-                          <a:ln>
-                            <a:noFill/>
-                          </a:ln>
-                          <a:effectLst/>
-                          <a:latin typeface="Microsoft YaHei" panose="020B0503020204020204" pitchFamily="34" charset="-122"/>
-                          <a:ea typeface="Microsoft YaHei" panose="020B0503020204020204" pitchFamily="34" charset="-122"/>
-                        </a:rPr>
-                        <a:t>鳳勝</a:t>
-                      </a:r>
-                      <a:endParaRPr kumimoji="1" lang="en-US" altLang="zh-TW" sz="1800" b="1" u="none" strike="noStrike" cap="none" normalizeH="0" baseline="0" dirty="0">
-                        <a:ln>
-                          <a:noFill/>
-                        </a:ln>
-                        <a:effectLst/>
-                        <a:latin typeface="Microsoft YaHei" panose="020B0503020204020204" pitchFamily="34" charset="-122"/>
-                        <a:ea typeface="Microsoft YaHei" panose="020B0503020204020204" pitchFamily="34" charset="-122"/>
-                      </a:endParaRPr>
-                    </a:p>
-                    <a:p>
-                      <a:pPr marL="0" marR="0" lvl="0" indent="0" algn="ctr" defTabSz="914400" rtl="0" eaLnBrk="1" fontAlgn="base" latinLnBrk="0" hangingPunct="1">
-                        <a:lnSpc>
-                          <a:spcPct val="100000"/>
-                        </a:lnSpc>
-                        <a:spcBef>
-                          <a:spcPct val="20000"/>
-                        </a:spcBef>
-                        <a:spcAft>
-                          <a:spcPct val="0"/>
-                        </a:spcAft>
-                        <a:buClrTx/>
-                        <a:buSzTx/>
-                        <a:buFontTx/>
-                        <a:buNone/>
-                        <a:tabLst/>
-                      </a:pPr>
-                      <a:r>
-                        <a:rPr kumimoji="1" lang="zh-TW" altLang="en-US" sz="1800" b="1" u="none" strike="noStrike" cap="none" normalizeH="0" baseline="0" dirty="0">
-                          <a:ln>
-                            <a:noFill/>
-                          </a:ln>
-                          <a:effectLst/>
-                          <a:latin typeface="Microsoft YaHei" panose="020B0503020204020204" pitchFamily="34" charset="-122"/>
-                          <a:ea typeface="Microsoft YaHei" panose="020B0503020204020204" pitchFamily="34" charset="-122"/>
-                        </a:rPr>
-                        <a:t>花蓮廠</a:t>
+                        <a:t>吉安廠</a:t>
+                      </a:r>
+                      <a:r>
+                        <a:rPr kumimoji="1" lang="en-US" altLang="zh-TW" sz="1800" b="1" u="none" strike="noStrike" cap="none" normalizeH="0" baseline="0" dirty="0">
+                          <a:ln>
+                            <a:noFill/>
+                          </a:ln>
+                          <a:effectLst/>
+                          <a:latin typeface="Microsoft YaHei" panose="020B0503020204020204" pitchFamily="34" charset="-122"/>
+                          <a:ea typeface="Microsoft YaHei" panose="020B0503020204020204" pitchFamily="34" charset="-122"/>
+                        </a:rPr>
+                        <a:t> </a:t>
                       </a:r>
                       <a:endParaRPr kumimoji="1" lang="zh-TW" altLang="en-US" sz="1800" b="1" i="0" u="none" strike="noStrike" cap="none" normalizeH="0" baseline="0" dirty="0">
                         <a:ln>
@@ -5057,7 +5249,7 @@
                           <a:latin typeface="Microsoft YaHei" panose="020B0503020204020204" pitchFamily="34" charset="-122"/>
                           <a:ea typeface="Microsoft YaHei" panose="020B0503020204020204" pitchFamily="34" charset="-122"/>
                         </a:rPr>
-                        <a:t>友正</a:t>
+                        <a:t>長雄</a:t>
                       </a:r>
                     </a:p>
                     <a:p>
@@ -5268,8 +5460,19 @@
                           <a:latin typeface="Microsoft YaHei" panose="020B0503020204020204" pitchFamily="34" charset="-122"/>
                           <a:ea typeface="Microsoft YaHei" panose="020B0503020204020204" pitchFamily="34" charset="-122"/>
                         </a:rPr>
-                        <a:t>長雄</a:t>
-                      </a:r>
+                        <a:t>定穎</a:t>
+                      </a:r>
+                      <a:endParaRPr kumimoji="1" lang="en-US" altLang="zh-TW" sz="1800" b="1" i="0" u="none" strike="noStrike" cap="none" normalizeH="0" baseline="0" dirty="0">
+                        <a:ln>
+                          <a:noFill/>
+                        </a:ln>
+                        <a:solidFill>
+                          <a:schemeClr val="tx1"/>
+                        </a:solidFill>
+                        <a:effectLst/>
+                        <a:latin typeface="Microsoft YaHei" panose="020B0503020204020204" pitchFamily="34" charset="-122"/>
+                        <a:ea typeface="Microsoft YaHei" panose="020B0503020204020204" pitchFamily="34" charset="-122"/>
+                      </a:endParaRPr>
                     </a:p>
                     <a:p>
                       <a:pPr marL="0" marR="0" lvl="0" indent="0" algn="ctr" defTabSz="914400" rtl="0" eaLnBrk="1" fontAlgn="base" latinLnBrk="0" hangingPunct="1">
@@ -5287,6 +5490,7 @@
                         <a:buFontTx/>
                         <a:buNone/>
                         <a:tabLst/>
+                        <a:defRPr/>
                       </a:pPr>
                       <a:r>
                         <a:rPr kumimoji="1" lang="zh-TW" altLang="en-US" sz="1800" b="1" u="none" strike="noStrike" cap="none" normalizeH="0" baseline="0" dirty="0">
@@ -5479,7 +5683,7 @@
                           <a:latin typeface="Microsoft YaHei" panose="020B0503020204020204" pitchFamily="34" charset="-122"/>
                           <a:ea typeface="Microsoft YaHei" panose="020B0503020204020204" pitchFamily="34" charset="-122"/>
                         </a:rPr>
-                        <a:t>定穎</a:t>
+                        <a:t>花建實業</a:t>
                       </a:r>
                       <a:endParaRPr kumimoji="1" lang="en-US" altLang="zh-TW" sz="1800" b="1" i="0" u="none" strike="noStrike" cap="none" normalizeH="0" baseline="0" dirty="0">
                         <a:ln>
@@ -5509,41 +5713,21 @@
                         <a:buFontTx/>
                         <a:buNone/>
                         <a:tabLst/>
-                        <a:defRPr/>
                       </a:pPr>
                       <a:r>
-                        <a:rPr kumimoji="1" lang="zh-TW" altLang="en-US" sz="1800" b="1" u="none" strike="noStrike" cap="none" normalizeH="0" baseline="0" dirty="0">
-                          <a:ln>
-                            <a:noFill/>
-                          </a:ln>
-                          <a:effectLst/>
-                          <a:latin typeface="Microsoft YaHei" panose="020B0503020204020204" pitchFamily="34" charset="-122"/>
-                          <a:ea typeface="Microsoft YaHei" panose="020B0503020204020204" pitchFamily="34" charset="-122"/>
-                        </a:rPr>
-                        <a:t>吉安廠</a:t>
-                      </a:r>
-                      <a:r>
-                        <a:rPr kumimoji="1" lang="en-US" altLang="zh-TW" sz="1800" b="1" u="none" strike="noStrike" cap="none" normalizeH="0" baseline="0" dirty="0">
-                          <a:ln>
-                            <a:noFill/>
-                          </a:ln>
-                          <a:effectLst/>
-                          <a:latin typeface="Microsoft YaHei" panose="020B0503020204020204" pitchFamily="34" charset="-122"/>
-                          <a:ea typeface="Microsoft YaHei" panose="020B0503020204020204" pitchFamily="34" charset="-122"/>
-                        </a:rPr>
-                        <a:t> </a:t>
-                      </a:r>
-                      <a:endParaRPr kumimoji="1" lang="zh-TW" altLang="en-US" sz="1800" b="1" i="0" u="none" strike="noStrike" cap="none" normalizeH="0" baseline="0" dirty="0">
-                        <a:ln>
-                          <a:noFill/>
-                        </a:ln>
-                        <a:solidFill>
-                          <a:schemeClr val="tx1"/>
-                        </a:solidFill>
-                        <a:effectLst/>
-                        <a:latin typeface="Microsoft YaHei" panose="020B0503020204020204" pitchFamily="34" charset="-122"/>
-                        <a:ea typeface="Microsoft YaHei" panose="020B0503020204020204" pitchFamily="34" charset="-122"/>
-                      </a:endParaRPr>
+                        <a:rPr kumimoji="1" lang="zh-TW" altLang="en-US" sz="1800" b="1" i="0" u="none" strike="noStrike" cap="none" normalizeH="0" baseline="0" dirty="0">
+                          <a:ln>
+                            <a:noFill/>
+                          </a:ln>
+                          <a:solidFill>
+                            <a:schemeClr val="tx1"/>
+                          </a:solidFill>
+                          <a:effectLst/>
+                          <a:latin typeface="Microsoft YaHei" panose="020B0503020204020204" pitchFamily="34" charset="-122"/>
+                          <a:ea typeface="Microsoft YaHei" panose="020B0503020204020204" pitchFamily="34" charset="-122"/>
+                        </a:rPr>
+                        <a:t>鳳林廠</a:t>
+                      </a:r>
                     </a:p>
                   </a:txBody>
                   <a:tcPr marL="36000" marR="36000" marT="18000" marB="18000" anchor="ctr" horzOverflow="overflow"/>
@@ -5771,36 +5955,10 @@
                     <a:bodyPr/>
                     <a:lstStyle/>
                     <a:p>
-                      <a:pPr marL="0" marR="0" lvl="0" indent="0" algn="ctr" defTabSz="914400" rtl="0" eaLnBrk="1" fontAlgn="base" latinLnBrk="0" hangingPunct="1">
-                        <a:lnSpc>
-                          <a:spcPct val="80000"/>
-                        </a:lnSpc>
-                        <a:spcBef>
-                          <a:spcPct val="20000"/>
-                        </a:spcBef>
-                        <a:spcAft>
-                          <a:spcPct val="0"/>
-                        </a:spcAft>
-                        <a:buClrTx/>
-                        <a:buSzTx/>
-                        <a:buFontTx/>
-                        <a:buNone/>
-                        <a:tabLst/>
-                      </a:pPr>
-                      <a:endParaRPr kumimoji="1" lang="en-US" altLang="zh-TW" sz="1700" b="1" i="0" u="none" strike="noStrike" cap="none" normalizeH="0" baseline="0">
-                        <a:ln>
-                          <a:noFill/>
-                        </a:ln>
-                        <a:solidFill>
-                          <a:schemeClr val="tx1"/>
-                        </a:solidFill>
-                        <a:effectLst/>
-                        <a:latin typeface="Microsoft YaHei" panose="020B0503020204020204" pitchFamily="34" charset="-122"/>
-                        <a:ea typeface="Microsoft YaHei" panose="020B0503020204020204" pitchFamily="34" charset="-122"/>
-                      </a:endParaRPr>
-                    </a:p>
-                  </a:txBody>
-                  <a:tcPr marL="36000" marR="36000" marT="18000" marB="18000" anchor="ctr" horzOverflow="overflow"/>
+                      <a:endParaRPr lang="zh-TW" altLang="en-US"/>
+                    </a:p>
+                  </a:txBody>
+                  <a:tcPr/>
                 </a:tc>
                 <a:tc>
                   <a:txBody>
@@ -6928,6 +7086,198 @@
                   </a:txBody>
                   <a:tcPr marL="36000" marR="36000" marT="18000" marB="18000" anchor="ctr" horzOverflow="overflow"/>
                 </a:tc>
+                <a:tc>
+                  <a:txBody>
+                    <a:bodyPr/>
+                    <a:lstStyle>
+                      <a:lvl1pPr>
+                        <a:spcBef>
+                          <a:spcPct val="20000"/>
+                        </a:spcBef>
+                        <a:defRPr kumimoji="1" sz="2800">
+                          <a:solidFill>
+                            <a:schemeClr val="tx1"/>
+                          </a:solidFill>
+                          <a:latin typeface="Arial" panose="020B0604020202020204" pitchFamily="34" charset="0"/>
+                          <a:ea typeface="新細明體" panose="02020500000000000000" pitchFamily="18" charset="-120"/>
+                        </a:defRPr>
+                      </a:lvl1pPr>
+                      <a:lvl2pPr marL="471488">
+                        <a:spcBef>
+                          <a:spcPct val="20000"/>
+                        </a:spcBef>
+                        <a:defRPr kumimoji="1" sz="2400">
+                          <a:solidFill>
+                            <a:schemeClr val="tx1"/>
+                          </a:solidFill>
+                          <a:latin typeface="Arial" panose="020B0604020202020204" pitchFamily="34" charset="0"/>
+                          <a:ea typeface="新細明體" panose="02020500000000000000" pitchFamily="18" charset="-120"/>
+                        </a:defRPr>
+                      </a:lvl2pPr>
+                      <a:lvl3pPr marL="909638">
+                        <a:spcBef>
+                          <a:spcPct val="20000"/>
+                        </a:spcBef>
+                        <a:defRPr kumimoji="1" sz="2000">
+                          <a:solidFill>
+                            <a:schemeClr val="tx1"/>
+                          </a:solidFill>
+                          <a:latin typeface="Arial" panose="020B0604020202020204" pitchFamily="34" charset="0"/>
+                          <a:ea typeface="新細明體" panose="02020500000000000000" pitchFamily="18" charset="-120"/>
+                        </a:defRPr>
+                      </a:lvl3pPr>
+                      <a:lvl4pPr marL="1306513">
+                        <a:spcBef>
+                          <a:spcPct val="20000"/>
+                        </a:spcBef>
+                        <a:defRPr kumimoji="1">
+                          <a:solidFill>
+                            <a:schemeClr val="tx1"/>
+                          </a:solidFill>
+                          <a:latin typeface="Arial" panose="020B0604020202020204" pitchFamily="34" charset="0"/>
+                          <a:ea typeface="新細明體" panose="02020500000000000000" pitchFamily="18" charset="-120"/>
+                        </a:defRPr>
+                      </a:lvl4pPr>
+                      <a:lvl5pPr marL="1695450">
+                        <a:spcBef>
+                          <a:spcPct val="20000"/>
+                        </a:spcBef>
+                        <a:defRPr kumimoji="1">
+                          <a:solidFill>
+                            <a:schemeClr val="tx1"/>
+                          </a:solidFill>
+                          <a:latin typeface="Arial" panose="020B0604020202020204" pitchFamily="34" charset="0"/>
+                          <a:ea typeface="新細明體" panose="02020500000000000000" pitchFamily="18" charset="-120"/>
+                        </a:defRPr>
+                      </a:lvl5pPr>
+                      <a:lvl6pPr marL="2152650" fontAlgn="base">
+                        <a:spcBef>
+                          <a:spcPct val="20000"/>
+                        </a:spcBef>
+                        <a:spcAft>
+                          <a:spcPct val="0"/>
+                        </a:spcAft>
+                        <a:defRPr kumimoji="1">
+                          <a:solidFill>
+                            <a:schemeClr val="tx1"/>
+                          </a:solidFill>
+                          <a:latin typeface="Arial" panose="020B0604020202020204" pitchFamily="34" charset="0"/>
+                          <a:ea typeface="新細明體" panose="02020500000000000000" pitchFamily="18" charset="-120"/>
+                        </a:defRPr>
+                      </a:lvl6pPr>
+                      <a:lvl7pPr marL="2609850" fontAlgn="base">
+                        <a:spcBef>
+                          <a:spcPct val="20000"/>
+                        </a:spcBef>
+                        <a:spcAft>
+                          <a:spcPct val="0"/>
+                        </a:spcAft>
+                        <a:defRPr kumimoji="1">
+                          <a:solidFill>
+                            <a:schemeClr val="tx1"/>
+                          </a:solidFill>
+                          <a:latin typeface="Arial" panose="020B0604020202020204" pitchFamily="34" charset="0"/>
+                          <a:ea typeface="新細明體" panose="02020500000000000000" pitchFamily="18" charset="-120"/>
+                        </a:defRPr>
+                      </a:lvl7pPr>
+                      <a:lvl8pPr marL="3067050" fontAlgn="base">
+                        <a:spcBef>
+                          <a:spcPct val="20000"/>
+                        </a:spcBef>
+                        <a:spcAft>
+                          <a:spcPct val="0"/>
+                        </a:spcAft>
+                        <a:defRPr kumimoji="1">
+                          <a:solidFill>
+                            <a:schemeClr val="tx1"/>
+                          </a:solidFill>
+                          <a:latin typeface="Arial" panose="020B0604020202020204" pitchFamily="34" charset="0"/>
+                          <a:ea typeface="新細明體" panose="02020500000000000000" pitchFamily="18" charset="-120"/>
+                        </a:defRPr>
+                      </a:lvl8pPr>
+                      <a:lvl9pPr marL="3524250" fontAlgn="base">
+                        <a:spcBef>
+                          <a:spcPct val="20000"/>
+                        </a:spcBef>
+                        <a:spcAft>
+                          <a:spcPct val="0"/>
+                        </a:spcAft>
+                        <a:defRPr kumimoji="1">
+                          <a:solidFill>
+                            <a:schemeClr val="tx1"/>
+                          </a:solidFill>
+                          <a:latin typeface="Arial" panose="020B0604020202020204" pitchFamily="34" charset="0"/>
+                          <a:ea typeface="新細明體" panose="02020500000000000000" pitchFamily="18" charset="-120"/>
+                        </a:defRPr>
+                      </a:lvl9pPr>
+                    </a:lstStyle>
+                    <a:p>
+                      <a:pPr marL="0" marR="0" lvl="0" indent="0" algn="ctr" defTabSz="914400" rtl="0" eaLnBrk="1" fontAlgn="base" latinLnBrk="0" hangingPunct="1">
+                        <a:lnSpc>
+                          <a:spcPct val="100000"/>
+                        </a:lnSpc>
+                        <a:spcBef>
+                          <a:spcPct val="20000"/>
+                        </a:spcBef>
+                        <a:spcAft>
+                          <a:spcPct val="0"/>
+                        </a:spcAft>
+                        <a:buClrTx/>
+                        <a:buSzTx/>
+                        <a:buFontTx/>
+                        <a:buNone/>
+                        <a:tabLst/>
+                        <a:defRPr/>
+                      </a:pPr>
+                      <a:r>
+                        <a:rPr kumimoji="1" lang="en-US" altLang="zh-TW" sz="1500" b="1" u="none" strike="noStrike" cap="none" normalizeH="0" baseline="0" dirty="0">
+                          <a:ln>
+                            <a:noFill/>
+                          </a:ln>
+                          <a:effectLst/>
+                          <a:latin typeface="Microsoft YaHei" panose="020B0503020204020204" pitchFamily="34" charset="-122"/>
+                          <a:ea typeface="Microsoft YaHei" panose="020B0503020204020204" pitchFamily="34" charset="-122"/>
+                        </a:rPr>
+                        <a:t>3 m</a:t>
+                      </a:r>
+                      <a:r>
+                        <a:rPr kumimoji="1" lang="en-US" altLang="zh-TW" sz="1500" b="1" u="none" strike="noStrike" cap="none" normalizeH="0" baseline="30000" dirty="0">
+                          <a:ln>
+                            <a:noFill/>
+                          </a:ln>
+                          <a:effectLst/>
+                          <a:latin typeface="Microsoft YaHei" panose="020B0503020204020204" pitchFamily="34" charset="-122"/>
+                          <a:ea typeface="Microsoft YaHei" panose="020B0503020204020204" pitchFamily="34" charset="-122"/>
+                        </a:rPr>
+                        <a:t>3 </a:t>
+                      </a:r>
+                      <a:r>
+                        <a:rPr kumimoji="1" lang="en-US" altLang="zh-TW" sz="1500" b="1" u="none" strike="noStrike" cap="none" normalizeH="0" baseline="0" dirty="0">
+                          <a:ln>
+                            <a:noFill/>
+                          </a:ln>
+                          <a:effectLst/>
+                          <a:latin typeface="Microsoft YaHei" panose="020B0503020204020204" pitchFamily="34" charset="-122"/>
+                          <a:ea typeface="Microsoft YaHei" panose="020B0503020204020204" pitchFamily="34" charset="-122"/>
+                        </a:rPr>
+                        <a:t>× 1</a:t>
+                      </a:r>
+                      <a:endParaRPr kumimoji="1" lang="en-US" altLang="zh-TW" sz="1500" b="1" i="0" u="none" strike="noStrike" cap="none" normalizeH="0" baseline="0" dirty="0">
+                        <a:ln>
+                          <a:noFill/>
+                        </a:ln>
+                        <a:solidFill>
+                          <a:schemeClr val="tx1"/>
+                        </a:solidFill>
+                        <a:effectLst/>
+                        <a:latin typeface="Microsoft YaHei" panose="020B0503020204020204" pitchFamily="34" charset="-122"/>
+                        <a:ea typeface="Microsoft YaHei" panose="020B0503020204020204" pitchFamily="34" charset="-122"/>
+                        <a:cs typeface="Arial Unicode MS" pitchFamily="34" charset="-120"/>
+                      </a:endParaRPr>
+                    </a:p>
+                  </a:txBody>
+                  <a:tcPr marL="36000" marR="36000" marT="18000" marB="18000" anchor="ctr" horzOverflow="overflow"/>
+                </a:tc>
                 <a:extLst>
                   <a:ext uri="{0D108BD9-81ED-4DB2-BD59-A6C34878D82A}">
                     <a16:rowId xmlns:a16="http://schemas.microsoft.com/office/drawing/2014/main" val="1193419023"/>
@@ -7195,9 +7545,302 @@
                     <a:bodyPr/>
                     <a:lstStyle/>
                     <a:p>
+                      <a:endParaRPr lang="zh-TW" altLang="en-US"/>
+                    </a:p>
+                  </a:txBody>
+                  <a:tcPr/>
+                </a:tc>
+                <a:tc>
+                  <a:txBody>
+                    <a:bodyPr/>
+                    <a:lstStyle>
+                      <a:lvl1pPr>
+                        <a:spcBef>
+                          <a:spcPct val="20000"/>
+                        </a:spcBef>
+                        <a:defRPr kumimoji="1" sz="2800">
+                          <a:solidFill>
+                            <a:schemeClr val="tx1"/>
+                          </a:solidFill>
+                          <a:latin typeface="Arial" panose="020B0604020202020204" pitchFamily="34" charset="0"/>
+                          <a:ea typeface="新細明體" panose="02020500000000000000" pitchFamily="18" charset="-120"/>
+                        </a:defRPr>
+                      </a:lvl1pPr>
+                      <a:lvl2pPr marL="471488">
+                        <a:spcBef>
+                          <a:spcPct val="20000"/>
+                        </a:spcBef>
+                        <a:defRPr kumimoji="1" sz="2400">
+                          <a:solidFill>
+                            <a:schemeClr val="tx1"/>
+                          </a:solidFill>
+                          <a:latin typeface="Arial" panose="020B0604020202020204" pitchFamily="34" charset="0"/>
+                          <a:ea typeface="新細明體" panose="02020500000000000000" pitchFamily="18" charset="-120"/>
+                        </a:defRPr>
+                      </a:lvl2pPr>
+                      <a:lvl3pPr marL="909638">
+                        <a:spcBef>
+                          <a:spcPct val="20000"/>
+                        </a:spcBef>
+                        <a:defRPr kumimoji="1" sz="2000">
+                          <a:solidFill>
+                            <a:schemeClr val="tx1"/>
+                          </a:solidFill>
+                          <a:latin typeface="Arial" panose="020B0604020202020204" pitchFamily="34" charset="0"/>
+                          <a:ea typeface="新細明體" panose="02020500000000000000" pitchFamily="18" charset="-120"/>
+                        </a:defRPr>
+                      </a:lvl3pPr>
+                      <a:lvl4pPr marL="1306513">
+                        <a:spcBef>
+                          <a:spcPct val="20000"/>
+                        </a:spcBef>
+                        <a:defRPr kumimoji="1">
+                          <a:solidFill>
+                            <a:schemeClr val="tx1"/>
+                          </a:solidFill>
+                          <a:latin typeface="Arial" panose="020B0604020202020204" pitchFamily="34" charset="0"/>
+                          <a:ea typeface="新細明體" panose="02020500000000000000" pitchFamily="18" charset="-120"/>
+                        </a:defRPr>
+                      </a:lvl4pPr>
+                      <a:lvl5pPr marL="1695450">
+                        <a:spcBef>
+                          <a:spcPct val="20000"/>
+                        </a:spcBef>
+                        <a:defRPr kumimoji="1">
+                          <a:solidFill>
+                            <a:schemeClr val="tx1"/>
+                          </a:solidFill>
+                          <a:latin typeface="Arial" panose="020B0604020202020204" pitchFamily="34" charset="0"/>
+                          <a:ea typeface="新細明體" panose="02020500000000000000" pitchFamily="18" charset="-120"/>
+                        </a:defRPr>
+                      </a:lvl5pPr>
+                      <a:lvl6pPr marL="2152650" fontAlgn="base">
+                        <a:spcBef>
+                          <a:spcPct val="20000"/>
+                        </a:spcBef>
+                        <a:spcAft>
+                          <a:spcPct val="0"/>
+                        </a:spcAft>
+                        <a:defRPr kumimoji="1">
+                          <a:solidFill>
+                            <a:schemeClr val="tx1"/>
+                          </a:solidFill>
+                          <a:latin typeface="Arial" panose="020B0604020202020204" pitchFamily="34" charset="0"/>
+                          <a:ea typeface="新細明體" panose="02020500000000000000" pitchFamily="18" charset="-120"/>
+                        </a:defRPr>
+                      </a:lvl6pPr>
+                      <a:lvl7pPr marL="2609850" fontAlgn="base">
+                        <a:spcBef>
+                          <a:spcPct val="20000"/>
+                        </a:spcBef>
+                        <a:spcAft>
+                          <a:spcPct val="0"/>
+                        </a:spcAft>
+                        <a:defRPr kumimoji="1">
+                          <a:solidFill>
+                            <a:schemeClr val="tx1"/>
+                          </a:solidFill>
+                          <a:latin typeface="Arial" panose="020B0604020202020204" pitchFamily="34" charset="0"/>
+                          <a:ea typeface="新細明體" panose="02020500000000000000" pitchFamily="18" charset="-120"/>
+                        </a:defRPr>
+                      </a:lvl7pPr>
+                      <a:lvl8pPr marL="3067050" fontAlgn="base">
+                        <a:spcBef>
+                          <a:spcPct val="20000"/>
+                        </a:spcBef>
+                        <a:spcAft>
+                          <a:spcPct val="0"/>
+                        </a:spcAft>
+                        <a:defRPr kumimoji="1">
+                          <a:solidFill>
+                            <a:schemeClr val="tx1"/>
+                          </a:solidFill>
+                          <a:latin typeface="Arial" panose="020B0604020202020204" pitchFamily="34" charset="0"/>
+                          <a:ea typeface="新細明體" panose="02020500000000000000" pitchFamily="18" charset="-120"/>
+                        </a:defRPr>
+                      </a:lvl8pPr>
+                      <a:lvl9pPr marL="3524250" fontAlgn="base">
+                        <a:spcBef>
+                          <a:spcPct val="20000"/>
+                        </a:spcBef>
+                        <a:spcAft>
+                          <a:spcPct val="0"/>
+                        </a:spcAft>
+                        <a:defRPr kumimoji="1">
+                          <a:solidFill>
+                            <a:schemeClr val="tx1"/>
+                          </a:solidFill>
+                          <a:latin typeface="Arial" panose="020B0604020202020204" pitchFamily="34" charset="0"/>
+                          <a:ea typeface="新細明體" panose="02020500000000000000" pitchFamily="18" charset="-120"/>
+                        </a:defRPr>
+                      </a:lvl9pPr>
+                    </a:lstStyle>
+                    <a:p>
                       <a:pPr marL="0" marR="0" lvl="0" indent="0" algn="ctr" defTabSz="914400" rtl="0" eaLnBrk="1" fontAlgn="base" latinLnBrk="0" hangingPunct="1">
                         <a:lnSpc>
-                          <a:spcPct val="80000"/>
+                          <a:spcPct val="100000"/>
+                        </a:lnSpc>
+                        <a:spcBef>
+                          <a:spcPct val="20000"/>
+                        </a:spcBef>
+                        <a:spcAft>
+                          <a:spcPct val="0"/>
+                        </a:spcAft>
+                        <a:buClrTx/>
+                        <a:buSzTx/>
+                        <a:buFontTx/>
+                        <a:buNone/>
+                        <a:tabLst/>
+                        <a:defRPr/>
+                      </a:pPr>
+                      <a:r>
+                        <a:rPr kumimoji="1" lang="en-US" altLang="zh-TW" sz="1500" b="1" i="0" u="none" strike="noStrike" cap="none" normalizeH="0" baseline="0" dirty="0">
+                          <a:ln>
+                            <a:noFill/>
+                          </a:ln>
+                          <a:solidFill>
+                            <a:schemeClr val="tx1"/>
+                          </a:solidFill>
+                          <a:effectLst/>
+                          <a:latin typeface="Microsoft YaHei" panose="020B0503020204020204" pitchFamily="34" charset="-122"/>
+                          <a:ea typeface="Microsoft YaHei" panose="020B0503020204020204" pitchFamily="34" charset="-122"/>
+                          <a:cs typeface="Arial Unicode MS" pitchFamily="34" charset="-120"/>
+                        </a:rPr>
+                        <a:t>140</a:t>
+                      </a:r>
+                    </a:p>
+                  </a:txBody>
+                  <a:tcPr marL="36000" marR="36000" marT="18000" marB="18000" anchor="ctr" horzOverflow="overflow"/>
+                </a:tc>
+                <a:tc>
+                  <a:txBody>
+                    <a:bodyPr/>
+                    <a:lstStyle>
+                      <a:lvl1pPr>
+                        <a:spcBef>
+                          <a:spcPct val="20000"/>
+                        </a:spcBef>
+                        <a:defRPr kumimoji="1" sz="2800">
+                          <a:solidFill>
+                            <a:schemeClr val="tx1"/>
+                          </a:solidFill>
+                          <a:latin typeface="Arial" panose="020B0604020202020204" pitchFamily="34" charset="0"/>
+                          <a:ea typeface="新細明體" panose="02020500000000000000" pitchFamily="18" charset="-120"/>
+                        </a:defRPr>
+                      </a:lvl1pPr>
+                      <a:lvl2pPr marL="471488">
+                        <a:spcBef>
+                          <a:spcPct val="20000"/>
+                        </a:spcBef>
+                        <a:defRPr kumimoji="1" sz="2400">
+                          <a:solidFill>
+                            <a:schemeClr val="tx1"/>
+                          </a:solidFill>
+                          <a:latin typeface="Arial" panose="020B0604020202020204" pitchFamily="34" charset="0"/>
+                          <a:ea typeface="新細明體" panose="02020500000000000000" pitchFamily="18" charset="-120"/>
+                        </a:defRPr>
+                      </a:lvl2pPr>
+                      <a:lvl3pPr marL="909638">
+                        <a:spcBef>
+                          <a:spcPct val="20000"/>
+                        </a:spcBef>
+                        <a:defRPr kumimoji="1" sz="2000">
+                          <a:solidFill>
+                            <a:schemeClr val="tx1"/>
+                          </a:solidFill>
+                          <a:latin typeface="Arial" panose="020B0604020202020204" pitchFamily="34" charset="0"/>
+                          <a:ea typeface="新細明體" panose="02020500000000000000" pitchFamily="18" charset="-120"/>
+                        </a:defRPr>
+                      </a:lvl3pPr>
+                      <a:lvl4pPr marL="1306513">
+                        <a:spcBef>
+                          <a:spcPct val="20000"/>
+                        </a:spcBef>
+                        <a:defRPr kumimoji="1">
+                          <a:solidFill>
+                            <a:schemeClr val="tx1"/>
+                          </a:solidFill>
+                          <a:latin typeface="Arial" panose="020B0604020202020204" pitchFamily="34" charset="0"/>
+                          <a:ea typeface="新細明體" panose="02020500000000000000" pitchFamily="18" charset="-120"/>
+                        </a:defRPr>
+                      </a:lvl4pPr>
+                      <a:lvl5pPr marL="1695450">
+                        <a:spcBef>
+                          <a:spcPct val="20000"/>
+                        </a:spcBef>
+                        <a:defRPr kumimoji="1">
+                          <a:solidFill>
+                            <a:schemeClr val="tx1"/>
+                          </a:solidFill>
+                          <a:latin typeface="Arial" panose="020B0604020202020204" pitchFamily="34" charset="0"/>
+                          <a:ea typeface="新細明體" panose="02020500000000000000" pitchFamily="18" charset="-120"/>
+                        </a:defRPr>
+                      </a:lvl5pPr>
+                      <a:lvl6pPr marL="2152650" fontAlgn="base">
+                        <a:spcBef>
+                          <a:spcPct val="20000"/>
+                        </a:spcBef>
+                        <a:spcAft>
+                          <a:spcPct val="0"/>
+                        </a:spcAft>
+                        <a:defRPr kumimoji="1">
+                          <a:solidFill>
+                            <a:schemeClr val="tx1"/>
+                          </a:solidFill>
+                          <a:latin typeface="Arial" panose="020B0604020202020204" pitchFamily="34" charset="0"/>
+                          <a:ea typeface="新細明體" panose="02020500000000000000" pitchFamily="18" charset="-120"/>
+                        </a:defRPr>
+                      </a:lvl6pPr>
+                      <a:lvl7pPr marL="2609850" fontAlgn="base">
+                        <a:spcBef>
+                          <a:spcPct val="20000"/>
+                        </a:spcBef>
+                        <a:spcAft>
+                          <a:spcPct val="0"/>
+                        </a:spcAft>
+                        <a:defRPr kumimoji="1">
+                          <a:solidFill>
+                            <a:schemeClr val="tx1"/>
+                          </a:solidFill>
+                          <a:latin typeface="Arial" panose="020B0604020202020204" pitchFamily="34" charset="0"/>
+                          <a:ea typeface="新細明體" panose="02020500000000000000" pitchFamily="18" charset="-120"/>
+                        </a:defRPr>
+                      </a:lvl7pPr>
+                      <a:lvl8pPr marL="3067050" fontAlgn="base">
+                        <a:spcBef>
+                          <a:spcPct val="20000"/>
+                        </a:spcBef>
+                        <a:spcAft>
+                          <a:spcPct val="0"/>
+                        </a:spcAft>
+                        <a:defRPr kumimoji="1">
+                          <a:solidFill>
+                            <a:schemeClr val="tx1"/>
+                          </a:solidFill>
+                          <a:latin typeface="Arial" panose="020B0604020202020204" pitchFamily="34" charset="0"/>
+                          <a:ea typeface="新細明體" panose="02020500000000000000" pitchFamily="18" charset="-120"/>
+                        </a:defRPr>
+                      </a:lvl8pPr>
+                      <a:lvl9pPr marL="3524250" fontAlgn="base">
+                        <a:spcBef>
+                          <a:spcPct val="20000"/>
+                        </a:spcBef>
+                        <a:spcAft>
+                          <a:spcPct val="0"/>
+                        </a:spcAft>
+                        <a:defRPr kumimoji="1">
+                          <a:solidFill>
+                            <a:schemeClr val="tx1"/>
+                          </a:solidFill>
+                          <a:latin typeface="Arial" panose="020B0604020202020204" pitchFamily="34" charset="0"/>
+                          <a:ea typeface="新細明體" panose="02020500000000000000" pitchFamily="18" charset="-120"/>
+                        </a:defRPr>
+                      </a:lvl9pPr>
+                    </a:lstStyle>
+                    <a:p>
+                      <a:pPr marL="0" marR="0" lvl="0" indent="0" algn="ctr" defTabSz="914400" rtl="0" eaLnBrk="1" fontAlgn="base" latinLnBrk="0" hangingPunct="1">
+                        <a:lnSpc>
+                          <a:spcPct val="100000"/>
                         </a:lnSpc>
                         <a:spcBef>
                           <a:spcPct val="20000"/>
@@ -7211,6 +7854,1456 @@
                         <a:buNone/>
                         <a:tabLst/>
                       </a:pPr>
+                      <a:r>
+                        <a:rPr kumimoji="1" lang="en-US" altLang="zh-TW" sz="1500" b="1" i="0" u="none" strike="noStrike" cap="none" normalizeH="0" baseline="0" dirty="0">
+                          <a:ln>
+                            <a:noFill/>
+                          </a:ln>
+                          <a:solidFill>
+                            <a:schemeClr val="tx1"/>
+                          </a:solidFill>
+                          <a:effectLst/>
+                          <a:latin typeface="Microsoft YaHei" panose="020B0503020204020204" pitchFamily="34" charset="-122"/>
+                          <a:ea typeface="Microsoft YaHei" panose="020B0503020204020204" pitchFamily="34" charset="-122"/>
+                          <a:cs typeface="Arial Unicode MS" pitchFamily="34" charset="-120"/>
+                        </a:rPr>
+                        <a:t>140</a:t>
+                      </a:r>
+                    </a:p>
+                  </a:txBody>
+                  <a:tcPr marL="36000" marR="36000" marT="18000" marB="18000" anchor="ctr" horzOverflow="overflow"/>
+                </a:tc>
+                <a:tc>
+                  <a:txBody>
+                    <a:bodyPr/>
+                    <a:lstStyle>
+                      <a:lvl1pPr>
+                        <a:spcBef>
+                          <a:spcPct val="20000"/>
+                        </a:spcBef>
+                        <a:defRPr kumimoji="1" sz="2800">
+                          <a:solidFill>
+                            <a:schemeClr val="tx1"/>
+                          </a:solidFill>
+                          <a:latin typeface="Arial" panose="020B0604020202020204" pitchFamily="34" charset="0"/>
+                          <a:ea typeface="新細明體" panose="02020500000000000000" pitchFamily="18" charset="-120"/>
+                        </a:defRPr>
+                      </a:lvl1pPr>
+                      <a:lvl2pPr marL="471488">
+                        <a:spcBef>
+                          <a:spcPct val="20000"/>
+                        </a:spcBef>
+                        <a:defRPr kumimoji="1" sz="2400">
+                          <a:solidFill>
+                            <a:schemeClr val="tx1"/>
+                          </a:solidFill>
+                          <a:latin typeface="Arial" panose="020B0604020202020204" pitchFamily="34" charset="0"/>
+                          <a:ea typeface="新細明體" panose="02020500000000000000" pitchFamily="18" charset="-120"/>
+                        </a:defRPr>
+                      </a:lvl2pPr>
+                      <a:lvl3pPr marL="909638">
+                        <a:spcBef>
+                          <a:spcPct val="20000"/>
+                        </a:spcBef>
+                        <a:defRPr kumimoji="1" sz="2000">
+                          <a:solidFill>
+                            <a:schemeClr val="tx1"/>
+                          </a:solidFill>
+                          <a:latin typeface="Arial" panose="020B0604020202020204" pitchFamily="34" charset="0"/>
+                          <a:ea typeface="新細明體" panose="02020500000000000000" pitchFamily="18" charset="-120"/>
+                        </a:defRPr>
+                      </a:lvl3pPr>
+                      <a:lvl4pPr marL="1306513">
+                        <a:spcBef>
+                          <a:spcPct val="20000"/>
+                        </a:spcBef>
+                        <a:defRPr kumimoji="1">
+                          <a:solidFill>
+                            <a:schemeClr val="tx1"/>
+                          </a:solidFill>
+                          <a:latin typeface="Arial" panose="020B0604020202020204" pitchFamily="34" charset="0"/>
+                          <a:ea typeface="新細明體" panose="02020500000000000000" pitchFamily="18" charset="-120"/>
+                        </a:defRPr>
+                      </a:lvl4pPr>
+                      <a:lvl5pPr marL="1695450">
+                        <a:spcBef>
+                          <a:spcPct val="20000"/>
+                        </a:spcBef>
+                        <a:defRPr kumimoji="1">
+                          <a:solidFill>
+                            <a:schemeClr val="tx1"/>
+                          </a:solidFill>
+                          <a:latin typeface="Arial" panose="020B0604020202020204" pitchFamily="34" charset="0"/>
+                          <a:ea typeface="新細明體" panose="02020500000000000000" pitchFamily="18" charset="-120"/>
+                        </a:defRPr>
+                      </a:lvl5pPr>
+                      <a:lvl6pPr marL="2152650" fontAlgn="base">
+                        <a:spcBef>
+                          <a:spcPct val="20000"/>
+                        </a:spcBef>
+                        <a:spcAft>
+                          <a:spcPct val="0"/>
+                        </a:spcAft>
+                        <a:defRPr kumimoji="1">
+                          <a:solidFill>
+                            <a:schemeClr val="tx1"/>
+                          </a:solidFill>
+                          <a:latin typeface="Arial" panose="020B0604020202020204" pitchFamily="34" charset="0"/>
+                          <a:ea typeface="新細明體" panose="02020500000000000000" pitchFamily="18" charset="-120"/>
+                        </a:defRPr>
+                      </a:lvl6pPr>
+                      <a:lvl7pPr marL="2609850" fontAlgn="base">
+                        <a:spcBef>
+                          <a:spcPct val="20000"/>
+                        </a:spcBef>
+                        <a:spcAft>
+                          <a:spcPct val="0"/>
+                        </a:spcAft>
+                        <a:defRPr kumimoji="1">
+                          <a:solidFill>
+                            <a:schemeClr val="tx1"/>
+                          </a:solidFill>
+                          <a:latin typeface="Arial" panose="020B0604020202020204" pitchFamily="34" charset="0"/>
+                          <a:ea typeface="新細明體" panose="02020500000000000000" pitchFamily="18" charset="-120"/>
+                        </a:defRPr>
+                      </a:lvl7pPr>
+                      <a:lvl8pPr marL="3067050" fontAlgn="base">
+                        <a:spcBef>
+                          <a:spcPct val="20000"/>
+                        </a:spcBef>
+                        <a:spcAft>
+                          <a:spcPct val="0"/>
+                        </a:spcAft>
+                        <a:defRPr kumimoji="1">
+                          <a:solidFill>
+                            <a:schemeClr val="tx1"/>
+                          </a:solidFill>
+                          <a:latin typeface="Arial" panose="020B0604020202020204" pitchFamily="34" charset="0"/>
+                          <a:ea typeface="新細明體" panose="02020500000000000000" pitchFamily="18" charset="-120"/>
+                        </a:defRPr>
+                      </a:lvl8pPr>
+                      <a:lvl9pPr marL="3524250" fontAlgn="base">
+                        <a:spcBef>
+                          <a:spcPct val="20000"/>
+                        </a:spcBef>
+                        <a:spcAft>
+                          <a:spcPct val="0"/>
+                        </a:spcAft>
+                        <a:defRPr kumimoji="1">
+                          <a:solidFill>
+                            <a:schemeClr val="tx1"/>
+                          </a:solidFill>
+                          <a:latin typeface="Arial" panose="020B0604020202020204" pitchFamily="34" charset="0"/>
+                          <a:ea typeface="新細明體" panose="02020500000000000000" pitchFamily="18" charset="-120"/>
+                        </a:defRPr>
+                      </a:lvl9pPr>
+                    </a:lstStyle>
+                    <a:p>
+                      <a:pPr marL="0" marR="0" lvl="0" indent="0" algn="ctr" defTabSz="914400" rtl="0" eaLnBrk="1" fontAlgn="base" latinLnBrk="0" hangingPunct="1">
+                        <a:lnSpc>
+                          <a:spcPct val="100000"/>
+                        </a:lnSpc>
+                        <a:spcBef>
+                          <a:spcPct val="20000"/>
+                        </a:spcBef>
+                        <a:spcAft>
+                          <a:spcPct val="0"/>
+                        </a:spcAft>
+                        <a:buClrTx/>
+                        <a:buSzTx/>
+                        <a:buFontTx/>
+                        <a:buNone/>
+                        <a:tabLst/>
+                      </a:pPr>
+                      <a:r>
+                        <a:rPr kumimoji="1" lang="en-US" altLang="zh-TW" sz="1500" b="1" i="0" u="none" strike="noStrike" cap="none" normalizeH="0" baseline="0" dirty="0">
+                          <a:ln>
+                            <a:noFill/>
+                          </a:ln>
+                          <a:solidFill>
+                            <a:schemeClr val="tx1"/>
+                          </a:solidFill>
+                          <a:effectLst/>
+                          <a:latin typeface="Microsoft YaHei" panose="020B0503020204020204" pitchFamily="34" charset="-122"/>
+                          <a:ea typeface="Microsoft YaHei" panose="020B0503020204020204" pitchFamily="34" charset="-122"/>
+                          <a:cs typeface="Arial Unicode MS" pitchFamily="34" charset="-120"/>
+                        </a:rPr>
+                        <a:t>130</a:t>
+                      </a:r>
+                    </a:p>
+                  </a:txBody>
+                  <a:tcPr marL="36000" marR="36000" marT="18000" marB="18000" anchor="ctr" horzOverflow="overflow"/>
+                </a:tc>
+                <a:tc>
+                  <a:txBody>
+                    <a:bodyPr/>
+                    <a:lstStyle>
+                      <a:lvl1pPr>
+                        <a:spcBef>
+                          <a:spcPct val="20000"/>
+                        </a:spcBef>
+                        <a:defRPr kumimoji="1" sz="2800">
+                          <a:solidFill>
+                            <a:schemeClr val="tx1"/>
+                          </a:solidFill>
+                          <a:latin typeface="Arial" panose="020B0604020202020204" pitchFamily="34" charset="0"/>
+                          <a:ea typeface="新細明體" panose="02020500000000000000" pitchFamily="18" charset="-120"/>
+                        </a:defRPr>
+                      </a:lvl1pPr>
+                      <a:lvl2pPr marL="471488">
+                        <a:spcBef>
+                          <a:spcPct val="20000"/>
+                        </a:spcBef>
+                        <a:defRPr kumimoji="1" sz="2400">
+                          <a:solidFill>
+                            <a:schemeClr val="tx1"/>
+                          </a:solidFill>
+                          <a:latin typeface="Arial" panose="020B0604020202020204" pitchFamily="34" charset="0"/>
+                          <a:ea typeface="新細明體" panose="02020500000000000000" pitchFamily="18" charset="-120"/>
+                        </a:defRPr>
+                      </a:lvl2pPr>
+                      <a:lvl3pPr marL="909638">
+                        <a:spcBef>
+                          <a:spcPct val="20000"/>
+                        </a:spcBef>
+                        <a:defRPr kumimoji="1" sz="2000">
+                          <a:solidFill>
+                            <a:schemeClr val="tx1"/>
+                          </a:solidFill>
+                          <a:latin typeface="Arial" panose="020B0604020202020204" pitchFamily="34" charset="0"/>
+                          <a:ea typeface="新細明體" panose="02020500000000000000" pitchFamily="18" charset="-120"/>
+                        </a:defRPr>
+                      </a:lvl3pPr>
+                      <a:lvl4pPr marL="1306513">
+                        <a:spcBef>
+                          <a:spcPct val="20000"/>
+                        </a:spcBef>
+                        <a:defRPr kumimoji="1">
+                          <a:solidFill>
+                            <a:schemeClr val="tx1"/>
+                          </a:solidFill>
+                          <a:latin typeface="Arial" panose="020B0604020202020204" pitchFamily="34" charset="0"/>
+                          <a:ea typeface="新細明體" panose="02020500000000000000" pitchFamily="18" charset="-120"/>
+                        </a:defRPr>
+                      </a:lvl4pPr>
+                      <a:lvl5pPr marL="1695450">
+                        <a:spcBef>
+                          <a:spcPct val="20000"/>
+                        </a:spcBef>
+                        <a:defRPr kumimoji="1">
+                          <a:solidFill>
+                            <a:schemeClr val="tx1"/>
+                          </a:solidFill>
+                          <a:latin typeface="Arial" panose="020B0604020202020204" pitchFamily="34" charset="0"/>
+                          <a:ea typeface="新細明體" panose="02020500000000000000" pitchFamily="18" charset="-120"/>
+                        </a:defRPr>
+                      </a:lvl5pPr>
+                      <a:lvl6pPr marL="2152650" fontAlgn="base">
+                        <a:spcBef>
+                          <a:spcPct val="20000"/>
+                        </a:spcBef>
+                        <a:spcAft>
+                          <a:spcPct val="0"/>
+                        </a:spcAft>
+                        <a:defRPr kumimoji="1">
+                          <a:solidFill>
+                            <a:schemeClr val="tx1"/>
+                          </a:solidFill>
+                          <a:latin typeface="Arial" panose="020B0604020202020204" pitchFamily="34" charset="0"/>
+                          <a:ea typeface="新細明體" panose="02020500000000000000" pitchFamily="18" charset="-120"/>
+                        </a:defRPr>
+                      </a:lvl6pPr>
+                      <a:lvl7pPr marL="2609850" fontAlgn="base">
+                        <a:spcBef>
+                          <a:spcPct val="20000"/>
+                        </a:spcBef>
+                        <a:spcAft>
+                          <a:spcPct val="0"/>
+                        </a:spcAft>
+                        <a:defRPr kumimoji="1">
+                          <a:solidFill>
+                            <a:schemeClr val="tx1"/>
+                          </a:solidFill>
+                          <a:latin typeface="Arial" panose="020B0604020202020204" pitchFamily="34" charset="0"/>
+                          <a:ea typeface="新細明體" panose="02020500000000000000" pitchFamily="18" charset="-120"/>
+                        </a:defRPr>
+                      </a:lvl7pPr>
+                      <a:lvl8pPr marL="3067050" fontAlgn="base">
+                        <a:spcBef>
+                          <a:spcPct val="20000"/>
+                        </a:spcBef>
+                        <a:spcAft>
+                          <a:spcPct val="0"/>
+                        </a:spcAft>
+                        <a:defRPr kumimoji="1">
+                          <a:solidFill>
+                            <a:schemeClr val="tx1"/>
+                          </a:solidFill>
+                          <a:latin typeface="Arial" panose="020B0604020202020204" pitchFamily="34" charset="0"/>
+                          <a:ea typeface="新細明體" panose="02020500000000000000" pitchFamily="18" charset="-120"/>
+                        </a:defRPr>
+                      </a:lvl8pPr>
+                      <a:lvl9pPr marL="3524250" fontAlgn="base">
+                        <a:spcBef>
+                          <a:spcPct val="20000"/>
+                        </a:spcBef>
+                        <a:spcAft>
+                          <a:spcPct val="0"/>
+                        </a:spcAft>
+                        <a:defRPr kumimoji="1">
+                          <a:solidFill>
+                            <a:schemeClr val="tx1"/>
+                          </a:solidFill>
+                          <a:latin typeface="Arial" panose="020B0604020202020204" pitchFamily="34" charset="0"/>
+                          <a:ea typeface="新細明體" panose="02020500000000000000" pitchFamily="18" charset="-120"/>
+                        </a:defRPr>
+                      </a:lvl9pPr>
+                    </a:lstStyle>
+                    <a:p>
+                      <a:pPr marL="0" marR="0" lvl="0" indent="0" algn="ctr" defTabSz="914400" rtl="0" eaLnBrk="1" fontAlgn="base" latinLnBrk="0" hangingPunct="1">
+                        <a:lnSpc>
+                          <a:spcPct val="100000"/>
+                        </a:lnSpc>
+                        <a:spcBef>
+                          <a:spcPct val="20000"/>
+                        </a:spcBef>
+                        <a:spcAft>
+                          <a:spcPct val="0"/>
+                        </a:spcAft>
+                        <a:buClrTx/>
+                        <a:buSzTx/>
+                        <a:buFontTx/>
+                        <a:buNone/>
+                        <a:tabLst/>
+                      </a:pPr>
+                      <a:r>
+                        <a:rPr kumimoji="1" lang="en-US" altLang="zh-TW" sz="1500" b="1" i="0" u="none" strike="noStrike" cap="none" normalizeH="0" baseline="0" dirty="0">
+                          <a:ln>
+                            <a:noFill/>
+                          </a:ln>
+                          <a:solidFill>
+                            <a:schemeClr val="tx1"/>
+                          </a:solidFill>
+                          <a:effectLst/>
+                          <a:latin typeface="Microsoft YaHei" panose="020B0503020204020204" pitchFamily="34" charset="-122"/>
+                          <a:ea typeface="Microsoft YaHei" panose="020B0503020204020204" pitchFamily="34" charset="-122"/>
+                          <a:cs typeface="Arial Unicode MS" pitchFamily="34" charset="-120"/>
+                        </a:rPr>
+                        <a:t>270</a:t>
+                      </a:r>
+                    </a:p>
+                  </a:txBody>
+                  <a:tcPr marL="36000" marR="36000" marT="18000" marB="18000" anchor="ctr" horzOverflow="overflow"/>
+                </a:tc>
+                <a:tc>
+                  <a:txBody>
+                    <a:bodyPr/>
+                    <a:lstStyle>
+                      <a:lvl1pPr>
+                        <a:spcBef>
+                          <a:spcPct val="20000"/>
+                        </a:spcBef>
+                        <a:defRPr kumimoji="1" sz="2800">
+                          <a:solidFill>
+                            <a:schemeClr val="tx1"/>
+                          </a:solidFill>
+                          <a:latin typeface="Arial" panose="020B0604020202020204" pitchFamily="34" charset="0"/>
+                          <a:ea typeface="新細明體" panose="02020500000000000000" pitchFamily="18" charset="-120"/>
+                        </a:defRPr>
+                      </a:lvl1pPr>
+                      <a:lvl2pPr marL="471488">
+                        <a:spcBef>
+                          <a:spcPct val="20000"/>
+                        </a:spcBef>
+                        <a:defRPr kumimoji="1" sz="2400">
+                          <a:solidFill>
+                            <a:schemeClr val="tx1"/>
+                          </a:solidFill>
+                          <a:latin typeface="Arial" panose="020B0604020202020204" pitchFamily="34" charset="0"/>
+                          <a:ea typeface="新細明體" panose="02020500000000000000" pitchFamily="18" charset="-120"/>
+                        </a:defRPr>
+                      </a:lvl2pPr>
+                      <a:lvl3pPr marL="909638">
+                        <a:spcBef>
+                          <a:spcPct val="20000"/>
+                        </a:spcBef>
+                        <a:defRPr kumimoji="1" sz="2000">
+                          <a:solidFill>
+                            <a:schemeClr val="tx1"/>
+                          </a:solidFill>
+                          <a:latin typeface="Arial" panose="020B0604020202020204" pitchFamily="34" charset="0"/>
+                          <a:ea typeface="新細明體" panose="02020500000000000000" pitchFamily="18" charset="-120"/>
+                        </a:defRPr>
+                      </a:lvl3pPr>
+                      <a:lvl4pPr marL="1306513">
+                        <a:spcBef>
+                          <a:spcPct val="20000"/>
+                        </a:spcBef>
+                        <a:defRPr kumimoji="1">
+                          <a:solidFill>
+                            <a:schemeClr val="tx1"/>
+                          </a:solidFill>
+                          <a:latin typeface="Arial" panose="020B0604020202020204" pitchFamily="34" charset="0"/>
+                          <a:ea typeface="新細明體" panose="02020500000000000000" pitchFamily="18" charset="-120"/>
+                        </a:defRPr>
+                      </a:lvl4pPr>
+                      <a:lvl5pPr marL="1695450">
+                        <a:spcBef>
+                          <a:spcPct val="20000"/>
+                        </a:spcBef>
+                        <a:defRPr kumimoji="1">
+                          <a:solidFill>
+                            <a:schemeClr val="tx1"/>
+                          </a:solidFill>
+                          <a:latin typeface="Arial" panose="020B0604020202020204" pitchFamily="34" charset="0"/>
+                          <a:ea typeface="新細明體" panose="02020500000000000000" pitchFamily="18" charset="-120"/>
+                        </a:defRPr>
+                      </a:lvl5pPr>
+                      <a:lvl6pPr marL="2152650" fontAlgn="base">
+                        <a:spcBef>
+                          <a:spcPct val="20000"/>
+                        </a:spcBef>
+                        <a:spcAft>
+                          <a:spcPct val="0"/>
+                        </a:spcAft>
+                        <a:defRPr kumimoji="1">
+                          <a:solidFill>
+                            <a:schemeClr val="tx1"/>
+                          </a:solidFill>
+                          <a:latin typeface="Arial" panose="020B0604020202020204" pitchFamily="34" charset="0"/>
+                          <a:ea typeface="新細明體" panose="02020500000000000000" pitchFamily="18" charset="-120"/>
+                        </a:defRPr>
+                      </a:lvl6pPr>
+                      <a:lvl7pPr marL="2609850" fontAlgn="base">
+                        <a:spcBef>
+                          <a:spcPct val="20000"/>
+                        </a:spcBef>
+                        <a:spcAft>
+                          <a:spcPct val="0"/>
+                        </a:spcAft>
+                        <a:defRPr kumimoji="1">
+                          <a:solidFill>
+                            <a:schemeClr val="tx1"/>
+                          </a:solidFill>
+                          <a:latin typeface="Arial" panose="020B0604020202020204" pitchFamily="34" charset="0"/>
+                          <a:ea typeface="新細明體" panose="02020500000000000000" pitchFamily="18" charset="-120"/>
+                        </a:defRPr>
+                      </a:lvl7pPr>
+                      <a:lvl8pPr marL="3067050" fontAlgn="base">
+                        <a:spcBef>
+                          <a:spcPct val="20000"/>
+                        </a:spcBef>
+                        <a:spcAft>
+                          <a:spcPct val="0"/>
+                        </a:spcAft>
+                        <a:defRPr kumimoji="1">
+                          <a:solidFill>
+                            <a:schemeClr val="tx1"/>
+                          </a:solidFill>
+                          <a:latin typeface="Arial" panose="020B0604020202020204" pitchFamily="34" charset="0"/>
+                          <a:ea typeface="新細明體" panose="02020500000000000000" pitchFamily="18" charset="-120"/>
+                        </a:defRPr>
+                      </a:lvl8pPr>
+                      <a:lvl9pPr marL="3524250" fontAlgn="base">
+                        <a:spcBef>
+                          <a:spcPct val="20000"/>
+                        </a:spcBef>
+                        <a:spcAft>
+                          <a:spcPct val="0"/>
+                        </a:spcAft>
+                        <a:defRPr kumimoji="1">
+                          <a:solidFill>
+                            <a:schemeClr val="tx1"/>
+                          </a:solidFill>
+                          <a:latin typeface="Arial" panose="020B0604020202020204" pitchFamily="34" charset="0"/>
+                          <a:ea typeface="新細明體" panose="02020500000000000000" pitchFamily="18" charset="-120"/>
+                        </a:defRPr>
+                      </a:lvl9pPr>
+                    </a:lstStyle>
+                    <a:p>
+                      <a:pPr marL="0" marR="0" lvl="0" indent="0" algn="ctr" defTabSz="914400" rtl="0" eaLnBrk="1" fontAlgn="base" latinLnBrk="0" hangingPunct="1">
+                        <a:lnSpc>
+                          <a:spcPct val="100000"/>
+                        </a:lnSpc>
+                        <a:spcBef>
+                          <a:spcPct val="20000"/>
+                        </a:spcBef>
+                        <a:spcAft>
+                          <a:spcPct val="0"/>
+                        </a:spcAft>
+                        <a:buClrTx/>
+                        <a:buSzTx/>
+                        <a:buFontTx/>
+                        <a:buNone/>
+                        <a:tabLst/>
+                        <a:defRPr/>
+                      </a:pPr>
+                      <a:r>
+                        <a:rPr kumimoji="1" lang="en-US" altLang="zh-TW" sz="1500" b="1" i="0" u="none" strike="noStrike" cap="none" normalizeH="0" baseline="0" dirty="0">
+                          <a:ln>
+                            <a:noFill/>
+                          </a:ln>
+                          <a:solidFill>
+                            <a:schemeClr val="tx1"/>
+                          </a:solidFill>
+                          <a:effectLst/>
+                          <a:latin typeface="Microsoft YaHei" panose="020B0503020204020204" pitchFamily="34" charset="-122"/>
+                          <a:ea typeface="Microsoft YaHei" panose="020B0503020204020204" pitchFamily="34" charset="-122"/>
+                          <a:cs typeface="Arial Unicode MS" pitchFamily="34" charset="-120"/>
+                        </a:rPr>
+                        <a:t>140</a:t>
+                      </a:r>
+                    </a:p>
+                  </a:txBody>
+                  <a:tcPr marL="36000" marR="36000" marT="18000" marB="18000" anchor="ctr" horzOverflow="overflow"/>
+                </a:tc>
+                <a:tc>
+                  <a:txBody>
+                    <a:bodyPr/>
+                    <a:lstStyle>
+                      <a:lvl1pPr>
+                        <a:spcBef>
+                          <a:spcPct val="20000"/>
+                        </a:spcBef>
+                        <a:defRPr kumimoji="1" sz="2800">
+                          <a:solidFill>
+                            <a:schemeClr val="tx1"/>
+                          </a:solidFill>
+                          <a:latin typeface="Arial" panose="020B0604020202020204" pitchFamily="34" charset="0"/>
+                          <a:ea typeface="新細明體" panose="02020500000000000000" pitchFamily="18" charset="-120"/>
+                        </a:defRPr>
+                      </a:lvl1pPr>
+                      <a:lvl2pPr marL="471488">
+                        <a:spcBef>
+                          <a:spcPct val="20000"/>
+                        </a:spcBef>
+                        <a:defRPr kumimoji="1" sz="2400">
+                          <a:solidFill>
+                            <a:schemeClr val="tx1"/>
+                          </a:solidFill>
+                          <a:latin typeface="Arial" panose="020B0604020202020204" pitchFamily="34" charset="0"/>
+                          <a:ea typeface="新細明體" panose="02020500000000000000" pitchFamily="18" charset="-120"/>
+                        </a:defRPr>
+                      </a:lvl2pPr>
+                      <a:lvl3pPr marL="909638">
+                        <a:spcBef>
+                          <a:spcPct val="20000"/>
+                        </a:spcBef>
+                        <a:defRPr kumimoji="1" sz="2000">
+                          <a:solidFill>
+                            <a:schemeClr val="tx1"/>
+                          </a:solidFill>
+                          <a:latin typeface="Arial" panose="020B0604020202020204" pitchFamily="34" charset="0"/>
+                          <a:ea typeface="新細明體" panose="02020500000000000000" pitchFamily="18" charset="-120"/>
+                        </a:defRPr>
+                      </a:lvl3pPr>
+                      <a:lvl4pPr marL="1306513">
+                        <a:spcBef>
+                          <a:spcPct val="20000"/>
+                        </a:spcBef>
+                        <a:defRPr kumimoji="1">
+                          <a:solidFill>
+                            <a:schemeClr val="tx1"/>
+                          </a:solidFill>
+                          <a:latin typeface="Arial" panose="020B0604020202020204" pitchFamily="34" charset="0"/>
+                          <a:ea typeface="新細明體" panose="02020500000000000000" pitchFamily="18" charset="-120"/>
+                        </a:defRPr>
+                      </a:lvl4pPr>
+                      <a:lvl5pPr marL="1695450">
+                        <a:spcBef>
+                          <a:spcPct val="20000"/>
+                        </a:spcBef>
+                        <a:defRPr kumimoji="1">
+                          <a:solidFill>
+                            <a:schemeClr val="tx1"/>
+                          </a:solidFill>
+                          <a:latin typeface="Arial" panose="020B0604020202020204" pitchFamily="34" charset="0"/>
+                          <a:ea typeface="新細明體" panose="02020500000000000000" pitchFamily="18" charset="-120"/>
+                        </a:defRPr>
+                      </a:lvl5pPr>
+                      <a:lvl6pPr marL="2152650" fontAlgn="base">
+                        <a:spcBef>
+                          <a:spcPct val="20000"/>
+                        </a:spcBef>
+                        <a:spcAft>
+                          <a:spcPct val="0"/>
+                        </a:spcAft>
+                        <a:defRPr kumimoji="1">
+                          <a:solidFill>
+                            <a:schemeClr val="tx1"/>
+                          </a:solidFill>
+                          <a:latin typeface="Arial" panose="020B0604020202020204" pitchFamily="34" charset="0"/>
+                          <a:ea typeface="新細明體" panose="02020500000000000000" pitchFamily="18" charset="-120"/>
+                        </a:defRPr>
+                      </a:lvl6pPr>
+                      <a:lvl7pPr marL="2609850" fontAlgn="base">
+                        <a:spcBef>
+                          <a:spcPct val="20000"/>
+                        </a:spcBef>
+                        <a:spcAft>
+                          <a:spcPct val="0"/>
+                        </a:spcAft>
+                        <a:defRPr kumimoji="1">
+                          <a:solidFill>
+                            <a:schemeClr val="tx1"/>
+                          </a:solidFill>
+                          <a:latin typeface="Arial" panose="020B0604020202020204" pitchFamily="34" charset="0"/>
+                          <a:ea typeface="新細明體" panose="02020500000000000000" pitchFamily="18" charset="-120"/>
+                        </a:defRPr>
+                      </a:lvl7pPr>
+                      <a:lvl8pPr marL="3067050" fontAlgn="base">
+                        <a:spcBef>
+                          <a:spcPct val="20000"/>
+                        </a:spcBef>
+                        <a:spcAft>
+                          <a:spcPct val="0"/>
+                        </a:spcAft>
+                        <a:defRPr kumimoji="1">
+                          <a:solidFill>
+                            <a:schemeClr val="tx1"/>
+                          </a:solidFill>
+                          <a:latin typeface="Arial" panose="020B0604020202020204" pitchFamily="34" charset="0"/>
+                          <a:ea typeface="新細明體" panose="02020500000000000000" pitchFamily="18" charset="-120"/>
+                        </a:defRPr>
+                      </a:lvl8pPr>
+                      <a:lvl9pPr marL="3524250" fontAlgn="base">
+                        <a:spcBef>
+                          <a:spcPct val="20000"/>
+                        </a:spcBef>
+                        <a:spcAft>
+                          <a:spcPct val="0"/>
+                        </a:spcAft>
+                        <a:defRPr kumimoji="1">
+                          <a:solidFill>
+                            <a:schemeClr val="tx1"/>
+                          </a:solidFill>
+                          <a:latin typeface="Arial" panose="020B0604020202020204" pitchFamily="34" charset="0"/>
+                          <a:ea typeface="新細明體" panose="02020500000000000000" pitchFamily="18" charset="-120"/>
+                        </a:defRPr>
+                      </a:lvl9pPr>
+                    </a:lstStyle>
+                    <a:p>
+                      <a:pPr marL="0" marR="0" lvl="0" indent="0" algn="ctr" defTabSz="914400" rtl="0" eaLnBrk="1" fontAlgn="base" latinLnBrk="0" hangingPunct="1">
+                        <a:lnSpc>
+                          <a:spcPct val="100000"/>
+                        </a:lnSpc>
+                        <a:spcBef>
+                          <a:spcPct val="20000"/>
+                        </a:spcBef>
+                        <a:spcAft>
+                          <a:spcPct val="0"/>
+                        </a:spcAft>
+                        <a:buClrTx/>
+                        <a:buSzTx/>
+                        <a:buFontTx/>
+                        <a:buNone/>
+                        <a:tabLst/>
+                      </a:pPr>
+                      <a:r>
+                        <a:rPr kumimoji="1" lang="en-US" altLang="zh-TW" sz="1500" b="1" i="0" u="none" strike="noStrike" cap="none" normalizeH="0" baseline="0" dirty="0">
+                          <a:ln>
+                            <a:noFill/>
+                          </a:ln>
+                          <a:solidFill>
+                            <a:schemeClr val="tx1"/>
+                          </a:solidFill>
+                          <a:effectLst/>
+                          <a:latin typeface="Microsoft YaHei" panose="020B0503020204020204" pitchFamily="34" charset="-122"/>
+                          <a:ea typeface="Microsoft YaHei" panose="020B0503020204020204" pitchFamily="34" charset="-122"/>
+                          <a:cs typeface="Arial Unicode MS" pitchFamily="34" charset="-120"/>
+                        </a:rPr>
+                        <a:t>80</a:t>
+                      </a:r>
+                    </a:p>
+                  </a:txBody>
+                  <a:tcPr marL="36000" marR="36000" marT="18000" marB="18000" anchor="ctr" horzOverflow="overflow"/>
+                </a:tc>
+                <a:tc>
+                  <a:txBody>
+                    <a:bodyPr/>
+                    <a:lstStyle>
+                      <a:lvl1pPr>
+                        <a:spcBef>
+                          <a:spcPct val="20000"/>
+                        </a:spcBef>
+                        <a:defRPr kumimoji="1" sz="2800">
+                          <a:solidFill>
+                            <a:schemeClr val="tx1"/>
+                          </a:solidFill>
+                          <a:latin typeface="Arial" panose="020B0604020202020204" pitchFamily="34" charset="0"/>
+                          <a:ea typeface="新細明體" panose="02020500000000000000" pitchFamily="18" charset="-120"/>
+                        </a:defRPr>
+                      </a:lvl1pPr>
+                      <a:lvl2pPr marL="471488">
+                        <a:spcBef>
+                          <a:spcPct val="20000"/>
+                        </a:spcBef>
+                        <a:defRPr kumimoji="1" sz="2400">
+                          <a:solidFill>
+                            <a:schemeClr val="tx1"/>
+                          </a:solidFill>
+                          <a:latin typeface="Arial" panose="020B0604020202020204" pitchFamily="34" charset="0"/>
+                          <a:ea typeface="新細明體" panose="02020500000000000000" pitchFamily="18" charset="-120"/>
+                        </a:defRPr>
+                      </a:lvl2pPr>
+                      <a:lvl3pPr marL="909638">
+                        <a:spcBef>
+                          <a:spcPct val="20000"/>
+                        </a:spcBef>
+                        <a:defRPr kumimoji="1" sz="2000">
+                          <a:solidFill>
+                            <a:schemeClr val="tx1"/>
+                          </a:solidFill>
+                          <a:latin typeface="Arial" panose="020B0604020202020204" pitchFamily="34" charset="0"/>
+                          <a:ea typeface="新細明體" panose="02020500000000000000" pitchFamily="18" charset="-120"/>
+                        </a:defRPr>
+                      </a:lvl3pPr>
+                      <a:lvl4pPr marL="1306513">
+                        <a:spcBef>
+                          <a:spcPct val="20000"/>
+                        </a:spcBef>
+                        <a:defRPr kumimoji="1">
+                          <a:solidFill>
+                            <a:schemeClr val="tx1"/>
+                          </a:solidFill>
+                          <a:latin typeface="Arial" panose="020B0604020202020204" pitchFamily="34" charset="0"/>
+                          <a:ea typeface="新細明體" panose="02020500000000000000" pitchFamily="18" charset="-120"/>
+                        </a:defRPr>
+                      </a:lvl4pPr>
+                      <a:lvl5pPr marL="1695450">
+                        <a:spcBef>
+                          <a:spcPct val="20000"/>
+                        </a:spcBef>
+                        <a:defRPr kumimoji="1">
+                          <a:solidFill>
+                            <a:schemeClr val="tx1"/>
+                          </a:solidFill>
+                          <a:latin typeface="Arial" panose="020B0604020202020204" pitchFamily="34" charset="0"/>
+                          <a:ea typeface="新細明體" panose="02020500000000000000" pitchFamily="18" charset="-120"/>
+                        </a:defRPr>
+                      </a:lvl5pPr>
+                      <a:lvl6pPr marL="2152650" fontAlgn="base">
+                        <a:spcBef>
+                          <a:spcPct val="20000"/>
+                        </a:spcBef>
+                        <a:spcAft>
+                          <a:spcPct val="0"/>
+                        </a:spcAft>
+                        <a:defRPr kumimoji="1">
+                          <a:solidFill>
+                            <a:schemeClr val="tx1"/>
+                          </a:solidFill>
+                          <a:latin typeface="Arial" panose="020B0604020202020204" pitchFamily="34" charset="0"/>
+                          <a:ea typeface="新細明體" panose="02020500000000000000" pitchFamily="18" charset="-120"/>
+                        </a:defRPr>
+                      </a:lvl6pPr>
+                      <a:lvl7pPr marL="2609850" fontAlgn="base">
+                        <a:spcBef>
+                          <a:spcPct val="20000"/>
+                        </a:spcBef>
+                        <a:spcAft>
+                          <a:spcPct val="0"/>
+                        </a:spcAft>
+                        <a:defRPr kumimoji="1">
+                          <a:solidFill>
+                            <a:schemeClr val="tx1"/>
+                          </a:solidFill>
+                          <a:latin typeface="Arial" panose="020B0604020202020204" pitchFamily="34" charset="0"/>
+                          <a:ea typeface="新細明體" panose="02020500000000000000" pitchFamily="18" charset="-120"/>
+                        </a:defRPr>
+                      </a:lvl7pPr>
+                      <a:lvl8pPr marL="3067050" fontAlgn="base">
+                        <a:spcBef>
+                          <a:spcPct val="20000"/>
+                        </a:spcBef>
+                        <a:spcAft>
+                          <a:spcPct val="0"/>
+                        </a:spcAft>
+                        <a:defRPr kumimoji="1">
+                          <a:solidFill>
+                            <a:schemeClr val="tx1"/>
+                          </a:solidFill>
+                          <a:latin typeface="Arial" panose="020B0604020202020204" pitchFamily="34" charset="0"/>
+                          <a:ea typeface="新細明體" panose="02020500000000000000" pitchFamily="18" charset="-120"/>
+                        </a:defRPr>
+                      </a:lvl8pPr>
+                      <a:lvl9pPr marL="3524250" fontAlgn="base">
+                        <a:spcBef>
+                          <a:spcPct val="20000"/>
+                        </a:spcBef>
+                        <a:spcAft>
+                          <a:spcPct val="0"/>
+                        </a:spcAft>
+                        <a:defRPr kumimoji="1">
+                          <a:solidFill>
+                            <a:schemeClr val="tx1"/>
+                          </a:solidFill>
+                          <a:latin typeface="Arial" panose="020B0604020202020204" pitchFamily="34" charset="0"/>
+                          <a:ea typeface="新細明體" panose="02020500000000000000" pitchFamily="18" charset="-120"/>
+                        </a:defRPr>
+                      </a:lvl9pPr>
+                    </a:lstStyle>
+                    <a:p>
+                      <a:pPr marL="0" marR="0" lvl="0" indent="0" algn="ctr" defTabSz="914400" rtl="0" eaLnBrk="1" fontAlgn="base" latinLnBrk="0" hangingPunct="1">
+                        <a:lnSpc>
+                          <a:spcPct val="100000"/>
+                        </a:lnSpc>
+                        <a:spcBef>
+                          <a:spcPct val="20000"/>
+                        </a:spcBef>
+                        <a:spcAft>
+                          <a:spcPct val="0"/>
+                        </a:spcAft>
+                        <a:buClrTx/>
+                        <a:buSzTx/>
+                        <a:buFontTx/>
+                        <a:buNone/>
+                        <a:tabLst/>
+                      </a:pPr>
+                      <a:r>
+                        <a:rPr kumimoji="1" lang="en-US" altLang="zh-TW" sz="1500" b="1" i="0" u="none" strike="noStrike" cap="none" normalizeH="0" baseline="0" dirty="0">
+                          <a:ln>
+                            <a:noFill/>
+                          </a:ln>
+                          <a:solidFill>
+                            <a:schemeClr val="tx1"/>
+                          </a:solidFill>
+                          <a:effectLst/>
+                          <a:latin typeface="Microsoft YaHei" panose="020B0503020204020204" pitchFamily="34" charset="-122"/>
+                          <a:ea typeface="Microsoft YaHei" panose="020B0503020204020204" pitchFamily="34" charset="-122"/>
+                          <a:cs typeface="Arial Unicode MS" pitchFamily="34" charset="-120"/>
+                        </a:rPr>
+                        <a:t>120</a:t>
+                      </a:r>
+                    </a:p>
+                  </a:txBody>
+                  <a:tcPr marL="36000" marR="36000" marT="18000" marB="18000" anchor="ctr" horzOverflow="overflow"/>
+                </a:tc>
+                <a:extLst>
+                  <a:ext uri="{0D108BD9-81ED-4DB2-BD59-A6C34878D82A}">
+                    <a16:rowId xmlns:a16="http://schemas.microsoft.com/office/drawing/2014/main" val="3653864738"/>
+                  </a:ext>
+                </a:extLst>
+              </a:tr>
+              <a:tr h="328740">
+                <a:tc gridSpan="3">
+                  <a:txBody>
+                    <a:bodyPr/>
+                    <a:lstStyle/>
+                    <a:p>
+                      <a:pPr marL="0" marR="0" lvl="0" indent="0" algn="ctr" defTabSz="914400" rtl="0" eaLnBrk="1" fontAlgn="base" latinLnBrk="0" hangingPunct="1">
+                        <a:lnSpc>
+                          <a:spcPct val="80000"/>
+                        </a:lnSpc>
+                        <a:spcBef>
+                          <a:spcPct val="20000"/>
+                        </a:spcBef>
+                        <a:spcAft>
+                          <a:spcPct val="0"/>
+                        </a:spcAft>
+                        <a:buClrTx/>
+                        <a:buSzTx/>
+                        <a:buFontTx/>
+                        <a:buNone/>
+                        <a:tabLst/>
+                      </a:pPr>
+                      <a:r>
+                        <a:rPr kumimoji="1" lang="en-US" altLang="zh-TW" sz="1700" b="1" i="0" u="none" strike="noStrike" cap="none" normalizeH="0" baseline="0" dirty="0">
+                          <a:ln>
+                            <a:noFill/>
+                          </a:ln>
+                          <a:solidFill>
+                            <a:schemeClr val="tx1"/>
+                          </a:solidFill>
+                          <a:effectLst/>
+                          <a:latin typeface="Microsoft YaHei" panose="020B0503020204020204" pitchFamily="34" charset="-122"/>
+                          <a:ea typeface="Microsoft YaHei" panose="020B0503020204020204" pitchFamily="34" charset="-122"/>
+                        </a:rPr>
+                        <a:t>114</a:t>
+                      </a:r>
+                      <a:r>
+                        <a:rPr kumimoji="1" lang="zh-TW" altLang="en-US" sz="1700" b="1" i="0" u="none" strike="noStrike" cap="none" normalizeH="0" baseline="0" dirty="0">
+                          <a:ln>
+                            <a:noFill/>
+                          </a:ln>
+                          <a:solidFill>
+                            <a:schemeClr val="tx1"/>
+                          </a:solidFill>
+                          <a:effectLst/>
+                          <a:latin typeface="Microsoft YaHei" panose="020B0503020204020204" pitchFamily="34" charset="-122"/>
+                          <a:ea typeface="Microsoft YaHei" panose="020B0503020204020204" pitchFamily="34" charset="-122"/>
+                        </a:rPr>
+                        <a:t>年銷售量</a:t>
+                      </a:r>
+                      <a:r>
+                        <a:rPr kumimoji="1" lang="en-US" altLang="zh-TW" sz="1700" b="1" i="0" u="none" strike="noStrike" cap="none" normalizeH="0" baseline="0" dirty="0">
+                          <a:ln>
+                            <a:noFill/>
+                          </a:ln>
+                          <a:solidFill>
+                            <a:schemeClr val="tx1"/>
+                          </a:solidFill>
+                          <a:effectLst/>
+                          <a:latin typeface="Microsoft YaHei" panose="020B0503020204020204" pitchFamily="34" charset="-122"/>
+                          <a:ea typeface="Microsoft YaHei" panose="020B0503020204020204" pitchFamily="34" charset="-122"/>
+                        </a:rPr>
+                        <a:t>(</a:t>
+                      </a:r>
+                      <a:r>
+                        <a:rPr kumimoji="1" lang="zh-TW" altLang="en-US" sz="1700" b="1" i="0" u="none" strike="noStrike" cap="none" normalizeH="0" baseline="0" dirty="0">
+                          <a:ln>
+                            <a:noFill/>
+                          </a:ln>
+                          <a:solidFill>
+                            <a:schemeClr val="tx1"/>
+                          </a:solidFill>
+                          <a:effectLst/>
+                          <a:latin typeface="Microsoft YaHei" panose="020B0503020204020204" pitchFamily="34" charset="-122"/>
+                          <a:ea typeface="Microsoft YaHei" panose="020B0503020204020204" pitchFamily="34" charset="-122"/>
+                        </a:rPr>
+                        <a:t>米</a:t>
+                      </a:r>
+                      <a:r>
+                        <a:rPr kumimoji="1" lang="en-US" altLang="zh-TW" sz="1700" b="1" i="0" u="none" strike="noStrike" cap="none" normalizeH="0" baseline="0" dirty="0">
+                          <a:ln>
+                            <a:noFill/>
+                          </a:ln>
+                          <a:solidFill>
+                            <a:schemeClr val="tx1"/>
+                          </a:solidFill>
+                          <a:effectLst/>
+                          <a:latin typeface="Microsoft YaHei" panose="020B0503020204020204" pitchFamily="34" charset="-122"/>
+                          <a:ea typeface="Microsoft YaHei" panose="020B0503020204020204" pitchFamily="34" charset="-122"/>
+                        </a:rPr>
+                        <a:t>)</a:t>
+                      </a:r>
+                    </a:p>
+                  </a:txBody>
+                  <a:tcPr marL="36000" marR="36000" marT="18000" marB="18000" anchor="ctr" horzOverflow="overflow"/>
+                </a:tc>
+                <a:tc hMerge="1">
+                  <a:txBody>
+                    <a:bodyPr/>
+                    <a:lstStyle/>
+                    <a:p>
+                      <a:endParaRPr lang="zh-TW" altLang="en-US"/>
+                    </a:p>
+                  </a:txBody>
+                  <a:tcPr/>
+                </a:tc>
+                <a:tc hMerge="1">
+                  <a:txBody>
+                    <a:bodyPr/>
+                    <a:lstStyle/>
+                    <a:p>
+                      <a:endParaRPr lang="zh-TW" altLang="en-US"/>
+                    </a:p>
+                  </a:txBody>
+                  <a:tcPr/>
+                </a:tc>
+                <a:tc>
+                  <a:txBody>
+                    <a:bodyPr/>
+                    <a:lstStyle/>
+                    <a:p>
+                      <a:pPr marL="0" marR="0" lvl="0" indent="0" algn="ctr" defTabSz="914400" rtl="0" eaLnBrk="1" fontAlgn="base" latinLnBrk="0" hangingPunct="1">
+                        <a:lnSpc>
+                          <a:spcPct val="100000"/>
+                        </a:lnSpc>
+                        <a:spcBef>
+                          <a:spcPct val="20000"/>
+                        </a:spcBef>
+                        <a:spcAft>
+                          <a:spcPct val="0"/>
+                        </a:spcAft>
+                        <a:buClrTx/>
+                        <a:buSzTx/>
+                        <a:buFontTx/>
+                        <a:buNone/>
+                        <a:tabLst/>
+                      </a:pPr>
+                      <a:r>
+                        <a:rPr kumimoji="1" lang="en-US" altLang="zh-TW" sz="1500" b="1" u="none" strike="noStrike" kern="1200" cap="none" normalizeH="0" baseline="0" dirty="0">
+                          <a:ln>
+                            <a:noFill/>
+                          </a:ln>
+                          <a:solidFill>
+                            <a:schemeClr val="tx1"/>
+                          </a:solidFill>
+                          <a:effectLst/>
+                          <a:latin typeface="Microsoft YaHei" panose="020B0503020204020204" pitchFamily="34" charset="-122"/>
+                          <a:ea typeface="Microsoft YaHei" panose="020B0503020204020204" pitchFamily="34" charset="-122"/>
+                          <a:cs typeface="+mn-cs"/>
+                        </a:rPr>
+                        <a:t>63931</a:t>
+                      </a:r>
+                    </a:p>
+                  </a:txBody>
+                  <a:tcPr marL="36000" marR="36000" marT="18000" marB="18000" anchor="ctr" horzOverflow="overflow"/>
+                </a:tc>
+                <a:tc>
+                  <a:txBody>
+                    <a:bodyPr/>
+                    <a:lstStyle/>
+                    <a:p>
+                      <a:pPr marL="0" marR="0" lvl="0" indent="0" algn="ctr" defTabSz="914400" rtl="0" eaLnBrk="1" fontAlgn="base" latinLnBrk="0" hangingPunct="1">
+                        <a:lnSpc>
+                          <a:spcPct val="100000"/>
+                        </a:lnSpc>
+                        <a:spcBef>
+                          <a:spcPct val="20000"/>
+                        </a:spcBef>
+                        <a:spcAft>
+                          <a:spcPct val="0"/>
+                        </a:spcAft>
+                        <a:buClrTx/>
+                        <a:buSzTx/>
+                        <a:buFontTx/>
+                        <a:buNone/>
+                        <a:tabLst/>
+                      </a:pPr>
+                      <a:r>
+                        <a:rPr kumimoji="1" lang="en-US" altLang="zh-TW" sz="1500" b="1" i="0" u="none" strike="noStrike" cap="none" normalizeH="0" baseline="0" dirty="0">
+                          <a:ln>
+                            <a:noFill/>
+                          </a:ln>
+                          <a:solidFill>
+                            <a:schemeClr val="tx1"/>
+                          </a:solidFill>
+                          <a:effectLst/>
+                          <a:latin typeface="Microsoft YaHei" panose="020B0503020204020204" pitchFamily="34" charset="-122"/>
+                          <a:ea typeface="Microsoft YaHei" panose="020B0503020204020204" pitchFamily="34" charset="-122"/>
+                          <a:cs typeface="Arial Unicode MS" pitchFamily="34" charset="-120"/>
+                        </a:rPr>
+                        <a:t>(</a:t>
+                      </a:r>
+                      <a:r>
+                        <a:rPr kumimoji="1" lang="zh-TW" altLang="en-US" sz="1500" b="1" i="0" u="none" strike="noStrike" cap="none" normalizeH="0" baseline="0" dirty="0">
+                          <a:ln>
+                            <a:noFill/>
+                          </a:ln>
+                          <a:solidFill>
+                            <a:schemeClr val="tx1"/>
+                          </a:solidFill>
+                          <a:effectLst/>
+                          <a:latin typeface="Microsoft YaHei" panose="020B0503020204020204" pitchFamily="34" charset="-122"/>
+                          <a:ea typeface="Microsoft YaHei" panose="020B0503020204020204" pitchFamily="34" charset="-122"/>
+                          <a:cs typeface="Arial Unicode MS" pitchFamily="34" charset="-120"/>
+                        </a:rPr>
+                        <a:t>鳯勝代工</a:t>
+                      </a:r>
+                      <a:r>
+                        <a:rPr kumimoji="1" lang="en-US" altLang="zh-TW" sz="1500" b="1" i="0" u="none" strike="noStrike" cap="none" normalizeH="0" baseline="0" dirty="0">
+                          <a:ln>
+                            <a:noFill/>
+                          </a:ln>
+                          <a:solidFill>
+                            <a:schemeClr val="tx1"/>
+                          </a:solidFill>
+                          <a:effectLst/>
+                          <a:latin typeface="Microsoft YaHei" panose="020B0503020204020204" pitchFamily="34" charset="-122"/>
+                          <a:ea typeface="Microsoft YaHei" panose="020B0503020204020204" pitchFamily="34" charset="-122"/>
+                          <a:cs typeface="Arial Unicode MS" pitchFamily="34" charset="-120"/>
+                        </a:rPr>
+                        <a:t>)</a:t>
+                      </a:r>
+                    </a:p>
+                  </a:txBody>
+                  <a:tcPr marL="36000" marR="36000" marT="18000" marB="18000" anchor="ctr" horzOverflow="overflow"/>
+                </a:tc>
+                <a:tc>
+                  <a:txBody>
+                    <a:bodyPr/>
+                    <a:lstStyle/>
+                    <a:p>
+                      <a:pPr marL="0" marR="0" lvl="0" indent="0" algn="ctr" defTabSz="914400" rtl="0" eaLnBrk="1" fontAlgn="base" latinLnBrk="0" hangingPunct="1">
+                        <a:lnSpc>
+                          <a:spcPct val="100000"/>
+                        </a:lnSpc>
+                        <a:spcBef>
+                          <a:spcPct val="20000"/>
+                        </a:spcBef>
+                        <a:spcAft>
+                          <a:spcPct val="0"/>
+                        </a:spcAft>
+                        <a:buClrTx/>
+                        <a:buSzTx/>
+                        <a:buFontTx/>
+                        <a:buNone/>
+                        <a:tabLst/>
+                      </a:pPr>
+                      <a:r>
+                        <a:rPr kumimoji="1" lang="en-US" altLang="zh-TW" sz="1500" b="1" i="0" u="none" strike="noStrike" kern="1200" cap="none" normalizeH="0" baseline="0" dirty="0">
+                          <a:ln>
+                            <a:noFill/>
+                          </a:ln>
+                          <a:solidFill>
+                            <a:schemeClr val="tx1"/>
+                          </a:solidFill>
+                          <a:effectLst/>
+                          <a:latin typeface="Microsoft YaHei" panose="020B0503020204020204" pitchFamily="34" charset="-122"/>
+                          <a:ea typeface="Microsoft YaHei" panose="020B0503020204020204" pitchFamily="34" charset="-122"/>
+                          <a:cs typeface="Arial Unicode MS" pitchFamily="34" charset="-120"/>
+                        </a:rPr>
+                        <a:t>70000+44728(</a:t>
+                      </a:r>
+                      <a:r>
+                        <a:rPr kumimoji="1" lang="zh-TW" altLang="en-US" sz="1500" b="1" i="0" u="none" strike="noStrike" kern="1200" cap="none" normalizeH="0" baseline="0" dirty="0">
+                          <a:ln>
+                            <a:noFill/>
+                          </a:ln>
+                          <a:solidFill>
+                            <a:schemeClr val="tx1"/>
+                          </a:solidFill>
+                          <a:effectLst/>
+                          <a:latin typeface="Microsoft YaHei" panose="020B0503020204020204" pitchFamily="34" charset="-122"/>
+                          <a:ea typeface="Microsoft YaHei" panose="020B0503020204020204" pitchFamily="34" charset="-122"/>
+                          <a:cs typeface="Arial Unicode MS" pitchFamily="34" charset="-120"/>
+                        </a:rPr>
+                        <a:t>代工</a:t>
+                      </a:r>
+                      <a:r>
+                        <a:rPr kumimoji="1" lang="en-US" altLang="zh-TW" sz="1500" b="1" i="0" u="none" strike="noStrike" kern="1200" cap="none" normalizeH="0" baseline="0" dirty="0">
+                          <a:ln>
+                            <a:noFill/>
+                          </a:ln>
+                          <a:solidFill>
+                            <a:schemeClr val="tx1"/>
+                          </a:solidFill>
+                          <a:effectLst/>
+                          <a:latin typeface="Microsoft YaHei" panose="020B0503020204020204" pitchFamily="34" charset="-122"/>
+                          <a:ea typeface="Microsoft YaHei" panose="020B0503020204020204" pitchFamily="34" charset="-122"/>
+                          <a:cs typeface="Arial Unicode MS" pitchFamily="34" charset="-120"/>
+                        </a:rPr>
+                        <a:t>)</a:t>
+                      </a:r>
+                    </a:p>
+                  </a:txBody>
+                  <a:tcPr marL="36000" marR="36000" marT="18000" marB="18000" anchor="ctr" horzOverflow="overflow"/>
+                </a:tc>
+                <a:tc>
+                  <a:txBody>
+                    <a:bodyPr/>
+                    <a:lstStyle/>
+                    <a:p>
+                      <a:pPr marL="0" marR="0" lvl="0" indent="0" algn="ctr" defTabSz="914400" rtl="0" eaLnBrk="1" fontAlgn="base" latinLnBrk="0" hangingPunct="1">
+                        <a:lnSpc>
+                          <a:spcPct val="100000"/>
+                        </a:lnSpc>
+                        <a:spcBef>
+                          <a:spcPct val="20000"/>
+                        </a:spcBef>
+                        <a:spcAft>
+                          <a:spcPct val="0"/>
+                        </a:spcAft>
+                        <a:buClrTx/>
+                        <a:buSzTx/>
+                        <a:buFontTx/>
+                        <a:buNone/>
+                        <a:tabLst/>
+                      </a:pPr>
+                      <a:r>
+                        <a:rPr kumimoji="1" lang="en-US" altLang="zh-TW" sz="1500" b="1" i="0" u="none" strike="noStrike" cap="none" normalizeH="0" baseline="0" dirty="0">
+                          <a:ln>
+                            <a:noFill/>
+                          </a:ln>
+                          <a:solidFill>
+                            <a:schemeClr val="tx1"/>
+                          </a:solidFill>
+                          <a:effectLst/>
+                          <a:latin typeface="Microsoft YaHei" panose="020B0503020204020204" pitchFamily="34" charset="-122"/>
+                          <a:ea typeface="Microsoft YaHei" panose="020B0503020204020204" pitchFamily="34" charset="-122"/>
+                          <a:cs typeface="Arial Unicode MS" pitchFamily="34" charset="-120"/>
+                        </a:rPr>
+                        <a:t>100000</a:t>
+                      </a:r>
+                    </a:p>
+                  </a:txBody>
+                  <a:tcPr marL="36000" marR="36000" marT="18000" marB="18000" anchor="ctr" horzOverflow="overflow"/>
+                </a:tc>
+                <a:tc>
+                  <a:txBody>
+                    <a:bodyPr/>
+                    <a:lstStyle/>
+                    <a:p>
+                      <a:pPr marL="0" marR="0" lvl="0" indent="0" algn="ctr" defTabSz="914400" rtl="0" eaLnBrk="1" fontAlgn="base" latinLnBrk="0" hangingPunct="1">
+                        <a:lnSpc>
+                          <a:spcPct val="100000"/>
+                        </a:lnSpc>
+                        <a:spcBef>
+                          <a:spcPct val="20000"/>
+                        </a:spcBef>
+                        <a:spcAft>
+                          <a:spcPct val="0"/>
+                        </a:spcAft>
+                        <a:buClrTx/>
+                        <a:buSzTx/>
+                        <a:buFontTx/>
+                        <a:buNone/>
+                        <a:tabLst/>
+                      </a:pPr>
+                      <a:r>
+                        <a:rPr kumimoji="1" lang="en-US" altLang="zh-TW" sz="1500" b="1" u="none" strike="noStrike" kern="1200" cap="none" normalizeH="0" baseline="0" dirty="0">
+                          <a:ln>
+                            <a:noFill/>
+                          </a:ln>
+                          <a:solidFill>
+                            <a:schemeClr val="tx1"/>
+                          </a:solidFill>
+                          <a:effectLst/>
+                          <a:latin typeface="Microsoft YaHei" panose="020B0503020204020204" pitchFamily="34" charset="-122"/>
+                          <a:ea typeface="Microsoft YaHei" panose="020B0503020204020204" pitchFamily="34" charset="-122"/>
+                          <a:cs typeface="+mn-cs"/>
+                        </a:rPr>
+                        <a:t>100000</a:t>
+                      </a:r>
+                    </a:p>
+                  </a:txBody>
+                  <a:tcPr marL="36000" marR="36000" marT="18000" marB="18000" anchor="ctr" horzOverflow="overflow"/>
+                </a:tc>
+                <a:tc>
+                  <a:txBody>
+                    <a:bodyPr/>
+                    <a:lstStyle/>
+                    <a:p>
+                      <a:pPr marL="0" marR="0" lvl="0" indent="0" algn="ctr" defTabSz="914400" rtl="0" eaLnBrk="1" fontAlgn="base" latinLnBrk="0" hangingPunct="1">
+                        <a:lnSpc>
+                          <a:spcPct val="100000"/>
+                        </a:lnSpc>
+                        <a:spcBef>
+                          <a:spcPct val="20000"/>
+                        </a:spcBef>
+                        <a:spcAft>
+                          <a:spcPct val="0"/>
+                        </a:spcAft>
+                        <a:buClrTx/>
+                        <a:buSzTx/>
+                        <a:buFontTx/>
+                        <a:buNone/>
+                        <a:tabLst/>
+                      </a:pPr>
+                      <a:r>
+                        <a:rPr kumimoji="1" lang="en-US" altLang="zh-TW" sz="1500" b="1" i="0" u="none" strike="noStrike" cap="none" normalizeH="0" baseline="0" dirty="0">
+                          <a:ln>
+                            <a:noFill/>
+                          </a:ln>
+                          <a:solidFill>
+                            <a:schemeClr val="tx1"/>
+                          </a:solidFill>
+                          <a:effectLst/>
+                          <a:latin typeface="Microsoft YaHei" panose="020B0503020204020204" pitchFamily="34" charset="-122"/>
+                          <a:ea typeface="Microsoft YaHei" panose="020B0503020204020204" pitchFamily="34" charset="-122"/>
+                          <a:cs typeface="Arial Unicode MS" pitchFamily="34" charset="-120"/>
+                        </a:rPr>
+                        <a:t>30000</a:t>
+                      </a:r>
+                    </a:p>
+                  </a:txBody>
+                  <a:tcPr marL="36000" marR="36000" marT="18000" marB="18000" anchor="ctr" horzOverflow="overflow"/>
+                </a:tc>
+                <a:tc>
+                  <a:txBody>
+                    <a:bodyPr/>
+                    <a:lstStyle/>
+                    <a:p>
+                      <a:pPr marL="0" marR="0" lvl="0" indent="0" algn="ctr" defTabSz="914400" rtl="0" eaLnBrk="1" fontAlgn="base" latinLnBrk="0" hangingPunct="1">
+                        <a:lnSpc>
+                          <a:spcPct val="100000"/>
+                        </a:lnSpc>
+                        <a:spcBef>
+                          <a:spcPct val="20000"/>
+                        </a:spcBef>
+                        <a:spcAft>
+                          <a:spcPct val="0"/>
+                        </a:spcAft>
+                        <a:buClrTx/>
+                        <a:buSzTx/>
+                        <a:buFontTx/>
+                        <a:buNone/>
+                        <a:tabLst/>
+                      </a:pPr>
+                      <a:r>
+                        <a:rPr kumimoji="1" lang="en-US" altLang="zh-TW" sz="1500" b="1" i="0" u="none" strike="noStrike" cap="none" normalizeH="0" baseline="0" dirty="0">
+                          <a:ln>
+                            <a:noFill/>
+                          </a:ln>
+                          <a:solidFill>
+                            <a:schemeClr val="tx1"/>
+                          </a:solidFill>
+                          <a:effectLst/>
+                          <a:latin typeface="Microsoft YaHei" panose="020B0503020204020204" pitchFamily="34" charset="-122"/>
+                          <a:ea typeface="Microsoft YaHei" panose="020B0503020204020204" pitchFamily="34" charset="-122"/>
+                          <a:cs typeface="Arial Unicode MS" pitchFamily="34" charset="-120"/>
+                        </a:rPr>
+                        <a:t>60000</a:t>
+                      </a:r>
+                    </a:p>
+                  </a:txBody>
+                  <a:tcPr marL="36000" marR="36000" marT="18000" marB="18000" anchor="ctr" horzOverflow="overflow"/>
+                </a:tc>
+                <a:extLst>
+                  <a:ext uri="{0D108BD9-81ED-4DB2-BD59-A6C34878D82A}">
+                    <a16:rowId xmlns:a16="http://schemas.microsoft.com/office/drawing/2014/main" val="2172270918"/>
+                  </a:ext>
+                </a:extLst>
+              </a:tr>
+              <a:tr h="328740">
+                <a:tc rowSpan="12">
+                  <a:txBody>
+                    <a:bodyPr/>
+                    <a:lstStyle>
+                      <a:lvl1pPr>
+                        <a:spcBef>
+                          <a:spcPct val="20000"/>
+                        </a:spcBef>
+                        <a:defRPr kumimoji="1" sz="2800">
+                          <a:solidFill>
+                            <a:schemeClr val="tx1"/>
+                          </a:solidFill>
+                          <a:latin typeface="Arial" panose="020B0604020202020204" pitchFamily="34" charset="0"/>
+                          <a:ea typeface="新細明體" panose="02020500000000000000" pitchFamily="18" charset="-120"/>
+                        </a:defRPr>
+                      </a:lvl1pPr>
+                      <a:lvl2pPr marL="471488">
+                        <a:spcBef>
+                          <a:spcPct val="20000"/>
+                        </a:spcBef>
+                        <a:defRPr kumimoji="1" sz="2400">
+                          <a:solidFill>
+                            <a:schemeClr val="tx1"/>
+                          </a:solidFill>
+                          <a:latin typeface="Arial" panose="020B0604020202020204" pitchFamily="34" charset="0"/>
+                          <a:ea typeface="新細明體" panose="02020500000000000000" pitchFamily="18" charset="-120"/>
+                        </a:defRPr>
+                      </a:lvl2pPr>
+                      <a:lvl3pPr marL="909638">
+                        <a:spcBef>
+                          <a:spcPct val="20000"/>
+                        </a:spcBef>
+                        <a:defRPr kumimoji="1" sz="2000">
+                          <a:solidFill>
+                            <a:schemeClr val="tx1"/>
+                          </a:solidFill>
+                          <a:latin typeface="Arial" panose="020B0604020202020204" pitchFamily="34" charset="0"/>
+                          <a:ea typeface="新細明體" panose="02020500000000000000" pitchFamily="18" charset="-120"/>
+                        </a:defRPr>
+                      </a:lvl3pPr>
+                      <a:lvl4pPr marL="1306513">
+                        <a:spcBef>
+                          <a:spcPct val="20000"/>
+                        </a:spcBef>
+                        <a:defRPr kumimoji="1">
+                          <a:solidFill>
+                            <a:schemeClr val="tx1"/>
+                          </a:solidFill>
+                          <a:latin typeface="Arial" panose="020B0604020202020204" pitchFamily="34" charset="0"/>
+                          <a:ea typeface="新細明體" panose="02020500000000000000" pitchFamily="18" charset="-120"/>
+                        </a:defRPr>
+                      </a:lvl4pPr>
+                      <a:lvl5pPr marL="1695450">
+                        <a:spcBef>
+                          <a:spcPct val="20000"/>
+                        </a:spcBef>
+                        <a:defRPr kumimoji="1">
+                          <a:solidFill>
+                            <a:schemeClr val="tx1"/>
+                          </a:solidFill>
+                          <a:latin typeface="Arial" panose="020B0604020202020204" pitchFamily="34" charset="0"/>
+                          <a:ea typeface="新細明體" panose="02020500000000000000" pitchFamily="18" charset="-120"/>
+                        </a:defRPr>
+                      </a:lvl5pPr>
+                      <a:lvl6pPr marL="2152650" fontAlgn="base">
+                        <a:spcBef>
+                          <a:spcPct val="20000"/>
+                        </a:spcBef>
+                        <a:spcAft>
+                          <a:spcPct val="0"/>
+                        </a:spcAft>
+                        <a:defRPr kumimoji="1">
+                          <a:solidFill>
+                            <a:schemeClr val="tx1"/>
+                          </a:solidFill>
+                          <a:latin typeface="Arial" panose="020B0604020202020204" pitchFamily="34" charset="0"/>
+                          <a:ea typeface="新細明體" panose="02020500000000000000" pitchFamily="18" charset="-120"/>
+                        </a:defRPr>
+                      </a:lvl6pPr>
+                      <a:lvl7pPr marL="2609850" fontAlgn="base">
+                        <a:spcBef>
+                          <a:spcPct val="20000"/>
+                        </a:spcBef>
+                        <a:spcAft>
+                          <a:spcPct val="0"/>
+                        </a:spcAft>
+                        <a:defRPr kumimoji="1">
+                          <a:solidFill>
+                            <a:schemeClr val="tx1"/>
+                          </a:solidFill>
+                          <a:latin typeface="Arial" panose="020B0604020202020204" pitchFamily="34" charset="0"/>
+                          <a:ea typeface="新細明體" panose="02020500000000000000" pitchFamily="18" charset="-120"/>
+                        </a:defRPr>
+                      </a:lvl7pPr>
+                      <a:lvl8pPr marL="3067050" fontAlgn="base">
+                        <a:spcBef>
+                          <a:spcPct val="20000"/>
+                        </a:spcBef>
+                        <a:spcAft>
+                          <a:spcPct val="0"/>
+                        </a:spcAft>
+                        <a:defRPr kumimoji="1">
+                          <a:solidFill>
+                            <a:schemeClr val="tx1"/>
+                          </a:solidFill>
+                          <a:latin typeface="Arial" panose="020B0604020202020204" pitchFamily="34" charset="0"/>
+                          <a:ea typeface="新細明體" panose="02020500000000000000" pitchFamily="18" charset="-120"/>
+                        </a:defRPr>
+                      </a:lvl8pPr>
+                      <a:lvl9pPr marL="3524250" fontAlgn="base">
+                        <a:spcBef>
+                          <a:spcPct val="20000"/>
+                        </a:spcBef>
+                        <a:spcAft>
+                          <a:spcPct val="0"/>
+                        </a:spcAft>
+                        <a:defRPr kumimoji="1">
+                          <a:solidFill>
+                            <a:schemeClr val="tx1"/>
+                          </a:solidFill>
+                          <a:latin typeface="Arial" panose="020B0604020202020204" pitchFamily="34" charset="0"/>
+                          <a:ea typeface="新細明體" panose="02020500000000000000" pitchFamily="18" charset="-120"/>
+                        </a:defRPr>
+                      </a:lvl9pPr>
+                    </a:lstStyle>
+                    <a:p>
+                      <a:pPr marL="0" marR="0" lvl="0" indent="0" algn="ctr" defTabSz="914400" rtl="0" eaLnBrk="1" fontAlgn="base" latinLnBrk="0" hangingPunct="1">
+                        <a:lnSpc>
+                          <a:spcPct val="80000"/>
+                        </a:lnSpc>
+                        <a:spcBef>
+                          <a:spcPct val="0"/>
+                        </a:spcBef>
+                        <a:spcAft>
+                          <a:spcPct val="0"/>
+                        </a:spcAft>
+                        <a:buClrTx/>
+                        <a:buSzTx/>
+                        <a:buFontTx/>
+                        <a:buNone/>
+                        <a:tabLst/>
+                      </a:pPr>
+                      <a:r>
+                        <a:rPr kumimoji="1" lang="zh-TW" altLang="en-US" sz="1700" b="1" i="0" u="none" strike="noStrike" cap="none" normalizeH="0" baseline="0" dirty="0">
+                          <a:ln>
+                            <a:noFill/>
+                          </a:ln>
+                          <a:solidFill>
+                            <a:schemeClr val="tx1"/>
+                          </a:solidFill>
+                          <a:effectLst/>
+                          <a:latin typeface="Microsoft YaHei" panose="020B0503020204020204" pitchFamily="34" charset="-122"/>
+                          <a:ea typeface="Microsoft YaHei" panose="020B0503020204020204" pitchFamily="34" charset="-122"/>
+                        </a:rPr>
+                        <a:t>人力</a:t>
+                      </a:r>
                       <a:endParaRPr kumimoji="1" lang="en-US" altLang="zh-TW" sz="1700" b="1" i="0" u="none" strike="noStrike" cap="none" normalizeH="0" baseline="0" dirty="0">
                         <a:ln>
                           <a:noFill/>
@@ -7223,303 +9316,13 @@
                         <a:ea typeface="Microsoft YaHei" panose="020B0503020204020204" pitchFamily="34" charset="-122"/>
                       </a:endParaRPr>
                     </a:p>
-                  </a:txBody>
-                  <a:tcPr marL="36000" marR="36000" marT="18000" marB="18000" anchor="ctr" horzOverflow="overflow"/>
-                </a:tc>
-                <a:tc>
-                  <a:txBody>
-                    <a:bodyPr/>
-                    <a:lstStyle>
-                      <a:lvl1pPr>
-                        <a:spcBef>
-                          <a:spcPct val="20000"/>
-                        </a:spcBef>
-                        <a:defRPr kumimoji="1" sz="2800">
-                          <a:solidFill>
-                            <a:schemeClr val="tx1"/>
-                          </a:solidFill>
-                          <a:latin typeface="Arial" panose="020B0604020202020204" pitchFamily="34" charset="0"/>
-                          <a:ea typeface="新細明體" panose="02020500000000000000" pitchFamily="18" charset="-120"/>
-                        </a:defRPr>
-                      </a:lvl1pPr>
-                      <a:lvl2pPr marL="471488">
-                        <a:spcBef>
-                          <a:spcPct val="20000"/>
-                        </a:spcBef>
-                        <a:defRPr kumimoji="1" sz="2400">
-                          <a:solidFill>
-                            <a:schemeClr val="tx1"/>
-                          </a:solidFill>
-                          <a:latin typeface="Arial" panose="020B0604020202020204" pitchFamily="34" charset="0"/>
-                          <a:ea typeface="新細明體" panose="02020500000000000000" pitchFamily="18" charset="-120"/>
-                        </a:defRPr>
-                      </a:lvl2pPr>
-                      <a:lvl3pPr marL="909638">
-                        <a:spcBef>
-                          <a:spcPct val="20000"/>
-                        </a:spcBef>
-                        <a:defRPr kumimoji="1" sz="2000">
-                          <a:solidFill>
-                            <a:schemeClr val="tx1"/>
-                          </a:solidFill>
-                          <a:latin typeface="Arial" panose="020B0604020202020204" pitchFamily="34" charset="0"/>
-                          <a:ea typeface="新細明體" panose="02020500000000000000" pitchFamily="18" charset="-120"/>
-                        </a:defRPr>
-                      </a:lvl3pPr>
-                      <a:lvl4pPr marL="1306513">
-                        <a:spcBef>
-                          <a:spcPct val="20000"/>
-                        </a:spcBef>
-                        <a:defRPr kumimoji="1">
-                          <a:solidFill>
-                            <a:schemeClr val="tx1"/>
-                          </a:solidFill>
-                          <a:latin typeface="Arial" panose="020B0604020202020204" pitchFamily="34" charset="0"/>
-                          <a:ea typeface="新細明體" panose="02020500000000000000" pitchFamily="18" charset="-120"/>
-                        </a:defRPr>
-                      </a:lvl4pPr>
-                      <a:lvl5pPr marL="1695450">
-                        <a:spcBef>
-                          <a:spcPct val="20000"/>
-                        </a:spcBef>
-                        <a:defRPr kumimoji="1">
-                          <a:solidFill>
-                            <a:schemeClr val="tx1"/>
-                          </a:solidFill>
-                          <a:latin typeface="Arial" panose="020B0604020202020204" pitchFamily="34" charset="0"/>
-                          <a:ea typeface="新細明體" panose="02020500000000000000" pitchFamily="18" charset="-120"/>
-                        </a:defRPr>
-                      </a:lvl5pPr>
-                      <a:lvl6pPr marL="2152650" fontAlgn="base">
-                        <a:spcBef>
-                          <a:spcPct val="20000"/>
-                        </a:spcBef>
-                        <a:spcAft>
-                          <a:spcPct val="0"/>
-                        </a:spcAft>
-                        <a:defRPr kumimoji="1">
-                          <a:solidFill>
-                            <a:schemeClr val="tx1"/>
-                          </a:solidFill>
-                          <a:latin typeface="Arial" panose="020B0604020202020204" pitchFamily="34" charset="0"/>
-                          <a:ea typeface="新細明體" panose="02020500000000000000" pitchFamily="18" charset="-120"/>
-                        </a:defRPr>
-                      </a:lvl6pPr>
-                      <a:lvl7pPr marL="2609850" fontAlgn="base">
-                        <a:spcBef>
-                          <a:spcPct val="20000"/>
-                        </a:spcBef>
-                        <a:spcAft>
-                          <a:spcPct val="0"/>
-                        </a:spcAft>
-                        <a:defRPr kumimoji="1">
-                          <a:solidFill>
-                            <a:schemeClr val="tx1"/>
-                          </a:solidFill>
-                          <a:latin typeface="Arial" panose="020B0604020202020204" pitchFamily="34" charset="0"/>
-                          <a:ea typeface="新細明體" panose="02020500000000000000" pitchFamily="18" charset="-120"/>
-                        </a:defRPr>
-                      </a:lvl7pPr>
-                      <a:lvl8pPr marL="3067050" fontAlgn="base">
-                        <a:spcBef>
-                          <a:spcPct val="20000"/>
-                        </a:spcBef>
-                        <a:spcAft>
-                          <a:spcPct val="0"/>
-                        </a:spcAft>
-                        <a:defRPr kumimoji="1">
-                          <a:solidFill>
-                            <a:schemeClr val="tx1"/>
-                          </a:solidFill>
-                          <a:latin typeface="Arial" panose="020B0604020202020204" pitchFamily="34" charset="0"/>
-                          <a:ea typeface="新細明體" panose="02020500000000000000" pitchFamily="18" charset="-120"/>
-                        </a:defRPr>
-                      </a:lvl8pPr>
-                      <a:lvl9pPr marL="3524250" fontAlgn="base">
-                        <a:spcBef>
-                          <a:spcPct val="20000"/>
-                        </a:spcBef>
-                        <a:spcAft>
-                          <a:spcPct val="0"/>
-                        </a:spcAft>
-                        <a:defRPr kumimoji="1">
-                          <a:solidFill>
-                            <a:schemeClr val="tx1"/>
-                          </a:solidFill>
-                          <a:latin typeface="Arial" panose="020B0604020202020204" pitchFamily="34" charset="0"/>
-                          <a:ea typeface="新細明體" panose="02020500000000000000" pitchFamily="18" charset="-120"/>
-                        </a:defRPr>
-                      </a:lvl9pPr>
-                    </a:lstStyle>
                     <a:p>
                       <a:pPr marL="0" marR="0" lvl="0" indent="0" algn="ctr" defTabSz="914400" rtl="0" eaLnBrk="1" fontAlgn="base" latinLnBrk="0" hangingPunct="1">
                         <a:lnSpc>
-                          <a:spcPct val="100000"/>
+                          <a:spcPct val="80000"/>
                         </a:lnSpc>
                         <a:spcBef>
-                          <a:spcPct val="20000"/>
-                        </a:spcBef>
-                        <a:spcAft>
-                          <a:spcPct val="0"/>
-                        </a:spcAft>
-                        <a:buClrTx/>
-                        <a:buSzTx/>
-                        <a:buFontTx/>
-                        <a:buNone/>
-                        <a:tabLst/>
-                        <a:defRPr/>
-                      </a:pPr>
-                      <a:r>
-                        <a:rPr kumimoji="1" lang="en-US" altLang="zh-TW" sz="1500" b="1" i="0" u="none" strike="noStrike" cap="none" normalizeH="0" baseline="0" dirty="0">
-                          <a:ln>
-                            <a:noFill/>
-                          </a:ln>
-                          <a:solidFill>
-                            <a:schemeClr val="tx1"/>
-                          </a:solidFill>
-                          <a:effectLst/>
-                          <a:latin typeface="Microsoft YaHei" panose="020B0503020204020204" pitchFamily="34" charset="-122"/>
-                          <a:ea typeface="Microsoft YaHei" panose="020B0503020204020204" pitchFamily="34" charset="-122"/>
-                          <a:cs typeface="Arial Unicode MS" pitchFamily="34" charset="-120"/>
-                        </a:rPr>
-                        <a:t>140</a:t>
-                      </a:r>
-                    </a:p>
-                  </a:txBody>
-                  <a:tcPr marL="36000" marR="36000" marT="18000" marB="18000" anchor="ctr" horzOverflow="overflow"/>
-                </a:tc>
-                <a:tc>
-                  <a:txBody>
-                    <a:bodyPr/>
-                    <a:lstStyle>
-                      <a:lvl1pPr>
-                        <a:spcBef>
-                          <a:spcPct val="20000"/>
-                        </a:spcBef>
-                        <a:defRPr kumimoji="1" sz="2800">
-                          <a:solidFill>
-                            <a:schemeClr val="tx1"/>
-                          </a:solidFill>
-                          <a:latin typeface="Arial" panose="020B0604020202020204" pitchFamily="34" charset="0"/>
-                          <a:ea typeface="新細明體" panose="02020500000000000000" pitchFamily="18" charset="-120"/>
-                        </a:defRPr>
-                      </a:lvl1pPr>
-                      <a:lvl2pPr marL="471488">
-                        <a:spcBef>
-                          <a:spcPct val="20000"/>
-                        </a:spcBef>
-                        <a:defRPr kumimoji="1" sz="2400">
-                          <a:solidFill>
-                            <a:schemeClr val="tx1"/>
-                          </a:solidFill>
-                          <a:latin typeface="Arial" panose="020B0604020202020204" pitchFamily="34" charset="0"/>
-                          <a:ea typeface="新細明體" panose="02020500000000000000" pitchFamily="18" charset="-120"/>
-                        </a:defRPr>
-                      </a:lvl2pPr>
-                      <a:lvl3pPr marL="909638">
-                        <a:spcBef>
-                          <a:spcPct val="20000"/>
-                        </a:spcBef>
-                        <a:defRPr kumimoji="1" sz="2000">
-                          <a:solidFill>
-                            <a:schemeClr val="tx1"/>
-                          </a:solidFill>
-                          <a:latin typeface="Arial" panose="020B0604020202020204" pitchFamily="34" charset="0"/>
-                          <a:ea typeface="新細明體" panose="02020500000000000000" pitchFamily="18" charset="-120"/>
-                        </a:defRPr>
-                      </a:lvl3pPr>
-                      <a:lvl4pPr marL="1306513">
-                        <a:spcBef>
-                          <a:spcPct val="20000"/>
-                        </a:spcBef>
-                        <a:defRPr kumimoji="1">
-                          <a:solidFill>
-                            <a:schemeClr val="tx1"/>
-                          </a:solidFill>
-                          <a:latin typeface="Arial" panose="020B0604020202020204" pitchFamily="34" charset="0"/>
-                          <a:ea typeface="新細明體" panose="02020500000000000000" pitchFamily="18" charset="-120"/>
-                        </a:defRPr>
-                      </a:lvl4pPr>
-                      <a:lvl5pPr marL="1695450">
-                        <a:spcBef>
-                          <a:spcPct val="20000"/>
-                        </a:spcBef>
-                        <a:defRPr kumimoji="1">
-                          <a:solidFill>
-                            <a:schemeClr val="tx1"/>
-                          </a:solidFill>
-                          <a:latin typeface="Arial" panose="020B0604020202020204" pitchFamily="34" charset="0"/>
-                          <a:ea typeface="新細明體" panose="02020500000000000000" pitchFamily="18" charset="-120"/>
-                        </a:defRPr>
-                      </a:lvl5pPr>
-                      <a:lvl6pPr marL="2152650" fontAlgn="base">
-                        <a:spcBef>
-                          <a:spcPct val="20000"/>
-                        </a:spcBef>
-                        <a:spcAft>
-                          <a:spcPct val="0"/>
-                        </a:spcAft>
-                        <a:defRPr kumimoji="1">
-                          <a:solidFill>
-                            <a:schemeClr val="tx1"/>
-                          </a:solidFill>
-                          <a:latin typeface="Arial" panose="020B0604020202020204" pitchFamily="34" charset="0"/>
-                          <a:ea typeface="新細明體" panose="02020500000000000000" pitchFamily="18" charset="-120"/>
-                        </a:defRPr>
-                      </a:lvl6pPr>
-                      <a:lvl7pPr marL="2609850" fontAlgn="base">
-                        <a:spcBef>
-                          <a:spcPct val="20000"/>
-                        </a:spcBef>
-                        <a:spcAft>
-                          <a:spcPct val="0"/>
-                        </a:spcAft>
-                        <a:defRPr kumimoji="1">
-                          <a:solidFill>
-                            <a:schemeClr val="tx1"/>
-                          </a:solidFill>
-                          <a:latin typeface="Arial" panose="020B0604020202020204" pitchFamily="34" charset="0"/>
-                          <a:ea typeface="新細明體" panose="02020500000000000000" pitchFamily="18" charset="-120"/>
-                        </a:defRPr>
-                      </a:lvl7pPr>
-                      <a:lvl8pPr marL="3067050" fontAlgn="base">
-                        <a:spcBef>
-                          <a:spcPct val="20000"/>
-                        </a:spcBef>
-                        <a:spcAft>
-                          <a:spcPct val="0"/>
-                        </a:spcAft>
-                        <a:defRPr kumimoji="1">
-                          <a:solidFill>
-                            <a:schemeClr val="tx1"/>
-                          </a:solidFill>
-                          <a:latin typeface="Arial" panose="020B0604020202020204" pitchFamily="34" charset="0"/>
-                          <a:ea typeface="新細明體" panose="02020500000000000000" pitchFamily="18" charset="-120"/>
-                        </a:defRPr>
-                      </a:lvl8pPr>
-                      <a:lvl9pPr marL="3524250" fontAlgn="base">
-                        <a:spcBef>
-                          <a:spcPct val="20000"/>
-                        </a:spcBef>
-                        <a:spcAft>
-                          <a:spcPct val="0"/>
-                        </a:spcAft>
-                        <a:defRPr kumimoji="1">
-                          <a:solidFill>
-                            <a:schemeClr val="tx1"/>
-                          </a:solidFill>
-                          <a:latin typeface="Arial" panose="020B0604020202020204" pitchFamily="34" charset="0"/>
-                          <a:ea typeface="新細明體" panose="02020500000000000000" pitchFamily="18" charset="-120"/>
-                        </a:defRPr>
-                      </a:lvl9pPr>
-                    </a:lstStyle>
-                    <a:p>
-                      <a:pPr marL="0" marR="0" lvl="0" indent="0" algn="ctr" defTabSz="914400" rtl="0" eaLnBrk="1" fontAlgn="base" latinLnBrk="0" hangingPunct="1">
-                        <a:lnSpc>
-                          <a:spcPct val="100000"/>
-                        </a:lnSpc>
-                        <a:spcBef>
-                          <a:spcPct val="20000"/>
+                          <a:spcPct val="0"/>
                         </a:spcBef>
                         <a:spcAft>
                           <a:spcPct val="0"/>
@@ -7531,712 +9334,6 @@
                         <a:tabLst/>
                       </a:pPr>
                       <a:r>
-                        <a:rPr kumimoji="1" lang="en-US" altLang="zh-TW" sz="1500" b="1" i="0" u="none" strike="noStrike" cap="none" normalizeH="0" baseline="0" dirty="0">
-                          <a:ln>
-                            <a:noFill/>
-                          </a:ln>
-                          <a:solidFill>
-                            <a:schemeClr val="tx1"/>
-                          </a:solidFill>
-                          <a:effectLst/>
-                          <a:latin typeface="Microsoft YaHei" panose="020B0503020204020204" pitchFamily="34" charset="-122"/>
-                          <a:ea typeface="Microsoft YaHei" panose="020B0503020204020204" pitchFamily="34" charset="-122"/>
-                          <a:cs typeface="Arial Unicode MS" pitchFamily="34" charset="-120"/>
-                        </a:rPr>
-                        <a:t>140</a:t>
-                      </a:r>
-                    </a:p>
-                  </a:txBody>
-                  <a:tcPr marL="36000" marR="36000" marT="18000" marB="18000" anchor="ctr" horzOverflow="overflow"/>
-                </a:tc>
-                <a:tc>
-                  <a:txBody>
-                    <a:bodyPr/>
-                    <a:lstStyle>
-                      <a:lvl1pPr>
-                        <a:spcBef>
-                          <a:spcPct val="20000"/>
-                        </a:spcBef>
-                        <a:defRPr kumimoji="1" sz="2800">
-                          <a:solidFill>
-                            <a:schemeClr val="tx1"/>
-                          </a:solidFill>
-                          <a:latin typeface="Arial" panose="020B0604020202020204" pitchFamily="34" charset="0"/>
-                          <a:ea typeface="新細明體" panose="02020500000000000000" pitchFamily="18" charset="-120"/>
-                        </a:defRPr>
-                      </a:lvl1pPr>
-                      <a:lvl2pPr marL="471488">
-                        <a:spcBef>
-                          <a:spcPct val="20000"/>
-                        </a:spcBef>
-                        <a:defRPr kumimoji="1" sz="2400">
-                          <a:solidFill>
-                            <a:schemeClr val="tx1"/>
-                          </a:solidFill>
-                          <a:latin typeface="Arial" panose="020B0604020202020204" pitchFamily="34" charset="0"/>
-                          <a:ea typeface="新細明體" panose="02020500000000000000" pitchFamily="18" charset="-120"/>
-                        </a:defRPr>
-                      </a:lvl2pPr>
-                      <a:lvl3pPr marL="909638">
-                        <a:spcBef>
-                          <a:spcPct val="20000"/>
-                        </a:spcBef>
-                        <a:defRPr kumimoji="1" sz="2000">
-                          <a:solidFill>
-                            <a:schemeClr val="tx1"/>
-                          </a:solidFill>
-                          <a:latin typeface="Arial" panose="020B0604020202020204" pitchFamily="34" charset="0"/>
-                          <a:ea typeface="新細明體" panose="02020500000000000000" pitchFamily="18" charset="-120"/>
-                        </a:defRPr>
-                      </a:lvl3pPr>
-                      <a:lvl4pPr marL="1306513">
-                        <a:spcBef>
-                          <a:spcPct val="20000"/>
-                        </a:spcBef>
-                        <a:defRPr kumimoji="1">
-                          <a:solidFill>
-                            <a:schemeClr val="tx1"/>
-                          </a:solidFill>
-                          <a:latin typeface="Arial" panose="020B0604020202020204" pitchFamily="34" charset="0"/>
-                          <a:ea typeface="新細明體" panose="02020500000000000000" pitchFamily="18" charset="-120"/>
-                        </a:defRPr>
-                      </a:lvl4pPr>
-                      <a:lvl5pPr marL="1695450">
-                        <a:spcBef>
-                          <a:spcPct val="20000"/>
-                        </a:spcBef>
-                        <a:defRPr kumimoji="1">
-                          <a:solidFill>
-                            <a:schemeClr val="tx1"/>
-                          </a:solidFill>
-                          <a:latin typeface="Arial" panose="020B0604020202020204" pitchFamily="34" charset="0"/>
-                          <a:ea typeface="新細明體" panose="02020500000000000000" pitchFamily="18" charset="-120"/>
-                        </a:defRPr>
-                      </a:lvl5pPr>
-                      <a:lvl6pPr marL="2152650" fontAlgn="base">
-                        <a:spcBef>
-                          <a:spcPct val="20000"/>
-                        </a:spcBef>
-                        <a:spcAft>
-                          <a:spcPct val="0"/>
-                        </a:spcAft>
-                        <a:defRPr kumimoji="1">
-                          <a:solidFill>
-                            <a:schemeClr val="tx1"/>
-                          </a:solidFill>
-                          <a:latin typeface="Arial" panose="020B0604020202020204" pitchFamily="34" charset="0"/>
-                          <a:ea typeface="新細明體" panose="02020500000000000000" pitchFamily="18" charset="-120"/>
-                        </a:defRPr>
-                      </a:lvl6pPr>
-                      <a:lvl7pPr marL="2609850" fontAlgn="base">
-                        <a:spcBef>
-                          <a:spcPct val="20000"/>
-                        </a:spcBef>
-                        <a:spcAft>
-                          <a:spcPct val="0"/>
-                        </a:spcAft>
-                        <a:defRPr kumimoji="1">
-                          <a:solidFill>
-                            <a:schemeClr val="tx1"/>
-                          </a:solidFill>
-                          <a:latin typeface="Arial" panose="020B0604020202020204" pitchFamily="34" charset="0"/>
-                          <a:ea typeface="新細明體" panose="02020500000000000000" pitchFamily="18" charset="-120"/>
-                        </a:defRPr>
-                      </a:lvl7pPr>
-                      <a:lvl8pPr marL="3067050" fontAlgn="base">
-                        <a:spcBef>
-                          <a:spcPct val="20000"/>
-                        </a:spcBef>
-                        <a:spcAft>
-                          <a:spcPct val="0"/>
-                        </a:spcAft>
-                        <a:defRPr kumimoji="1">
-                          <a:solidFill>
-                            <a:schemeClr val="tx1"/>
-                          </a:solidFill>
-                          <a:latin typeface="Arial" panose="020B0604020202020204" pitchFamily="34" charset="0"/>
-                          <a:ea typeface="新細明體" panose="02020500000000000000" pitchFamily="18" charset="-120"/>
-                        </a:defRPr>
-                      </a:lvl8pPr>
-                      <a:lvl9pPr marL="3524250" fontAlgn="base">
-                        <a:spcBef>
-                          <a:spcPct val="20000"/>
-                        </a:spcBef>
-                        <a:spcAft>
-                          <a:spcPct val="0"/>
-                        </a:spcAft>
-                        <a:defRPr kumimoji="1">
-                          <a:solidFill>
-                            <a:schemeClr val="tx1"/>
-                          </a:solidFill>
-                          <a:latin typeface="Arial" panose="020B0604020202020204" pitchFamily="34" charset="0"/>
-                          <a:ea typeface="新細明體" panose="02020500000000000000" pitchFamily="18" charset="-120"/>
-                        </a:defRPr>
-                      </a:lvl9pPr>
-                    </a:lstStyle>
-                    <a:p>
-                      <a:pPr marL="0" marR="0" lvl="0" indent="0" algn="ctr" defTabSz="914400" rtl="0" eaLnBrk="1" fontAlgn="base" latinLnBrk="0" hangingPunct="1">
-                        <a:lnSpc>
-                          <a:spcPct val="100000"/>
-                        </a:lnSpc>
-                        <a:spcBef>
-                          <a:spcPct val="20000"/>
-                        </a:spcBef>
-                        <a:spcAft>
-                          <a:spcPct val="0"/>
-                        </a:spcAft>
-                        <a:buClrTx/>
-                        <a:buSzTx/>
-                        <a:buFontTx/>
-                        <a:buNone/>
-                        <a:tabLst/>
-                      </a:pPr>
-                      <a:r>
-                        <a:rPr kumimoji="1" lang="en-US" altLang="zh-TW" sz="1500" b="1" i="0" u="none" strike="noStrike" cap="none" normalizeH="0" baseline="0" dirty="0">
-                          <a:ln>
-                            <a:noFill/>
-                          </a:ln>
-                          <a:solidFill>
-                            <a:schemeClr val="tx1"/>
-                          </a:solidFill>
-                          <a:effectLst/>
-                          <a:latin typeface="Microsoft YaHei" panose="020B0503020204020204" pitchFamily="34" charset="-122"/>
-                          <a:ea typeface="Microsoft YaHei" panose="020B0503020204020204" pitchFamily="34" charset="-122"/>
-                          <a:cs typeface="Arial Unicode MS" pitchFamily="34" charset="-120"/>
-                        </a:rPr>
-                        <a:t>130</a:t>
-                      </a:r>
-                    </a:p>
-                  </a:txBody>
-                  <a:tcPr marL="36000" marR="36000" marT="18000" marB="18000" anchor="ctr" horzOverflow="overflow"/>
-                </a:tc>
-                <a:tc>
-                  <a:txBody>
-                    <a:bodyPr/>
-                    <a:lstStyle>
-                      <a:lvl1pPr>
-                        <a:spcBef>
-                          <a:spcPct val="20000"/>
-                        </a:spcBef>
-                        <a:defRPr kumimoji="1" sz="2800">
-                          <a:solidFill>
-                            <a:schemeClr val="tx1"/>
-                          </a:solidFill>
-                          <a:latin typeface="Arial" panose="020B0604020202020204" pitchFamily="34" charset="0"/>
-                          <a:ea typeface="新細明體" panose="02020500000000000000" pitchFamily="18" charset="-120"/>
-                        </a:defRPr>
-                      </a:lvl1pPr>
-                      <a:lvl2pPr marL="471488">
-                        <a:spcBef>
-                          <a:spcPct val="20000"/>
-                        </a:spcBef>
-                        <a:defRPr kumimoji="1" sz="2400">
-                          <a:solidFill>
-                            <a:schemeClr val="tx1"/>
-                          </a:solidFill>
-                          <a:latin typeface="Arial" panose="020B0604020202020204" pitchFamily="34" charset="0"/>
-                          <a:ea typeface="新細明體" panose="02020500000000000000" pitchFamily="18" charset="-120"/>
-                        </a:defRPr>
-                      </a:lvl2pPr>
-                      <a:lvl3pPr marL="909638">
-                        <a:spcBef>
-                          <a:spcPct val="20000"/>
-                        </a:spcBef>
-                        <a:defRPr kumimoji="1" sz="2000">
-                          <a:solidFill>
-                            <a:schemeClr val="tx1"/>
-                          </a:solidFill>
-                          <a:latin typeface="Arial" panose="020B0604020202020204" pitchFamily="34" charset="0"/>
-                          <a:ea typeface="新細明體" panose="02020500000000000000" pitchFamily="18" charset="-120"/>
-                        </a:defRPr>
-                      </a:lvl3pPr>
-                      <a:lvl4pPr marL="1306513">
-                        <a:spcBef>
-                          <a:spcPct val="20000"/>
-                        </a:spcBef>
-                        <a:defRPr kumimoji="1">
-                          <a:solidFill>
-                            <a:schemeClr val="tx1"/>
-                          </a:solidFill>
-                          <a:latin typeface="Arial" panose="020B0604020202020204" pitchFamily="34" charset="0"/>
-                          <a:ea typeface="新細明體" panose="02020500000000000000" pitchFamily="18" charset="-120"/>
-                        </a:defRPr>
-                      </a:lvl4pPr>
-                      <a:lvl5pPr marL="1695450">
-                        <a:spcBef>
-                          <a:spcPct val="20000"/>
-                        </a:spcBef>
-                        <a:defRPr kumimoji="1">
-                          <a:solidFill>
-                            <a:schemeClr val="tx1"/>
-                          </a:solidFill>
-                          <a:latin typeface="Arial" panose="020B0604020202020204" pitchFamily="34" charset="0"/>
-                          <a:ea typeface="新細明體" panose="02020500000000000000" pitchFamily="18" charset="-120"/>
-                        </a:defRPr>
-                      </a:lvl5pPr>
-                      <a:lvl6pPr marL="2152650" fontAlgn="base">
-                        <a:spcBef>
-                          <a:spcPct val="20000"/>
-                        </a:spcBef>
-                        <a:spcAft>
-                          <a:spcPct val="0"/>
-                        </a:spcAft>
-                        <a:defRPr kumimoji="1">
-                          <a:solidFill>
-                            <a:schemeClr val="tx1"/>
-                          </a:solidFill>
-                          <a:latin typeface="Arial" panose="020B0604020202020204" pitchFamily="34" charset="0"/>
-                          <a:ea typeface="新細明體" panose="02020500000000000000" pitchFamily="18" charset="-120"/>
-                        </a:defRPr>
-                      </a:lvl6pPr>
-                      <a:lvl7pPr marL="2609850" fontAlgn="base">
-                        <a:spcBef>
-                          <a:spcPct val="20000"/>
-                        </a:spcBef>
-                        <a:spcAft>
-                          <a:spcPct val="0"/>
-                        </a:spcAft>
-                        <a:defRPr kumimoji="1">
-                          <a:solidFill>
-                            <a:schemeClr val="tx1"/>
-                          </a:solidFill>
-                          <a:latin typeface="Arial" panose="020B0604020202020204" pitchFamily="34" charset="0"/>
-                          <a:ea typeface="新細明體" panose="02020500000000000000" pitchFamily="18" charset="-120"/>
-                        </a:defRPr>
-                      </a:lvl7pPr>
-                      <a:lvl8pPr marL="3067050" fontAlgn="base">
-                        <a:spcBef>
-                          <a:spcPct val="20000"/>
-                        </a:spcBef>
-                        <a:spcAft>
-                          <a:spcPct val="0"/>
-                        </a:spcAft>
-                        <a:defRPr kumimoji="1">
-                          <a:solidFill>
-                            <a:schemeClr val="tx1"/>
-                          </a:solidFill>
-                          <a:latin typeface="Arial" panose="020B0604020202020204" pitchFamily="34" charset="0"/>
-                          <a:ea typeface="新細明體" panose="02020500000000000000" pitchFamily="18" charset="-120"/>
-                        </a:defRPr>
-                      </a:lvl8pPr>
-                      <a:lvl9pPr marL="3524250" fontAlgn="base">
-                        <a:spcBef>
-                          <a:spcPct val="20000"/>
-                        </a:spcBef>
-                        <a:spcAft>
-                          <a:spcPct val="0"/>
-                        </a:spcAft>
-                        <a:defRPr kumimoji="1">
-                          <a:solidFill>
-                            <a:schemeClr val="tx1"/>
-                          </a:solidFill>
-                          <a:latin typeface="Arial" panose="020B0604020202020204" pitchFamily="34" charset="0"/>
-                          <a:ea typeface="新細明體" panose="02020500000000000000" pitchFamily="18" charset="-120"/>
-                        </a:defRPr>
-                      </a:lvl9pPr>
-                    </a:lstStyle>
-                    <a:p>
-                      <a:pPr marL="0" marR="0" lvl="0" indent="0" algn="ctr" defTabSz="914400" rtl="0" eaLnBrk="1" fontAlgn="base" latinLnBrk="0" hangingPunct="1">
-                        <a:lnSpc>
-                          <a:spcPct val="100000"/>
-                        </a:lnSpc>
-                        <a:spcBef>
-                          <a:spcPct val="20000"/>
-                        </a:spcBef>
-                        <a:spcAft>
-                          <a:spcPct val="0"/>
-                        </a:spcAft>
-                        <a:buClrTx/>
-                        <a:buSzTx/>
-                        <a:buFontTx/>
-                        <a:buNone/>
-                        <a:tabLst/>
-                      </a:pPr>
-                      <a:r>
-                        <a:rPr kumimoji="1" lang="en-US" altLang="zh-TW" sz="1500" b="1" i="0" u="none" strike="noStrike" cap="none" normalizeH="0" baseline="0" dirty="0">
-                          <a:ln>
-                            <a:noFill/>
-                          </a:ln>
-                          <a:solidFill>
-                            <a:schemeClr val="tx1"/>
-                          </a:solidFill>
-                          <a:effectLst/>
-                          <a:latin typeface="Microsoft YaHei" panose="020B0503020204020204" pitchFamily="34" charset="-122"/>
-                          <a:ea typeface="Microsoft YaHei" panose="020B0503020204020204" pitchFamily="34" charset="-122"/>
-                          <a:cs typeface="Arial Unicode MS" pitchFamily="34" charset="-120"/>
-                        </a:rPr>
-                        <a:t>270</a:t>
-                      </a:r>
-                    </a:p>
-                  </a:txBody>
-                  <a:tcPr marL="36000" marR="36000" marT="18000" marB="18000" anchor="ctr" horzOverflow="overflow"/>
-                </a:tc>
-                <a:tc>
-                  <a:txBody>
-                    <a:bodyPr/>
-                    <a:lstStyle>
-                      <a:lvl1pPr>
-                        <a:spcBef>
-                          <a:spcPct val="20000"/>
-                        </a:spcBef>
-                        <a:defRPr kumimoji="1" sz="2800">
-                          <a:solidFill>
-                            <a:schemeClr val="tx1"/>
-                          </a:solidFill>
-                          <a:latin typeface="Arial" panose="020B0604020202020204" pitchFamily="34" charset="0"/>
-                          <a:ea typeface="新細明體" panose="02020500000000000000" pitchFamily="18" charset="-120"/>
-                        </a:defRPr>
-                      </a:lvl1pPr>
-                      <a:lvl2pPr marL="471488">
-                        <a:spcBef>
-                          <a:spcPct val="20000"/>
-                        </a:spcBef>
-                        <a:defRPr kumimoji="1" sz="2400">
-                          <a:solidFill>
-                            <a:schemeClr val="tx1"/>
-                          </a:solidFill>
-                          <a:latin typeface="Arial" panose="020B0604020202020204" pitchFamily="34" charset="0"/>
-                          <a:ea typeface="新細明體" panose="02020500000000000000" pitchFamily="18" charset="-120"/>
-                        </a:defRPr>
-                      </a:lvl2pPr>
-                      <a:lvl3pPr marL="909638">
-                        <a:spcBef>
-                          <a:spcPct val="20000"/>
-                        </a:spcBef>
-                        <a:defRPr kumimoji="1" sz="2000">
-                          <a:solidFill>
-                            <a:schemeClr val="tx1"/>
-                          </a:solidFill>
-                          <a:latin typeface="Arial" panose="020B0604020202020204" pitchFamily="34" charset="0"/>
-                          <a:ea typeface="新細明體" panose="02020500000000000000" pitchFamily="18" charset="-120"/>
-                        </a:defRPr>
-                      </a:lvl3pPr>
-                      <a:lvl4pPr marL="1306513">
-                        <a:spcBef>
-                          <a:spcPct val="20000"/>
-                        </a:spcBef>
-                        <a:defRPr kumimoji="1">
-                          <a:solidFill>
-                            <a:schemeClr val="tx1"/>
-                          </a:solidFill>
-                          <a:latin typeface="Arial" panose="020B0604020202020204" pitchFamily="34" charset="0"/>
-                          <a:ea typeface="新細明體" panose="02020500000000000000" pitchFamily="18" charset="-120"/>
-                        </a:defRPr>
-                      </a:lvl4pPr>
-                      <a:lvl5pPr marL="1695450">
-                        <a:spcBef>
-                          <a:spcPct val="20000"/>
-                        </a:spcBef>
-                        <a:defRPr kumimoji="1">
-                          <a:solidFill>
-                            <a:schemeClr val="tx1"/>
-                          </a:solidFill>
-                          <a:latin typeface="Arial" panose="020B0604020202020204" pitchFamily="34" charset="0"/>
-                          <a:ea typeface="新細明體" panose="02020500000000000000" pitchFamily="18" charset="-120"/>
-                        </a:defRPr>
-                      </a:lvl5pPr>
-                      <a:lvl6pPr marL="2152650" fontAlgn="base">
-                        <a:spcBef>
-                          <a:spcPct val="20000"/>
-                        </a:spcBef>
-                        <a:spcAft>
-                          <a:spcPct val="0"/>
-                        </a:spcAft>
-                        <a:defRPr kumimoji="1">
-                          <a:solidFill>
-                            <a:schemeClr val="tx1"/>
-                          </a:solidFill>
-                          <a:latin typeface="Arial" panose="020B0604020202020204" pitchFamily="34" charset="0"/>
-                          <a:ea typeface="新細明體" panose="02020500000000000000" pitchFamily="18" charset="-120"/>
-                        </a:defRPr>
-                      </a:lvl6pPr>
-                      <a:lvl7pPr marL="2609850" fontAlgn="base">
-                        <a:spcBef>
-                          <a:spcPct val="20000"/>
-                        </a:spcBef>
-                        <a:spcAft>
-                          <a:spcPct val="0"/>
-                        </a:spcAft>
-                        <a:defRPr kumimoji="1">
-                          <a:solidFill>
-                            <a:schemeClr val="tx1"/>
-                          </a:solidFill>
-                          <a:latin typeface="Arial" panose="020B0604020202020204" pitchFamily="34" charset="0"/>
-                          <a:ea typeface="新細明體" panose="02020500000000000000" pitchFamily="18" charset="-120"/>
-                        </a:defRPr>
-                      </a:lvl7pPr>
-                      <a:lvl8pPr marL="3067050" fontAlgn="base">
-                        <a:spcBef>
-                          <a:spcPct val="20000"/>
-                        </a:spcBef>
-                        <a:spcAft>
-                          <a:spcPct val="0"/>
-                        </a:spcAft>
-                        <a:defRPr kumimoji="1">
-                          <a:solidFill>
-                            <a:schemeClr val="tx1"/>
-                          </a:solidFill>
-                          <a:latin typeface="Arial" panose="020B0604020202020204" pitchFamily="34" charset="0"/>
-                          <a:ea typeface="新細明體" panose="02020500000000000000" pitchFamily="18" charset="-120"/>
-                        </a:defRPr>
-                      </a:lvl8pPr>
-                      <a:lvl9pPr marL="3524250" fontAlgn="base">
-                        <a:spcBef>
-                          <a:spcPct val="20000"/>
-                        </a:spcBef>
-                        <a:spcAft>
-                          <a:spcPct val="0"/>
-                        </a:spcAft>
-                        <a:defRPr kumimoji="1">
-                          <a:solidFill>
-                            <a:schemeClr val="tx1"/>
-                          </a:solidFill>
-                          <a:latin typeface="Arial" panose="020B0604020202020204" pitchFamily="34" charset="0"/>
-                          <a:ea typeface="新細明體" panose="02020500000000000000" pitchFamily="18" charset="-120"/>
-                        </a:defRPr>
-                      </a:lvl9pPr>
-                    </a:lstStyle>
-                    <a:p>
-                      <a:pPr marL="0" marR="0" lvl="0" indent="0" algn="ctr" defTabSz="914400" rtl="0" eaLnBrk="1" fontAlgn="base" latinLnBrk="0" hangingPunct="1">
-                        <a:lnSpc>
-                          <a:spcPct val="100000"/>
-                        </a:lnSpc>
-                        <a:spcBef>
-                          <a:spcPct val="20000"/>
-                        </a:spcBef>
-                        <a:spcAft>
-                          <a:spcPct val="0"/>
-                        </a:spcAft>
-                        <a:buClrTx/>
-                        <a:buSzTx/>
-                        <a:buFontTx/>
-                        <a:buNone/>
-                        <a:tabLst/>
-                        <a:defRPr/>
-                      </a:pPr>
-                      <a:r>
-                        <a:rPr kumimoji="1" lang="en-US" altLang="zh-TW" sz="1500" b="1" i="0" u="none" strike="noStrike" cap="none" normalizeH="0" baseline="0" dirty="0">
-                          <a:ln>
-                            <a:noFill/>
-                          </a:ln>
-                          <a:solidFill>
-                            <a:schemeClr val="tx1"/>
-                          </a:solidFill>
-                          <a:effectLst/>
-                          <a:latin typeface="Microsoft YaHei" panose="020B0503020204020204" pitchFamily="34" charset="-122"/>
-                          <a:ea typeface="Microsoft YaHei" panose="020B0503020204020204" pitchFamily="34" charset="-122"/>
-                          <a:cs typeface="Arial Unicode MS" pitchFamily="34" charset="-120"/>
-                        </a:rPr>
-                        <a:t>140</a:t>
-                      </a:r>
-                    </a:p>
-                  </a:txBody>
-                  <a:tcPr marL="36000" marR="36000" marT="18000" marB="18000" anchor="ctr" horzOverflow="overflow"/>
-                </a:tc>
-                <a:tc>
-                  <a:txBody>
-                    <a:bodyPr/>
-                    <a:lstStyle>
-                      <a:lvl1pPr>
-                        <a:spcBef>
-                          <a:spcPct val="20000"/>
-                        </a:spcBef>
-                        <a:defRPr kumimoji="1" sz="2800">
-                          <a:solidFill>
-                            <a:schemeClr val="tx1"/>
-                          </a:solidFill>
-                          <a:latin typeface="Arial" panose="020B0604020202020204" pitchFamily="34" charset="0"/>
-                          <a:ea typeface="新細明體" panose="02020500000000000000" pitchFamily="18" charset="-120"/>
-                        </a:defRPr>
-                      </a:lvl1pPr>
-                      <a:lvl2pPr marL="471488">
-                        <a:spcBef>
-                          <a:spcPct val="20000"/>
-                        </a:spcBef>
-                        <a:defRPr kumimoji="1" sz="2400">
-                          <a:solidFill>
-                            <a:schemeClr val="tx1"/>
-                          </a:solidFill>
-                          <a:latin typeface="Arial" panose="020B0604020202020204" pitchFamily="34" charset="0"/>
-                          <a:ea typeface="新細明體" panose="02020500000000000000" pitchFamily="18" charset="-120"/>
-                        </a:defRPr>
-                      </a:lvl2pPr>
-                      <a:lvl3pPr marL="909638">
-                        <a:spcBef>
-                          <a:spcPct val="20000"/>
-                        </a:spcBef>
-                        <a:defRPr kumimoji="1" sz="2000">
-                          <a:solidFill>
-                            <a:schemeClr val="tx1"/>
-                          </a:solidFill>
-                          <a:latin typeface="Arial" panose="020B0604020202020204" pitchFamily="34" charset="0"/>
-                          <a:ea typeface="新細明體" panose="02020500000000000000" pitchFamily="18" charset="-120"/>
-                        </a:defRPr>
-                      </a:lvl3pPr>
-                      <a:lvl4pPr marL="1306513">
-                        <a:spcBef>
-                          <a:spcPct val="20000"/>
-                        </a:spcBef>
-                        <a:defRPr kumimoji="1">
-                          <a:solidFill>
-                            <a:schemeClr val="tx1"/>
-                          </a:solidFill>
-                          <a:latin typeface="Arial" panose="020B0604020202020204" pitchFamily="34" charset="0"/>
-                          <a:ea typeface="新細明體" panose="02020500000000000000" pitchFamily="18" charset="-120"/>
-                        </a:defRPr>
-                      </a:lvl4pPr>
-                      <a:lvl5pPr marL="1695450">
-                        <a:spcBef>
-                          <a:spcPct val="20000"/>
-                        </a:spcBef>
-                        <a:defRPr kumimoji="1">
-                          <a:solidFill>
-                            <a:schemeClr val="tx1"/>
-                          </a:solidFill>
-                          <a:latin typeface="Arial" panose="020B0604020202020204" pitchFamily="34" charset="0"/>
-                          <a:ea typeface="新細明體" panose="02020500000000000000" pitchFamily="18" charset="-120"/>
-                        </a:defRPr>
-                      </a:lvl5pPr>
-                      <a:lvl6pPr marL="2152650" fontAlgn="base">
-                        <a:spcBef>
-                          <a:spcPct val="20000"/>
-                        </a:spcBef>
-                        <a:spcAft>
-                          <a:spcPct val="0"/>
-                        </a:spcAft>
-                        <a:defRPr kumimoji="1">
-                          <a:solidFill>
-                            <a:schemeClr val="tx1"/>
-                          </a:solidFill>
-                          <a:latin typeface="Arial" panose="020B0604020202020204" pitchFamily="34" charset="0"/>
-                          <a:ea typeface="新細明體" panose="02020500000000000000" pitchFamily="18" charset="-120"/>
-                        </a:defRPr>
-                      </a:lvl6pPr>
-                      <a:lvl7pPr marL="2609850" fontAlgn="base">
-                        <a:spcBef>
-                          <a:spcPct val="20000"/>
-                        </a:spcBef>
-                        <a:spcAft>
-                          <a:spcPct val="0"/>
-                        </a:spcAft>
-                        <a:defRPr kumimoji="1">
-                          <a:solidFill>
-                            <a:schemeClr val="tx1"/>
-                          </a:solidFill>
-                          <a:latin typeface="Arial" panose="020B0604020202020204" pitchFamily="34" charset="0"/>
-                          <a:ea typeface="新細明體" panose="02020500000000000000" pitchFamily="18" charset="-120"/>
-                        </a:defRPr>
-                      </a:lvl7pPr>
-                      <a:lvl8pPr marL="3067050" fontAlgn="base">
-                        <a:spcBef>
-                          <a:spcPct val="20000"/>
-                        </a:spcBef>
-                        <a:spcAft>
-                          <a:spcPct val="0"/>
-                        </a:spcAft>
-                        <a:defRPr kumimoji="1">
-                          <a:solidFill>
-                            <a:schemeClr val="tx1"/>
-                          </a:solidFill>
-                          <a:latin typeface="Arial" panose="020B0604020202020204" pitchFamily="34" charset="0"/>
-                          <a:ea typeface="新細明體" panose="02020500000000000000" pitchFamily="18" charset="-120"/>
-                        </a:defRPr>
-                      </a:lvl8pPr>
-                      <a:lvl9pPr marL="3524250" fontAlgn="base">
-                        <a:spcBef>
-                          <a:spcPct val="20000"/>
-                        </a:spcBef>
-                        <a:spcAft>
-                          <a:spcPct val="0"/>
-                        </a:spcAft>
-                        <a:defRPr kumimoji="1">
-                          <a:solidFill>
-                            <a:schemeClr val="tx1"/>
-                          </a:solidFill>
-                          <a:latin typeface="Arial" panose="020B0604020202020204" pitchFamily="34" charset="0"/>
-                          <a:ea typeface="新細明體" panose="02020500000000000000" pitchFamily="18" charset="-120"/>
-                        </a:defRPr>
-                      </a:lvl9pPr>
-                    </a:lstStyle>
-                    <a:p>
-                      <a:pPr marL="0" marR="0" lvl="0" indent="0" algn="ctr" defTabSz="914400" rtl="0" eaLnBrk="1" fontAlgn="base" latinLnBrk="0" hangingPunct="1">
-                        <a:lnSpc>
-                          <a:spcPct val="100000"/>
-                        </a:lnSpc>
-                        <a:spcBef>
-                          <a:spcPct val="20000"/>
-                        </a:spcBef>
-                        <a:spcAft>
-                          <a:spcPct val="0"/>
-                        </a:spcAft>
-                        <a:buClrTx/>
-                        <a:buSzTx/>
-                        <a:buFontTx/>
-                        <a:buNone/>
-                        <a:tabLst/>
-                      </a:pPr>
-                      <a:r>
-                        <a:rPr kumimoji="1" lang="en-US" altLang="zh-TW" sz="1500" b="1" i="0" u="none" strike="noStrike" cap="none" normalizeH="0" baseline="0" dirty="0">
-                          <a:ln>
-                            <a:noFill/>
-                          </a:ln>
-                          <a:solidFill>
-                            <a:schemeClr val="tx1"/>
-                          </a:solidFill>
-                          <a:effectLst/>
-                          <a:latin typeface="Microsoft YaHei" panose="020B0503020204020204" pitchFamily="34" charset="-122"/>
-                          <a:ea typeface="Microsoft YaHei" panose="020B0503020204020204" pitchFamily="34" charset="-122"/>
-                          <a:cs typeface="Arial Unicode MS" pitchFamily="34" charset="-120"/>
-                        </a:rPr>
-                        <a:t>80</a:t>
-                      </a:r>
-                    </a:p>
-                  </a:txBody>
-                  <a:tcPr marL="36000" marR="36000" marT="18000" marB="18000" anchor="ctr" horzOverflow="overflow"/>
-                </a:tc>
-                <a:extLst>
-                  <a:ext uri="{0D108BD9-81ED-4DB2-BD59-A6C34878D82A}">
-                    <a16:rowId xmlns:a16="http://schemas.microsoft.com/office/drawing/2014/main" val="3653864738"/>
-                  </a:ext>
-                </a:extLst>
-              </a:tr>
-              <a:tr h="328740">
-                <a:tc gridSpan="3">
-                  <a:txBody>
-                    <a:bodyPr/>
-                    <a:lstStyle/>
-                    <a:p>
-                      <a:pPr marL="0" marR="0" lvl="0" indent="0" algn="ctr" defTabSz="914400" rtl="0" eaLnBrk="1" fontAlgn="base" latinLnBrk="0" hangingPunct="1">
-                        <a:lnSpc>
-                          <a:spcPct val="80000"/>
-                        </a:lnSpc>
-                        <a:spcBef>
-                          <a:spcPct val="20000"/>
-                        </a:spcBef>
-                        <a:spcAft>
-                          <a:spcPct val="0"/>
-                        </a:spcAft>
-                        <a:buClrTx/>
-                        <a:buSzTx/>
-                        <a:buFontTx/>
-                        <a:buNone/>
-                        <a:tabLst/>
-                      </a:pPr>
-                      <a:r>
-                        <a:rPr kumimoji="1" lang="en-US" altLang="zh-TW" sz="1700" b="1" i="0" u="none" strike="noStrike" cap="none" normalizeH="0" baseline="0" dirty="0">
-                          <a:ln>
-                            <a:noFill/>
-                          </a:ln>
-                          <a:solidFill>
-                            <a:schemeClr val="tx1"/>
-                          </a:solidFill>
-                          <a:effectLst/>
-                          <a:latin typeface="Microsoft YaHei" panose="020B0503020204020204" pitchFamily="34" charset="-122"/>
-                          <a:ea typeface="Microsoft YaHei" panose="020B0503020204020204" pitchFamily="34" charset="-122"/>
-                        </a:rPr>
-                        <a:t>114</a:t>
-                      </a:r>
-                      <a:r>
                         <a:rPr kumimoji="1" lang="zh-TW" altLang="en-US" sz="1700" b="1" i="0" u="none" strike="noStrike" cap="none" normalizeH="0" baseline="0" dirty="0">
                           <a:ln>
                             <a:noFill/>
@@ -8248,536 +9345,7 @@
                           <a:latin typeface="Microsoft YaHei" panose="020B0503020204020204" pitchFamily="34" charset="-122"/>
                           <a:ea typeface="Microsoft YaHei" panose="020B0503020204020204" pitchFamily="34" charset="-122"/>
                         </a:rPr>
-                        <a:t>年銷售量</a:t>
-                      </a:r>
-                      <a:r>
-                        <a:rPr kumimoji="1" lang="en-US" altLang="zh-TW" sz="1700" b="1" i="0" u="none" strike="noStrike" cap="none" normalizeH="0" baseline="0" dirty="0">
-                          <a:ln>
-                            <a:noFill/>
-                          </a:ln>
-                          <a:solidFill>
-                            <a:schemeClr val="tx1"/>
-                          </a:solidFill>
-                          <a:effectLst/>
-                          <a:latin typeface="Microsoft YaHei" panose="020B0503020204020204" pitchFamily="34" charset="-122"/>
-                          <a:ea typeface="Microsoft YaHei" panose="020B0503020204020204" pitchFamily="34" charset="-122"/>
-                        </a:rPr>
-                        <a:t>(</a:t>
-                      </a:r>
-                      <a:r>
-                        <a:rPr kumimoji="1" lang="zh-TW" altLang="en-US" sz="1700" b="1" i="0" u="none" strike="noStrike" cap="none" normalizeH="0" baseline="0" dirty="0">
-                          <a:ln>
-                            <a:noFill/>
-                          </a:ln>
-                          <a:solidFill>
-                            <a:schemeClr val="tx1"/>
-                          </a:solidFill>
-                          <a:effectLst/>
-                          <a:latin typeface="Microsoft YaHei" panose="020B0503020204020204" pitchFamily="34" charset="-122"/>
-                          <a:ea typeface="Microsoft YaHei" panose="020B0503020204020204" pitchFamily="34" charset="-122"/>
-                        </a:rPr>
-                        <a:t>米</a:t>
-                      </a:r>
-                      <a:r>
-                        <a:rPr kumimoji="1" lang="en-US" altLang="zh-TW" sz="1700" b="1" i="0" u="none" strike="noStrike" cap="none" normalizeH="0" baseline="0" dirty="0">
-                          <a:ln>
-                            <a:noFill/>
-                          </a:ln>
-                          <a:solidFill>
-                            <a:schemeClr val="tx1"/>
-                          </a:solidFill>
-                          <a:effectLst/>
-                          <a:latin typeface="Microsoft YaHei" panose="020B0503020204020204" pitchFamily="34" charset="-122"/>
-                          <a:ea typeface="Microsoft YaHei" panose="020B0503020204020204" pitchFamily="34" charset="-122"/>
-                        </a:rPr>
-                        <a:t>)</a:t>
-                      </a:r>
-                    </a:p>
-                  </a:txBody>
-                  <a:tcPr marL="36000" marR="36000" marT="18000" marB="18000" anchor="ctr" horzOverflow="overflow"/>
-                </a:tc>
-                <a:tc hMerge="1">
-                  <a:txBody>
-                    <a:bodyPr/>
-                    <a:lstStyle/>
-                    <a:p>
-                      <a:endParaRPr lang="zh-TW" altLang="en-US"/>
-                    </a:p>
-                  </a:txBody>
-                  <a:tcPr/>
-                </a:tc>
-                <a:tc hMerge="1">
-                  <a:txBody>
-                    <a:bodyPr/>
-                    <a:lstStyle/>
-                    <a:p>
-                      <a:endParaRPr lang="zh-TW" altLang="en-US"/>
-                    </a:p>
-                  </a:txBody>
-                  <a:tcPr/>
-                </a:tc>
-                <a:tc>
-                  <a:txBody>
-                    <a:bodyPr/>
-                    <a:lstStyle/>
-                    <a:p>
-                      <a:pPr marL="0" marR="0" lvl="0" indent="0" algn="ctr" defTabSz="914400" rtl="0" eaLnBrk="1" fontAlgn="base" latinLnBrk="0" hangingPunct="1">
-                        <a:lnSpc>
-                          <a:spcPct val="100000"/>
-                        </a:lnSpc>
-                        <a:spcBef>
-                          <a:spcPct val="20000"/>
-                        </a:spcBef>
-                        <a:spcAft>
-                          <a:spcPct val="0"/>
-                        </a:spcAft>
-                        <a:buClrTx/>
-                        <a:buSzTx/>
-                        <a:buFontTx/>
-                        <a:buNone/>
-                        <a:tabLst/>
-                      </a:pPr>
-                      <a:r>
-                        <a:rPr kumimoji="1" lang="en-US" altLang="zh-TW" sz="1500" b="1" u="none" strike="noStrike" kern="1200" cap="none" normalizeH="0" baseline="0" dirty="0">
-                          <a:ln>
-                            <a:noFill/>
-                          </a:ln>
-                          <a:solidFill>
-                            <a:schemeClr val="tx1"/>
-                          </a:solidFill>
-                          <a:effectLst/>
-                          <a:latin typeface="Microsoft YaHei" panose="020B0503020204020204" pitchFamily="34" charset="-122"/>
-                          <a:ea typeface="Microsoft YaHei" panose="020B0503020204020204" pitchFamily="34" charset="-122"/>
-                          <a:cs typeface="+mn-cs"/>
-                        </a:rPr>
-                        <a:t>63931</a:t>
-                      </a:r>
-                    </a:p>
-                  </a:txBody>
-                  <a:tcPr marL="36000" marR="36000" marT="18000" marB="18000" anchor="ctr" horzOverflow="overflow"/>
-                </a:tc>
-                <a:tc>
-                  <a:txBody>
-                    <a:bodyPr/>
-                    <a:lstStyle/>
-                    <a:p>
-                      <a:pPr marL="0" marR="0" lvl="0" indent="0" algn="ctr" defTabSz="914400" rtl="0" eaLnBrk="1" fontAlgn="base" latinLnBrk="0" hangingPunct="1">
-                        <a:lnSpc>
-                          <a:spcPct val="100000"/>
-                        </a:lnSpc>
-                        <a:spcBef>
-                          <a:spcPct val="20000"/>
-                        </a:spcBef>
-                        <a:spcAft>
-                          <a:spcPct val="0"/>
-                        </a:spcAft>
-                        <a:buClrTx/>
-                        <a:buSzTx/>
-                        <a:buFontTx/>
-                        <a:buNone/>
-                        <a:tabLst/>
-                      </a:pPr>
-                      <a:r>
-                        <a:rPr kumimoji="1" lang="en-US" altLang="zh-TW" sz="1500" b="1" i="0" u="none" strike="noStrike" cap="none" normalizeH="0" baseline="0" dirty="0">
-                          <a:ln>
-                            <a:noFill/>
-                          </a:ln>
-                          <a:solidFill>
-                            <a:schemeClr val="tx1"/>
-                          </a:solidFill>
-                          <a:effectLst/>
-                          <a:latin typeface="Microsoft YaHei" panose="020B0503020204020204" pitchFamily="34" charset="-122"/>
-                          <a:ea typeface="Microsoft YaHei" panose="020B0503020204020204" pitchFamily="34" charset="-122"/>
-                          <a:cs typeface="Arial Unicode MS" pitchFamily="34" charset="-120"/>
-                        </a:rPr>
-                        <a:t>(</a:t>
-                      </a:r>
-                      <a:r>
-                        <a:rPr kumimoji="1" lang="zh-TW" altLang="en-US" sz="1500" b="1" i="0" u="none" strike="noStrike" cap="none" normalizeH="0" baseline="0" dirty="0">
-                          <a:ln>
-                            <a:noFill/>
-                          </a:ln>
-                          <a:solidFill>
-                            <a:schemeClr val="tx1"/>
-                          </a:solidFill>
-                          <a:effectLst/>
-                          <a:latin typeface="Microsoft YaHei" panose="020B0503020204020204" pitchFamily="34" charset="-122"/>
-                          <a:ea typeface="Microsoft YaHei" panose="020B0503020204020204" pitchFamily="34" charset="-122"/>
-                          <a:cs typeface="Arial Unicode MS" pitchFamily="34" charset="-120"/>
-                        </a:rPr>
-                        <a:t>鳯勝代工</a:t>
-                      </a:r>
-                      <a:r>
-                        <a:rPr kumimoji="1" lang="en-US" altLang="zh-TW" sz="1500" b="1" i="0" u="none" strike="noStrike" cap="none" normalizeH="0" baseline="0" dirty="0">
-                          <a:ln>
-                            <a:noFill/>
-                          </a:ln>
-                          <a:solidFill>
-                            <a:schemeClr val="tx1"/>
-                          </a:solidFill>
-                          <a:effectLst/>
-                          <a:latin typeface="Microsoft YaHei" panose="020B0503020204020204" pitchFamily="34" charset="-122"/>
-                          <a:ea typeface="Microsoft YaHei" panose="020B0503020204020204" pitchFamily="34" charset="-122"/>
-                          <a:cs typeface="Arial Unicode MS" pitchFamily="34" charset="-120"/>
-                        </a:rPr>
-                        <a:t>)</a:t>
-                      </a:r>
-                    </a:p>
-                  </a:txBody>
-                  <a:tcPr marL="36000" marR="36000" marT="18000" marB="18000" anchor="ctr" horzOverflow="overflow"/>
-                </a:tc>
-                <a:tc>
-                  <a:txBody>
-                    <a:bodyPr/>
-                    <a:lstStyle/>
-                    <a:p>
-                      <a:pPr marL="0" marR="0" lvl="0" indent="0" algn="ctr" defTabSz="914400" rtl="0" eaLnBrk="1" fontAlgn="base" latinLnBrk="0" hangingPunct="1">
-                        <a:lnSpc>
-                          <a:spcPct val="100000"/>
-                        </a:lnSpc>
-                        <a:spcBef>
-                          <a:spcPct val="20000"/>
-                        </a:spcBef>
-                        <a:spcAft>
-                          <a:spcPct val="0"/>
-                        </a:spcAft>
-                        <a:buClrTx/>
-                        <a:buSzTx/>
-                        <a:buFontTx/>
-                        <a:buNone/>
-                        <a:tabLst/>
-                      </a:pPr>
-                      <a:r>
-                        <a:rPr kumimoji="1" lang="en-US" altLang="zh-TW" sz="1500" b="1" i="0" u="none" strike="noStrike" kern="1200" cap="none" normalizeH="0" baseline="0" dirty="0">
-                          <a:ln>
-                            <a:noFill/>
-                          </a:ln>
-                          <a:solidFill>
-                            <a:schemeClr val="tx1"/>
-                          </a:solidFill>
-                          <a:effectLst/>
-                          <a:latin typeface="Microsoft YaHei" panose="020B0503020204020204" pitchFamily="34" charset="-122"/>
-                          <a:ea typeface="Microsoft YaHei" panose="020B0503020204020204" pitchFamily="34" charset="-122"/>
-                          <a:cs typeface="Arial Unicode MS" pitchFamily="34" charset="-120"/>
-                        </a:rPr>
-                        <a:t>70000+44728(</a:t>
-                      </a:r>
-                      <a:r>
-                        <a:rPr kumimoji="1" lang="zh-TW" altLang="en-US" sz="1500" b="1" i="0" u="none" strike="noStrike" kern="1200" cap="none" normalizeH="0" baseline="0" dirty="0">
-                          <a:ln>
-                            <a:noFill/>
-                          </a:ln>
-                          <a:solidFill>
-                            <a:schemeClr val="tx1"/>
-                          </a:solidFill>
-                          <a:effectLst/>
-                          <a:latin typeface="Microsoft YaHei" panose="020B0503020204020204" pitchFamily="34" charset="-122"/>
-                          <a:ea typeface="Microsoft YaHei" panose="020B0503020204020204" pitchFamily="34" charset="-122"/>
-                          <a:cs typeface="Arial Unicode MS" pitchFamily="34" charset="-120"/>
-                        </a:rPr>
-                        <a:t>代工</a:t>
-                      </a:r>
-                      <a:r>
-                        <a:rPr kumimoji="1" lang="en-US" altLang="zh-TW" sz="1500" b="1" i="0" u="none" strike="noStrike" kern="1200" cap="none" normalizeH="0" baseline="0" dirty="0">
-                          <a:ln>
-                            <a:noFill/>
-                          </a:ln>
-                          <a:solidFill>
-                            <a:schemeClr val="tx1"/>
-                          </a:solidFill>
-                          <a:effectLst/>
-                          <a:latin typeface="Microsoft YaHei" panose="020B0503020204020204" pitchFamily="34" charset="-122"/>
-                          <a:ea typeface="Microsoft YaHei" panose="020B0503020204020204" pitchFamily="34" charset="-122"/>
-                          <a:cs typeface="Arial Unicode MS" pitchFamily="34" charset="-120"/>
-                        </a:rPr>
-                        <a:t>)</a:t>
-                      </a:r>
-                    </a:p>
-                  </a:txBody>
-                  <a:tcPr marL="36000" marR="36000" marT="18000" marB="18000" anchor="ctr" horzOverflow="overflow"/>
-                </a:tc>
-                <a:tc>
-                  <a:txBody>
-                    <a:bodyPr/>
-                    <a:lstStyle/>
-                    <a:p>
-                      <a:pPr marL="0" marR="0" lvl="0" indent="0" algn="ctr" defTabSz="914400" rtl="0" eaLnBrk="1" fontAlgn="base" latinLnBrk="0" hangingPunct="1">
-                        <a:lnSpc>
-                          <a:spcPct val="100000"/>
-                        </a:lnSpc>
-                        <a:spcBef>
-                          <a:spcPct val="20000"/>
-                        </a:spcBef>
-                        <a:spcAft>
-                          <a:spcPct val="0"/>
-                        </a:spcAft>
-                        <a:buClrTx/>
-                        <a:buSzTx/>
-                        <a:buFontTx/>
-                        <a:buNone/>
-                        <a:tabLst/>
-                      </a:pPr>
-                      <a:r>
-                        <a:rPr kumimoji="1" lang="en-US" altLang="zh-TW" sz="1500" b="1" i="0" u="none" strike="noStrike" cap="none" normalizeH="0" baseline="0" dirty="0">
-                          <a:ln>
-                            <a:noFill/>
-                          </a:ln>
-                          <a:solidFill>
-                            <a:schemeClr val="tx1"/>
-                          </a:solidFill>
-                          <a:effectLst/>
-                          <a:latin typeface="Microsoft YaHei" panose="020B0503020204020204" pitchFamily="34" charset="-122"/>
-                          <a:ea typeface="Microsoft YaHei" panose="020B0503020204020204" pitchFamily="34" charset="-122"/>
-                          <a:cs typeface="Arial Unicode MS" pitchFamily="34" charset="-120"/>
-                        </a:rPr>
-                        <a:t>100000</a:t>
-                      </a:r>
-                    </a:p>
-                  </a:txBody>
-                  <a:tcPr marL="36000" marR="36000" marT="18000" marB="18000" anchor="ctr" horzOverflow="overflow"/>
-                </a:tc>
-                <a:tc>
-                  <a:txBody>
-                    <a:bodyPr/>
-                    <a:lstStyle/>
-                    <a:p>
-                      <a:pPr marL="0" marR="0" lvl="0" indent="0" algn="ctr" defTabSz="914400" rtl="0" eaLnBrk="1" fontAlgn="base" latinLnBrk="0" hangingPunct="1">
-                        <a:lnSpc>
-                          <a:spcPct val="100000"/>
-                        </a:lnSpc>
-                        <a:spcBef>
-                          <a:spcPct val="20000"/>
-                        </a:spcBef>
-                        <a:spcAft>
-                          <a:spcPct val="0"/>
-                        </a:spcAft>
-                        <a:buClrTx/>
-                        <a:buSzTx/>
-                        <a:buFontTx/>
-                        <a:buNone/>
-                        <a:tabLst/>
-                      </a:pPr>
-                      <a:r>
-                        <a:rPr kumimoji="1" lang="en-US" altLang="zh-TW" sz="1500" b="1" u="none" strike="noStrike" kern="1200" cap="none" normalizeH="0" baseline="0" dirty="0">
-                          <a:ln>
-                            <a:noFill/>
-                          </a:ln>
-                          <a:solidFill>
-                            <a:schemeClr val="tx1"/>
-                          </a:solidFill>
-                          <a:effectLst/>
-                          <a:latin typeface="Microsoft YaHei" panose="020B0503020204020204" pitchFamily="34" charset="-122"/>
-                          <a:ea typeface="Microsoft YaHei" panose="020B0503020204020204" pitchFamily="34" charset="-122"/>
-                          <a:cs typeface="+mn-cs"/>
-                        </a:rPr>
-                        <a:t>100000</a:t>
-                      </a:r>
-                    </a:p>
-                  </a:txBody>
-                  <a:tcPr marL="36000" marR="36000" marT="18000" marB="18000" anchor="ctr" horzOverflow="overflow"/>
-                </a:tc>
-                <a:tc>
-                  <a:txBody>
-                    <a:bodyPr/>
-                    <a:lstStyle/>
-                    <a:p>
-                      <a:pPr marL="0" marR="0" lvl="0" indent="0" algn="ctr" defTabSz="914400" rtl="0" eaLnBrk="1" fontAlgn="base" latinLnBrk="0" hangingPunct="1">
-                        <a:lnSpc>
-                          <a:spcPct val="100000"/>
-                        </a:lnSpc>
-                        <a:spcBef>
-                          <a:spcPct val="20000"/>
-                        </a:spcBef>
-                        <a:spcAft>
-                          <a:spcPct val="0"/>
-                        </a:spcAft>
-                        <a:buClrTx/>
-                        <a:buSzTx/>
-                        <a:buFontTx/>
-                        <a:buNone/>
-                        <a:tabLst/>
-                      </a:pPr>
-                      <a:r>
-                        <a:rPr kumimoji="1" lang="en-US" altLang="zh-TW" sz="1500" b="1" i="0" u="none" strike="noStrike" cap="none" normalizeH="0" baseline="0" dirty="0">
-                          <a:ln>
-                            <a:noFill/>
-                          </a:ln>
-                          <a:solidFill>
-                            <a:schemeClr val="tx1"/>
-                          </a:solidFill>
-                          <a:effectLst/>
-                          <a:latin typeface="Microsoft YaHei" panose="020B0503020204020204" pitchFamily="34" charset="-122"/>
-                          <a:ea typeface="Microsoft YaHei" panose="020B0503020204020204" pitchFamily="34" charset="-122"/>
-                          <a:cs typeface="Arial Unicode MS" pitchFamily="34" charset="-120"/>
-                        </a:rPr>
-                        <a:t>30000</a:t>
-                      </a:r>
-                    </a:p>
-                  </a:txBody>
-                  <a:tcPr marL="36000" marR="36000" marT="18000" marB="18000" anchor="ctr" horzOverflow="overflow"/>
-                </a:tc>
-                <a:extLst>
-                  <a:ext uri="{0D108BD9-81ED-4DB2-BD59-A6C34878D82A}">
-                    <a16:rowId xmlns:a16="http://schemas.microsoft.com/office/drawing/2014/main" val="2172270918"/>
-                  </a:ext>
-                </a:extLst>
-              </a:tr>
-              <a:tr h="328740">
-                <a:tc rowSpan="12">
-                  <a:txBody>
-                    <a:bodyPr/>
-                    <a:lstStyle>
-                      <a:lvl1pPr>
-                        <a:spcBef>
-                          <a:spcPct val="20000"/>
-                        </a:spcBef>
-                        <a:defRPr kumimoji="1" sz="2800">
-                          <a:solidFill>
-                            <a:schemeClr val="tx1"/>
-                          </a:solidFill>
-                          <a:latin typeface="Arial" panose="020B0604020202020204" pitchFamily="34" charset="0"/>
-                          <a:ea typeface="新細明體" panose="02020500000000000000" pitchFamily="18" charset="-120"/>
-                        </a:defRPr>
-                      </a:lvl1pPr>
-                      <a:lvl2pPr marL="471488">
-                        <a:spcBef>
-                          <a:spcPct val="20000"/>
-                        </a:spcBef>
-                        <a:defRPr kumimoji="1" sz="2400">
-                          <a:solidFill>
-                            <a:schemeClr val="tx1"/>
-                          </a:solidFill>
-                          <a:latin typeface="Arial" panose="020B0604020202020204" pitchFamily="34" charset="0"/>
-                          <a:ea typeface="新細明體" panose="02020500000000000000" pitchFamily="18" charset="-120"/>
-                        </a:defRPr>
-                      </a:lvl2pPr>
-                      <a:lvl3pPr marL="909638">
-                        <a:spcBef>
-                          <a:spcPct val="20000"/>
-                        </a:spcBef>
-                        <a:defRPr kumimoji="1" sz="2000">
-                          <a:solidFill>
-                            <a:schemeClr val="tx1"/>
-                          </a:solidFill>
-                          <a:latin typeface="Arial" panose="020B0604020202020204" pitchFamily="34" charset="0"/>
-                          <a:ea typeface="新細明體" panose="02020500000000000000" pitchFamily="18" charset="-120"/>
-                        </a:defRPr>
-                      </a:lvl3pPr>
-                      <a:lvl4pPr marL="1306513">
-                        <a:spcBef>
-                          <a:spcPct val="20000"/>
-                        </a:spcBef>
-                        <a:defRPr kumimoji="1">
-                          <a:solidFill>
-                            <a:schemeClr val="tx1"/>
-                          </a:solidFill>
-                          <a:latin typeface="Arial" panose="020B0604020202020204" pitchFamily="34" charset="0"/>
-                          <a:ea typeface="新細明體" panose="02020500000000000000" pitchFamily="18" charset="-120"/>
-                        </a:defRPr>
-                      </a:lvl4pPr>
-                      <a:lvl5pPr marL="1695450">
-                        <a:spcBef>
-                          <a:spcPct val="20000"/>
-                        </a:spcBef>
-                        <a:defRPr kumimoji="1">
-                          <a:solidFill>
-                            <a:schemeClr val="tx1"/>
-                          </a:solidFill>
-                          <a:latin typeface="Arial" panose="020B0604020202020204" pitchFamily="34" charset="0"/>
-                          <a:ea typeface="新細明體" panose="02020500000000000000" pitchFamily="18" charset="-120"/>
-                        </a:defRPr>
-                      </a:lvl5pPr>
-                      <a:lvl6pPr marL="2152650" fontAlgn="base">
-                        <a:spcBef>
-                          <a:spcPct val="20000"/>
-                        </a:spcBef>
-                        <a:spcAft>
-                          <a:spcPct val="0"/>
-                        </a:spcAft>
-                        <a:defRPr kumimoji="1">
-                          <a:solidFill>
-                            <a:schemeClr val="tx1"/>
-                          </a:solidFill>
-                          <a:latin typeface="Arial" panose="020B0604020202020204" pitchFamily="34" charset="0"/>
-                          <a:ea typeface="新細明體" panose="02020500000000000000" pitchFamily="18" charset="-120"/>
-                        </a:defRPr>
-                      </a:lvl6pPr>
-                      <a:lvl7pPr marL="2609850" fontAlgn="base">
-                        <a:spcBef>
-                          <a:spcPct val="20000"/>
-                        </a:spcBef>
-                        <a:spcAft>
-                          <a:spcPct val="0"/>
-                        </a:spcAft>
-                        <a:defRPr kumimoji="1">
-                          <a:solidFill>
-                            <a:schemeClr val="tx1"/>
-                          </a:solidFill>
-                          <a:latin typeface="Arial" panose="020B0604020202020204" pitchFamily="34" charset="0"/>
-                          <a:ea typeface="新細明體" panose="02020500000000000000" pitchFamily="18" charset="-120"/>
-                        </a:defRPr>
-                      </a:lvl7pPr>
-                      <a:lvl8pPr marL="3067050" fontAlgn="base">
-                        <a:spcBef>
-                          <a:spcPct val="20000"/>
-                        </a:spcBef>
-                        <a:spcAft>
-                          <a:spcPct val="0"/>
-                        </a:spcAft>
-                        <a:defRPr kumimoji="1">
-                          <a:solidFill>
-                            <a:schemeClr val="tx1"/>
-                          </a:solidFill>
-                          <a:latin typeface="Arial" panose="020B0604020202020204" pitchFamily="34" charset="0"/>
-                          <a:ea typeface="新細明體" panose="02020500000000000000" pitchFamily="18" charset="-120"/>
-                        </a:defRPr>
-                      </a:lvl8pPr>
-                      <a:lvl9pPr marL="3524250" fontAlgn="base">
-                        <a:spcBef>
-                          <a:spcPct val="20000"/>
-                        </a:spcBef>
-                        <a:spcAft>
-                          <a:spcPct val="0"/>
-                        </a:spcAft>
-                        <a:defRPr kumimoji="1">
-                          <a:solidFill>
-                            <a:schemeClr val="tx1"/>
-                          </a:solidFill>
-                          <a:latin typeface="Arial" panose="020B0604020202020204" pitchFamily="34" charset="0"/>
-                          <a:ea typeface="新細明體" panose="02020500000000000000" pitchFamily="18" charset="-120"/>
-                        </a:defRPr>
-                      </a:lvl9pPr>
-                    </a:lstStyle>
-                    <a:p>
-                      <a:pPr marL="0" marR="0" lvl="0" indent="0" algn="ctr" defTabSz="914400" rtl="0" eaLnBrk="1" fontAlgn="base" latinLnBrk="0" hangingPunct="1">
-                        <a:lnSpc>
-                          <a:spcPct val="80000"/>
-                        </a:lnSpc>
-                        <a:spcBef>
-                          <a:spcPct val="0"/>
-                        </a:spcBef>
-                        <a:spcAft>
-                          <a:spcPct val="0"/>
-                        </a:spcAft>
-                        <a:buClrTx/>
-                        <a:buSzTx/>
-                        <a:buFontTx/>
-                        <a:buNone/>
-                        <a:tabLst/>
-                      </a:pPr>
-                      <a:r>
-                        <a:rPr kumimoji="1" lang="zh-TW" altLang="en-US" sz="1700" b="1" i="0" u="none" strike="noStrike" cap="none" normalizeH="0" baseline="0" dirty="0">
-                          <a:ln>
-                            <a:noFill/>
-                          </a:ln>
-                          <a:solidFill>
-                            <a:schemeClr val="tx1"/>
-                          </a:solidFill>
-                          <a:effectLst/>
-                          <a:latin typeface="Microsoft YaHei" panose="020B0503020204020204" pitchFamily="34" charset="-122"/>
-                          <a:ea typeface="Microsoft YaHei" panose="020B0503020204020204" pitchFamily="34" charset="-122"/>
-                        </a:rPr>
-                        <a:t>人力</a:t>
+                        <a:t>現況</a:t>
                       </a:r>
                       <a:endParaRPr kumimoji="1" lang="en-US" altLang="zh-TW" sz="1700" b="1" i="0" u="none" strike="noStrike" cap="none" normalizeH="0" baseline="0" dirty="0">
                         <a:ln>
@@ -8791,6 +9359,13 @@
                         <a:ea typeface="Microsoft YaHei" panose="020B0503020204020204" pitchFamily="34" charset="-122"/>
                       </a:endParaRPr>
                     </a:p>
+                  </a:txBody>
+                  <a:tcPr marL="36000" marR="36000" marT="18000" marB="18000" anchor="ctr" horzOverflow="overflow"/>
+                </a:tc>
+                <a:tc rowSpan="4">
+                  <a:txBody>
+                    <a:bodyPr/>
+                    <a:lstStyle/>
                     <a:p>
                       <a:pPr marL="0" marR="0" lvl="0" indent="0" algn="ctr" defTabSz="914400" rtl="0" eaLnBrk="1" fontAlgn="base" latinLnBrk="0" hangingPunct="1">
                         <a:lnSpc>
@@ -8820,7 +9395,7 @@
                           <a:latin typeface="Microsoft YaHei" panose="020B0503020204020204" pitchFamily="34" charset="-122"/>
                           <a:ea typeface="Microsoft YaHei" panose="020B0503020204020204" pitchFamily="34" charset="-122"/>
                         </a:rPr>
-                        <a:t>現況</a:t>
+                        <a:t>生產</a:t>
                       </a:r>
                       <a:endParaRPr kumimoji="1" lang="en-US" altLang="zh-TW" sz="1700" b="1" i="0" u="none" strike="noStrike" cap="none" normalizeH="0" baseline="0" dirty="0">
                         <a:ln>
@@ -8835,9 +9410,16 @@
                       </a:endParaRPr>
                     </a:p>
                   </a:txBody>
-                  <a:tcPr marL="36000" marR="36000" marT="18000" marB="18000" anchor="ctr" horzOverflow="overflow"/>
-                </a:tc>
-                <a:tc rowSpan="4">
+                  <a:tcPr marL="36000" marR="36000" marT="18000" marB="18000" anchor="ctr" horzOverflow="overflow">
+                    <a:solidFill>
+                      <a:schemeClr val="accent4">
+                        <a:lumMod val="20000"/>
+                        <a:lumOff val="80000"/>
+                      </a:schemeClr>
+                    </a:solidFill>
+                  </a:tcPr>
+                </a:tc>
+                <a:tc>
                   <a:txBody>
                     <a:bodyPr/>
                     <a:lstStyle/>
@@ -8859,18 +9441,19 @@
                         <a:tabLst/>
                       </a:pPr>
                       <a:r>
-                        <a:rPr kumimoji="1" lang="zh-TW" altLang="en-US" sz="1700" b="1" i="0" u="none" strike="noStrike" cap="none" normalizeH="0" baseline="0" dirty="0">
-                          <a:ln>
-                            <a:noFill/>
-                          </a:ln>
-                          <a:solidFill>
-                            <a:schemeClr val="tx1"/>
-                          </a:solidFill>
-                          <a:effectLst/>
-                          <a:latin typeface="Microsoft YaHei" panose="020B0503020204020204" pitchFamily="34" charset="-122"/>
-                          <a:ea typeface="Microsoft YaHei" panose="020B0503020204020204" pitchFamily="34" charset="-122"/>
-                        </a:rPr>
-                        <a:t>生產</a:t>
+                        <a:rPr kumimoji="1" lang="zh-TW" altLang="en-US" sz="1700" b="1" i="0" u="none" strike="noStrike" kern="1200" cap="none" normalizeH="0" baseline="0">
+                          <a:ln>
+                            <a:noFill/>
+                          </a:ln>
+                          <a:solidFill>
+                            <a:schemeClr val="tx1"/>
+                          </a:solidFill>
+                          <a:effectLst/>
+                          <a:latin typeface="Microsoft YaHei" panose="020B0503020204020204" pitchFamily="34" charset="-122"/>
+                          <a:ea typeface="Microsoft YaHei" panose="020B0503020204020204" pitchFamily="34" charset="-122"/>
+                          <a:cs typeface="+mn-cs"/>
+                        </a:rPr>
+                        <a:t>操作</a:t>
                       </a:r>
                       <a:endParaRPr kumimoji="1" lang="en-US" altLang="zh-TW" sz="1700" b="1" i="0" u="none" strike="noStrike" cap="none" normalizeH="0" baseline="0" dirty="0">
                         <a:ln>
@@ -8897,14 +9480,135 @@
                 <a:tc>
                   <a:txBody>
                     <a:bodyPr/>
-                    <a:lstStyle/>
+                    <a:lstStyle>
+                      <a:lvl1pPr>
+                        <a:spcBef>
+                          <a:spcPct val="20000"/>
+                        </a:spcBef>
+                        <a:defRPr kumimoji="1" sz="2800">
+                          <a:solidFill>
+                            <a:schemeClr val="tx1"/>
+                          </a:solidFill>
+                          <a:latin typeface="Arial" panose="020B0604020202020204" pitchFamily="34" charset="0"/>
+                          <a:ea typeface="新細明體" panose="02020500000000000000" pitchFamily="18" charset="-120"/>
+                        </a:defRPr>
+                      </a:lvl1pPr>
+                      <a:lvl2pPr marL="471488">
+                        <a:spcBef>
+                          <a:spcPct val="20000"/>
+                        </a:spcBef>
+                        <a:defRPr kumimoji="1" sz="2400">
+                          <a:solidFill>
+                            <a:schemeClr val="tx1"/>
+                          </a:solidFill>
+                          <a:latin typeface="Arial" panose="020B0604020202020204" pitchFamily="34" charset="0"/>
+                          <a:ea typeface="新細明體" panose="02020500000000000000" pitchFamily="18" charset="-120"/>
+                        </a:defRPr>
+                      </a:lvl2pPr>
+                      <a:lvl3pPr marL="909638">
+                        <a:spcBef>
+                          <a:spcPct val="20000"/>
+                        </a:spcBef>
+                        <a:defRPr kumimoji="1" sz="2000">
+                          <a:solidFill>
+                            <a:schemeClr val="tx1"/>
+                          </a:solidFill>
+                          <a:latin typeface="Arial" panose="020B0604020202020204" pitchFamily="34" charset="0"/>
+                          <a:ea typeface="新細明體" panose="02020500000000000000" pitchFamily="18" charset="-120"/>
+                        </a:defRPr>
+                      </a:lvl3pPr>
+                      <a:lvl4pPr marL="1306513">
+                        <a:spcBef>
+                          <a:spcPct val="20000"/>
+                        </a:spcBef>
+                        <a:defRPr kumimoji="1">
+                          <a:solidFill>
+                            <a:schemeClr val="tx1"/>
+                          </a:solidFill>
+                          <a:latin typeface="Arial" panose="020B0604020202020204" pitchFamily="34" charset="0"/>
+                          <a:ea typeface="新細明體" panose="02020500000000000000" pitchFamily="18" charset="-120"/>
+                        </a:defRPr>
+                      </a:lvl4pPr>
+                      <a:lvl5pPr marL="1695450">
+                        <a:spcBef>
+                          <a:spcPct val="20000"/>
+                        </a:spcBef>
+                        <a:defRPr kumimoji="1">
+                          <a:solidFill>
+                            <a:schemeClr val="tx1"/>
+                          </a:solidFill>
+                          <a:latin typeface="Arial" panose="020B0604020202020204" pitchFamily="34" charset="0"/>
+                          <a:ea typeface="新細明體" panose="02020500000000000000" pitchFamily="18" charset="-120"/>
+                        </a:defRPr>
+                      </a:lvl5pPr>
+                      <a:lvl6pPr marL="2152650" fontAlgn="base">
+                        <a:spcBef>
+                          <a:spcPct val="20000"/>
+                        </a:spcBef>
+                        <a:spcAft>
+                          <a:spcPct val="0"/>
+                        </a:spcAft>
+                        <a:defRPr kumimoji="1">
+                          <a:solidFill>
+                            <a:schemeClr val="tx1"/>
+                          </a:solidFill>
+                          <a:latin typeface="Arial" panose="020B0604020202020204" pitchFamily="34" charset="0"/>
+                          <a:ea typeface="新細明體" panose="02020500000000000000" pitchFamily="18" charset="-120"/>
+                        </a:defRPr>
+                      </a:lvl6pPr>
+                      <a:lvl7pPr marL="2609850" fontAlgn="base">
+                        <a:spcBef>
+                          <a:spcPct val="20000"/>
+                        </a:spcBef>
+                        <a:spcAft>
+                          <a:spcPct val="0"/>
+                        </a:spcAft>
+                        <a:defRPr kumimoji="1">
+                          <a:solidFill>
+                            <a:schemeClr val="tx1"/>
+                          </a:solidFill>
+                          <a:latin typeface="Arial" panose="020B0604020202020204" pitchFamily="34" charset="0"/>
+                          <a:ea typeface="新細明體" panose="02020500000000000000" pitchFamily="18" charset="-120"/>
+                        </a:defRPr>
+                      </a:lvl7pPr>
+                      <a:lvl8pPr marL="3067050" fontAlgn="base">
+                        <a:spcBef>
+                          <a:spcPct val="20000"/>
+                        </a:spcBef>
+                        <a:spcAft>
+                          <a:spcPct val="0"/>
+                        </a:spcAft>
+                        <a:defRPr kumimoji="1">
+                          <a:solidFill>
+                            <a:schemeClr val="tx1"/>
+                          </a:solidFill>
+                          <a:latin typeface="Arial" panose="020B0604020202020204" pitchFamily="34" charset="0"/>
+                          <a:ea typeface="新細明體" panose="02020500000000000000" pitchFamily="18" charset="-120"/>
+                        </a:defRPr>
+                      </a:lvl8pPr>
+                      <a:lvl9pPr marL="3524250" fontAlgn="base">
+                        <a:spcBef>
+                          <a:spcPct val="20000"/>
+                        </a:spcBef>
+                        <a:spcAft>
+                          <a:spcPct val="0"/>
+                        </a:spcAft>
+                        <a:defRPr kumimoji="1">
+                          <a:solidFill>
+                            <a:schemeClr val="tx1"/>
+                          </a:solidFill>
+                          <a:latin typeface="Arial" panose="020B0604020202020204" pitchFamily="34" charset="0"/>
+                          <a:ea typeface="新細明體" panose="02020500000000000000" pitchFamily="18" charset="-120"/>
+                        </a:defRPr>
+                      </a:lvl9pPr>
+                    </a:lstStyle>
                     <a:p>
                       <a:pPr marL="0" marR="0" lvl="0" indent="0" algn="ctr" defTabSz="914400" rtl="0" eaLnBrk="1" fontAlgn="base" latinLnBrk="0" hangingPunct="1">
                         <a:lnSpc>
-                          <a:spcPct val="80000"/>
+                          <a:spcPct val="100000"/>
                         </a:lnSpc>
                         <a:spcBef>
-                          <a:spcPct val="0"/>
+                          <a:spcPct val="20000"/>
                         </a:spcBef>
                         <a:spcAft>
                           <a:spcPct val="0"/>
@@ -8916,32 +9620,20 @@
                         <a:tabLst/>
                       </a:pPr>
                       <a:r>
-                        <a:rPr kumimoji="1" lang="zh-TW" altLang="en-US" sz="1700" b="1" i="0" u="none" strike="noStrike" kern="1200" cap="none" normalizeH="0" baseline="0">
-                          <a:ln>
-                            <a:noFill/>
-                          </a:ln>
-                          <a:solidFill>
-                            <a:schemeClr val="tx1"/>
-                          </a:solidFill>
-                          <a:effectLst/>
-                          <a:latin typeface="Microsoft YaHei" panose="020B0503020204020204" pitchFamily="34" charset="-122"/>
-                          <a:ea typeface="Microsoft YaHei" panose="020B0503020204020204" pitchFamily="34" charset="-122"/>
-                          <a:cs typeface="+mn-cs"/>
-                        </a:rPr>
-                        <a:t>操作</a:t>
-                      </a:r>
-                      <a:endParaRPr kumimoji="1" lang="zh-TW" altLang="en-US" sz="1700" b="1" i="0" u="none" strike="noStrike" kern="1200" cap="none" normalizeH="0" baseline="0" dirty="0">
-                        <a:ln>
-                          <a:noFill/>
-                        </a:ln>
-                        <a:solidFill>
-                          <a:schemeClr val="tx1"/>
-                        </a:solidFill>
-                        <a:effectLst/>
-                        <a:latin typeface="Microsoft YaHei" panose="020B0503020204020204" pitchFamily="34" charset="-122"/>
-                        <a:ea typeface="Microsoft YaHei" panose="020B0503020204020204" pitchFamily="34" charset="-122"/>
-                        <a:cs typeface="+mn-cs"/>
-                      </a:endParaRPr>
+                        <a:rPr kumimoji="1" lang="en-US" altLang="zh-TW" sz="1700" b="1" i="0" u="none" strike="noStrike" cap="none" normalizeH="0" baseline="0" dirty="0">
+                          <a:ln>
+                            <a:noFill/>
+                          </a:ln>
+                          <a:solidFill>
+                            <a:schemeClr val="tx1"/>
+                          </a:solidFill>
+                          <a:effectLst/>
+                          <a:latin typeface="Microsoft YaHei" panose="020B0503020204020204" pitchFamily="34" charset="-122"/>
+                          <a:ea typeface="Microsoft YaHei" panose="020B0503020204020204" pitchFamily="34" charset="-122"/>
+                          <a:cs typeface="Arial Unicode MS" pitchFamily="34" charset="-120"/>
+                        </a:rPr>
+                        <a:t>2</a:t>
+                      </a:r>
                     </a:p>
                   </a:txBody>
                   <a:tcPr marL="36000" marR="36000" marT="18000" marB="18000" anchor="ctr" horzOverflow="overflow"/>
@@ -9101,7 +9793,7 @@
                           <a:ea typeface="Microsoft YaHei" panose="020B0503020204020204" pitchFamily="34" charset="-122"/>
                           <a:cs typeface="Arial Unicode MS" pitchFamily="34" charset="-120"/>
                         </a:rPr>
-                        <a:t>2</a:t>
+                        <a:t>1</a:t>
                       </a:r>
                     </a:p>
                   </a:txBody>
@@ -9262,7 +9954,7 @@
                           <a:ea typeface="Microsoft YaHei" panose="020B0503020204020204" pitchFamily="34" charset="-122"/>
                           <a:cs typeface="Arial Unicode MS" pitchFamily="34" charset="-120"/>
                         </a:rPr>
-                        <a:t>1</a:t>
+                        <a:t>3</a:t>
                       </a:r>
                     </a:p>
                   </a:txBody>
@@ -9423,7 +10115,7 @@
                           <a:ea typeface="Microsoft YaHei" panose="020B0503020204020204" pitchFamily="34" charset="-122"/>
                           <a:cs typeface="Arial Unicode MS" pitchFamily="34" charset="-120"/>
                         </a:rPr>
-                        <a:t>3</a:t>
+                        <a:t>2</a:t>
                       </a:r>
                     </a:p>
                   </a:txBody>
@@ -9584,7 +10276,7 @@
                           <a:ea typeface="Microsoft YaHei" panose="020B0503020204020204" pitchFamily="34" charset="-122"/>
                           <a:cs typeface="Arial Unicode MS" pitchFamily="34" charset="-120"/>
                         </a:rPr>
-                        <a:t>2</a:t>
+                        <a:t>1</a:t>
                       </a:r>
                     </a:p>
                   </a:txBody>
@@ -9745,7 +10437,7 @@
                           <a:ea typeface="Microsoft YaHei" panose="020B0503020204020204" pitchFamily="34" charset="-122"/>
                           <a:cs typeface="Arial Unicode MS" pitchFamily="34" charset="-120"/>
                         </a:rPr>
-                        <a:t>1</a:t>
+                        <a:t>2</a:t>
                       </a:r>
                     </a:p>
                   </a:txBody>
@@ -9906,7 +10598,7 @@
                           <a:ea typeface="Microsoft YaHei" panose="020B0503020204020204" pitchFamily="34" charset="-122"/>
                           <a:cs typeface="Arial Unicode MS" pitchFamily="34" charset="-120"/>
                         </a:rPr>
-                        <a:t>2</a:t>
+                        <a:t>4</a:t>
                       </a:r>
                     </a:p>
                   </a:txBody>
@@ -10042,12 +10734,37 @@
                     <a:bodyPr/>
                     <a:lstStyle/>
                     <a:p>
+                      <a:r>
+                        <a:rPr kumimoji="1" lang="zh-TW" altLang="en-US" sz="1700" b="1" i="0" u="none" strike="noStrike" kern="1200" cap="none" normalizeH="0" baseline="0">
+                          <a:ln>
+                            <a:noFill/>
+                          </a:ln>
+                          <a:solidFill>
+                            <a:schemeClr val="tx1"/>
+                          </a:solidFill>
+                          <a:effectLst/>
+                          <a:latin typeface="Microsoft YaHei" panose="020B0503020204020204" pitchFamily="34" charset="-122"/>
+                          <a:ea typeface="Microsoft YaHei" panose="020B0503020204020204" pitchFamily="34" charset="-122"/>
+                          <a:cs typeface="+mn-cs"/>
+                        </a:rPr>
+                        <a:t>機修</a:t>
+                      </a:r>
+                      <a:endParaRPr lang="zh-TW" altLang="en-US"/>
+                    </a:p>
+                  </a:txBody>
+                  <a:tcPr marL="36000" marR="36000" marT="18000" marB="18000" anchor="ctr" horzOverflow="overflow"/>
+                </a:tc>
+                <a:tc>
+                  <a:txBody>
+                    <a:bodyPr/>
+                    <a:lstStyle/>
+                    <a:p>
                       <a:pPr marL="0" marR="0" lvl="0" indent="0" algn="ctr" defTabSz="914400" rtl="0" eaLnBrk="1" fontAlgn="base" latinLnBrk="0" hangingPunct="1">
                         <a:lnSpc>
-                          <a:spcPct val="80000"/>
+                          <a:spcPct val="100000"/>
                         </a:lnSpc>
                         <a:spcBef>
-                          <a:spcPct val="0"/>
+                          <a:spcPct val="20000"/>
                         </a:spcBef>
                         <a:spcAft>
                           <a:spcPct val="0"/>
@@ -10059,32 +10776,20 @@
                         <a:tabLst/>
                       </a:pPr>
                       <a:r>
-                        <a:rPr kumimoji="1" lang="zh-TW" altLang="en-US" sz="1700" b="1" i="0" u="none" strike="noStrike" kern="1200" cap="none" normalizeH="0" baseline="0">
-                          <a:ln>
-                            <a:noFill/>
-                          </a:ln>
-                          <a:solidFill>
-                            <a:schemeClr val="tx1"/>
-                          </a:solidFill>
-                          <a:effectLst/>
-                          <a:latin typeface="Microsoft YaHei" panose="020B0503020204020204" pitchFamily="34" charset="-122"/>
-                          <a:ea typeface="Microsoft YaHei" panose="020B0503020204020204" pitchFamily="34" charset="-122"/>
-                          <a:cs typeface="+mn-cs"/>
-                        </a:rPr>
-                        <a:t>機修</a:t>
-                      </a:r>
-                      <a:endParaRPr kumimoji="1" lang="zh-TW" altLang="en-US" sz="1700" b="1" i="0" u="none" strike="noStrike" kern="1200" cap="none" normalizeH="0" baseline="0" dirty="0">
-                        <a:ln>
-                          <a:noFill/>
-                        </a:ln>
-                        <a:solidFill>
-                          <a:schemeClr val="tx1"/>
-                        </a:solidFill>
-                        <a:effectLst/>
-                        <a:latin typeface="Microsoft YaHei" panose="020B0503020204020204" pitchFamily="34" charset="-122"/>
-                        <a:ea typeface="Microsoft YaHei" panose="020B0503020204020204" pitchFamily="34" charset="-122"/>
-                        <a:cs typeface="+mn-cs"/>
-                      </a:endParaRPr>
+                        <a:rPr kumimoji="1" lang="en-US" altLang="zh-TW" sz="1700" b="1" i="0" u="none" strike="noStrike" cap="none" normalizeH="0" baseline="0" dirty="0">
+                          <a:ln>
+                            <a:noFill/>
+                          </a:ln>
+                          <a:solidFill>
+                            <a:schemeClr val="tx1"/>
+                          </a:solidFill>
+                          <a:effectLst/>
+                          <a:latin typeface="Microsoft YaHei" panose="020B0503020204020204" pitchFamily="34" charset="-122"/>
+                          <a:ea typeface="Microsoft YaHei" panose="020B0503020204020204" pitchFamily="34" charset="-122"/>
+                          <a:cs typeface="Arial Unicode MS" pitchFamily="34" charset="-120"/>
+                        </a:rPr>
+                        <a:t>1</a:t>
+                      </a:r>
                     </a:p>
                   </a:txBody>
                   <a:tcPr marL="36000" marR="36000" marT="18000" marB="18000" anchor="ctr" horzOverflow="overflow"/>
@@ -10203,7 +10908,7 @@
                           <a:ea typeface="Microsoft YaHei" panose="020B0503020204020204" pitchFamily="34" charset="-122"/>
                           <a:cs typeface="Arial Unicode MS" pitchFamily="34" charset="-120"/>
                         </a:rPr>
-                        <a:t>1</a:t>
+                        <a:t>0</a:t>
                       </a:r>
                     </a:p>
                   </a:txBody>
@@ -10243,7 +10948,7 @@
                           <a:ea typeface="Microsoft YaHei" panose="020B0503020204020204" pitchFamily="34" charset="-122"/>
                           <a:cs typeface="Arial Unicode MS" pitchFamily="34" charset="-120"/>
                         </a:rPr>
-                        <a:t>0</a:t>
+                        <a:t>2</a:t>
                       </a:r>
                     </a:p>
                   </a:txBody>
@@ -10283,7 +10988,7 @@
                           <a:ea typeface="Microsoft YaHei" panose="020B0503020204020204" pitchFamily="34" charset="-122"/>
                           <a:cs typeface="Arial Unicode MS" pitchFamily="34" charset="-120"/>
                         </a:rPr>
-                        <a:t>2</a:t>
+                        <a:t>0</a:t>
                       </a:r>
                     </a:p>
                   </a:txBody>
@@ -10387,12 +11092,37 @@
                     <a:bodyPr/>
                     <a:lstStyle/>
                     <a:p>
+                      <a:r>
+                        <a:rPr kumimoji="1" lang="zh-TW" altLang="en-US" sz="1700" b="1" i="0" u="none" strike="noStrike" kern="1200" cap="none" normalizeH="0" baseline="0">
+                          <a:ln>
+                            <a:noFill/>
+                          </a:ln>
+                          <a:solidFill>
+                            <a:schemeClr val="tx1"/>
+                          </a:solidFill>
+                          <a:effectLst/>
+                          <a:latin typeface="Microsoft YaHei" panose="020B0503020204020204" pitchFamily="34" charset="-122"/>
+                          <a:ea typeface="Microsoft YaHei" panose="020B0503020204020204" pitchFamily="34" charset="-122"/>
+                          <a:cs typeface="+mn-cs"/>
+                        </a:rPr>
+                        <a:t>移工</a:t>
+                      </a:r>
+                      <a:endParaRPr lang="zh-TW" altLang="en-US"/>
+                    </a:p>
+                  </a:txBody>
+                  <a:tcPr marL="36000" marR="36000" marT="18000" marB="18000" anchor="ctr" horzOverflow="overflow"/>
+                </a:tc>
+                <a:tc>
+                  <a:txBody>
+                    <a:bodyPr/>
+                    <a:lstStyle/>
+                    <a:p>
                       <a:pPr marL="0" marR="0" lvl="0" indent="0" algn="ctr" defTabSz="914400" rtl="0" eaLnBrk="1" fontAlgn="base" latinLnBrk="0" hangingPunct="1">
                         <a:lnSpc>
-                          <a:spcPct val="80000"/>
+                          <a:spcPct val="100000"/>
                         </a:lnSpc>
                         <a:spcBef>
-                          <a:spcPct val="0"/>
+                          <a:spcPct val="20000"/>
                         </a:spcBef>
                         <a:spcAft>
                           <a:spcPct val="0"/>
@@ -10404,32 +11134,20 @@
                         <a:tabLst/>
                       </a:pPr>
                       <a:r>
-                        <a:rPr kumimoji="1" lang="zh-TW" altLang="en-US" sz="1700" b="1" i="0" u="none" strike="noStrike" kern="1200" cap="none" normalizeH="0" baseline="0">
-                          <a:ln>
-                            <a:noFill/>
-                          </a:ln>
-                          <a:solidFill>
-                            <a:schemeClr val="tx1"/>
-                          </a:solidFill>
-                          <a:effectLst/>
-                          <a:latin typeface="Microsoft YaHei" panose="020B0503020204020204" pitchFamily="34" charset="-122"/>
-                          <a:ea typeface="Microsoft YaHei" panose="020B0503020204020204" pitchFamily="34" charset="-122"/>
-                          <a:cs typeface="+mn-cs"/>
-                        </a:rPr>
-                        <a:t>移工</a:t>
-                      </a:r>
-                      <a:endParaRPr kumimoji="1" lang="zh-TW" altLang="en-US" sz="1700" b="1" i="0" u="none" strike="noStrike" kern="1200" cap="none" normalizeH="0" baseline="0" dirty="0">
-                        <a:ln>
-                          <a:noFill/>
-                        </a:ln>
-                        <a:solidFill>
-                          <a:schemeClr val="tx1"/>
-                        </a:solidFill>
-                        <a:effectLst/>
-                        <a:latin typeface="Microsoft YaHei" panose="020B0503020204020204" pitchFamily="34" charset="-122"/>
-                        <a:ea typeface="Microsoft YaHei" panose="020B0503020204020204" pitchFamily="34" charset="-122"/>
-                        <a:cs typeface="+mn-cs"/>
-                      </a:endParaRPr>
+                        <a:rPr kumimoji="1" lang="en-US" altLang="zh-TW" sz="1700" b="1" i="0" u="none" strike="noStrike" cap="none" normalizeH="0" baseline="0" dirty="0">
+                          <a:ln>
+                            <a:noFill/>
+                          </a:ln>
+                          <a:solidFill>
+                            <a:schemeClr val="tx1"/>
+                          </a:solidFill>
+                          <a:effectLst/>
+                          <a:latin typeface="Microsoft YaHei" panose="020B0503020204020204" pitchFamily="34" charset="-122"/>
+                          <a:ea typeface="Microsoft YaHei" panose="020B0503020204020204" pitchFamily="34" charset="-122"/>
+                          <a:cs typeface="Arial Unicode MS" pitchFamily="34" charset="-120"/>
+                        </a:rPr>
+                        <a:t>0</a:t>
+                      </a:r>
                     </a:p>
                   </a:txBody>
                   <a:tcPr marL="36000" marR="36000" marT="18000" marB="18000" anchor="ctr" horzOverflow="overflow"/>
@@ -10496,17 +11214,17 @@
                         <a:tabLst/>
                       </a:pPr>
                       <a:r>
-                        <a:rPr kumimoji="1" lang="en-US" altLang="zh-TW" sz="1700" b="1" i="0" u="none" strike="noStrike" cap="none" normalizeH="0" baseline="0" dirty="0">
-                          <a:ln>
-                            <a:noFill/>
-                          </a:ln>
-                          <a:solidFill>
-                            <a:schemeClr val="tx1"/>
-                          </a:solidFill>
-                          <a:effectLst/>
-                          <a:latin typeface="Microsoft YaHei" panose="020B0503020204020204" pitchFamily="34" charset="-122"/>
-                          <a:ea typeface="Microsoft YaHei" panose="020B0503020204020204" pitchFamily="34" charset="-122"/>
-                          <a:cs typeface="Arial Unicode MS" pitchFamily="34" charset="-120"/>
+                        <a:rPr kumimoji="1" lang="en-US" altLang="zh-TW" sz="1700" b="1" u="none" strike="noStrike" kern="1200" cap="none" normalizeH="0" baseline="0" dirty="0">
+                          <a:ln>
+                            <a:noFill/>
+                          </a:ln>
+                          <a:solidFill>
+                            <a:schemeClr val="tx1"/>
+                          </a:solidFill>
+                          <a:effectLst/>
+                          <a:latin typeface="Microsoft YaHei" panose="020B0503020204020204" pitchFamily="34" charset="-122"/>
+                          <a:ea typeface="Microsoft YaHei" panose="020B0503020204020204" pitchFamily="34" charset="-122"/>
+                          <a:cs typeface="+mn-cs"/>
                         </a:rPr>
                         <a:t>0</a:t>
                       </a:r>
@@ -10536,19 +11254,19 @@
                         <a:tabLst/>
                       </a:pPr>
                       <a:r>
-                        <a:rPr kumimoji="1" lang="en-US" altLang="zh-TW" sz="1700" b="1" u="none" strike="noStrike" kern="1200" cap="none" normalizeH="0" baseline="0" dirty="0">
-                          <a:ln>
-                            <a:noFill/>
-                          </a:ln>
-                          <a:solidFill>
-                            <a:schemeClr val="tx1"/>
-                          </a:solidFill>
-                          <a:effectLst/>
-                          <a:latin typeface="Microsoft YaHei" panose="020B0503020204020204" pitchFamily="34" charset="-122"/>
-                          <a:ea typeface="Microsoft YaHei" panose="020B0503020204020204" pitchFamily="34" charset="-122"/>
-                          <a:cs typeface="+mn-cs"/>
-                        </a:rPr>
-                        <a:t>0</a:t>
+                        <a:rPr kumimoji="1" lang="en-US" altLang="zh-TW" sz="1700" b="1" i="0" u="none" strike="noStrike" cap="none" normalizeH="0" baseline="0" dirty="0">
+                          <a:ln>
+                            <a:noFill/>
+                          </a:ln>
+                          <a:solidFill>
+                            <a:schemeClr val="tx1"/>
+                          </a:solidFill>
+                          <a:effectLst/>
+                          <a:latin typeface="Microsoft YaHei" panose="020B0503020204020204" pitchFamily="34" charset="-122"/>
+                          <a:ea typeface="Microsoft YaHei" panose="020B0503020204020204" pitchFamily="34" charset="-122"/>
+                          <a:cs typeface="Arial Unicode MS" pitchFamily="34" charset="-120"/>
+                        </a:rPr>
+                        <a:t>5</a:t>
                       </a:r>
                     </a:p>
                   </a:txBody>
@@ -10588,7 +11306,7 @@
                           <a:ea typeface="Microsoft YaHei" panose="020B0503020204020204" pitchFamily="34" charset="-122"/>
                           <a:cs typeface="Arial Unicode MS" pitchFamily="34" charset="-120"/>
                         </a:rPr>
-                        <a:t>5</a:t>
+                        <a:t>1</a:t>
                       </a:r>
                     </a:p>
                   </a:txBody>
@@ -10628,7 +11346,7 @@
                           <a:ea typeface="Microsoft YaHei" panose="020B0503020204020204" pitchFamily="34" charset="-122"/>
                           <a:cs typeface="Arial Unicode MS" pitchFamily="34" charset="-120"/>
                         </a:rPr>
-                        <a:t>1</a:t>
+                        <a:t>0</a:t>
                       </a:r>
                     </a:p>
                   </a:txBody>
@@ -10668,7 +11386,7 @@
                           <a:ea typeface="Microsoft YaHei" panose="020B0503020204020204" pitchFamily="34" charset="-122"/>
                           <a:cs typeface="Arial Unicode MS" pitchFamily="34" charset="-120"/>
                         </a:rPr>
-                        <a:t>0</a:t>
+                        <a:t>4</a:t>
                       </a:r>
                     </a:p>
                   </a:txBody>
@@ -10732,22 +11450,6 @@
                     <a:bodyPr/>
                     <a:lstStyle/>
                     <a:p>
-                      <a:pPr marL="0" marR="0" lvl="0" indent="0" algn="ctr" defTabSz="914400" rtl="0" eaLnBrk="1" fontAlgn="base" latinLnBrk="0" hangingPunct="1">
-                        <a:lnSpc>
-                          <a:spcPct val="80000"/>
-                        </a:lnSpc>
-                        <a:spcBef>
-                          <a:spcPct val="0"/>
-                        </a:spcBef>
-                        <a:spcAft>
-                          <a:spcPct val="0"/>
-                        </a:spcAft>
-                        <a:buClrTx/>
-                        <a:buSzTx/>
-                        <a:buFontTx/>
-                        <a:buNone/>
-                        <a:tabLst/>
-                      </a:pPr>
                       <a:r>
                         <a:rPr kumimoji="1" lang="zh-TW" altLang="en-US" sz="1700" b="1" i="0" u="none" strike="noStrike" kern="1200" cap="none" normalizeH="0" baseline="0" dirty="0">
                           <a:ln>
@@ -10763,6 +11465,7 @@
                         </a:rPr>
                         <a:t>小計</a:t>
                       </a:r>
+                      <a:endParaRPr lang="zh-TW" altLang="en-US" dirty="0"/>
                     </a:p>
                   </a:txBody>
                   <a:tcPr marL="36000" marR="36000" marT="18000" marB="18000" anchor="ctr" horzOverflow="overflow">
@@ -11044,6 +11747,53 @@
                           <a:cs typeface="Arial Unicode MS" pitchFamily="34" charset="-120"/>
                         </a:rPr>
                         <a:t>2</a:t>
+                      </a:r>
+                    </a:p>
+                  </a:txBody>
+                  <a:tcPr marL="36000" marR="36000" marT="18000" marB="18000" anchor="ctr" horzOverflow="overflow">
+                    <a:solidFill>
+                      <a:schemeClr val="accent4">
+                        <a:lumMod val="20000"/>
+                        <a:lumOff val="80000"/>
+                      </a:schemeClr>
+                    </a:solidFill>
+                  </a:tcPr>
+                </a:tc>
+                <a:tc>
+                  <a:txBody>
+                    <a:bodyPr/>
+                    <a:lstStyle/>
+                    <a:p>
+                      <a:pPr marL="0" marR="0" lvl="0" indent="0" algn="ctr" defTabSz="914400" rtl="0" eaLnBrk="1" fontAlgn="base" latinLnBrk="0" hangingPunct="1">
+                        <a:lnSpc>
+                          <a:spcPct val="100000"/>
+                        </a:lnSpc>
+                        <a:spcBef>
+                          <a:spcPct val="20000"/>
+                        </a:spcBef>
+                        <a:spcAft>
+                          <a:spcPct val="0"/>
+                        </a:spcAft>
+                        <a:buClrTx/>
+                        <a:buSzTx/>
+                        <a:buFontTx/>
+                        <a:buNone/>
+                        <a:tabLst/>
+                      </a:pPr>
+                      <a:r>
+                        <a:rPr kumimoji="1" lang="en-US" altLang="zh-TW" sz="1700" b="1" i="0" u="none" strike="noStrike" cap="none" normalizeH="0" baseline="0" dirty="0">
+                          <a:ln>
+                            <a:noFill/>
+                          </a:ln>
+                          <a:solidFill>
+                            <a:schemeClr val="tx1"/>
+                          </a:solidFill>
+                          <a:effectLst/>
+                          <a:latin typeface="Microsoft YaHei" panose="020B0503020204020204" pitchFamily="34" charset="-122"/>
+                          <a:ea typeface="Microsoft YaHei" panose="020B0503020204020204" pitchFamily="34" charset="-122"/>
+                          <a:cs typeface="Arial Unicode MS" pitchFamily="34" charset="-120"/>
+                        </a:rPr>
+                        <a:t>8</a:t>
                       </a:r>
                     </a:p>
                   </a:txBody>
@@ -11131,6 +11881,790 @@
                   </a:tcPr>
                 </a:tc>
                 <a:tc hMerge="1">
+                  <a:txBody>
+                    <a:bodyPr/>
+                    <a:lstStyle/>
+                    <a:p>
+                      <a:endParaRPr lang="zh-TW" altLang="en-US"/>
+                    </a:p>
+                  </a:txBody>
+                  <a:tcPr/>
+                </a:tc>
+                <a:tc>
+                  <a:txBody>
+                    <a:bodyPr/>
+                    <a:lstStyle/>
+                    <a:p>
+                      <a:pPr marL="0" marR="0" lvl="0" indent="0" algn="ctr" defTabSz="914400" rtl="0" eaLnBrk="1" fontAlgn="base" latinLnBrk="0" hangingPunct="1">
+                        <a:lnSpc>
+                          <a:spcPct val="100000"/>
+                        </a:lnSpc>
+                        <a:spcBef>
+                          <a:spcPct val="20000"/>
+                        </a:spcBef>
+                        <a:spcAft>
+                          <a:spcPct val="0"/>
+                        </a:spcAft>
+                        <a:buClrTx/>
+                        <a:buSzTx/>
+                        <a:buFontTx/>
+                        <a:buNone/>
+                        <a:tabLst/>
+                      </a:pPr>
+                      <a:r>
+                        <a:rPr kumimoji="1" lang="en-US" altLang="zh-TW" sz="1700" b="1" i="0" u="none" strike="noStrike" cap="none" normalizeH="0" baseline="0" dirty="0">
+                          <a:ln>
+                            <a:noFill/>
+                          </a:ln>
+                          <a:solidFill>
+                            <a:schemeClr val="tx1"/>
+                          </a:solidFill>
+                          <a:effectLst/>
+                          <a:latin typeface="Microsoft YaHei" panose="020B0503020204020204" pitchFamily="34" charset="-122"/>
+                          <a:ea typeface="Microsoft YaHei" panose="020B0503020204020204" pitchFamily="34" charset="-122"/>
+                          <a:cs typeface="Arial Unicode MS" pitchFamily="34" charset="-120"/>
+                        </a:rPr>
+                        <a:t>2</a:t>
+                      </a:r>
+                    </a:p>
+                  </a:txBody>
+                  <a:tcPr marL="36000" marR="36000" marT="18000" marB="18000" anchor="ctr" horzOverflow="overflow">
+                    <a:solidFill>
+                      <a:schemeClr val="accent6">
+                        <a:lumMod val="20000"/>
+                        <a:lumOff val="80000"/>
+                      </a:schemeClr>
+                    </a:solidFill>
+                  </a:tcPr>
+                </a:tc>
+                <a:tc>
+                  <a:txBody>
+                    <a:bodyPr/>
+                    <a:lstStyle/>
+                    <a:p>
+                      <a:pPr marL="0" marR="0" lvl="0" indent="0" algn="ctr" defTabSz="914400" rtl="0" eaLnBrk="1" fontAlgn="base" latinLnBrk="0" hangingPunct="1">
+                        <a:lnSpc>
+                          <a:spcPct val="100000"/>
+                        </a:lnSpc>
+                        <a:spcBef>
+                          <a:spcPct val="20000"/>
+                        </a:spcBef>
+                        <a:spcAft>
+                          <a:spcPct val="0"/>
+                        </a:spcAft>
+                        <a:buClrTx/>
+                        <a:buSzTx/>
+                        <a:buFontTx/>
+                        <a:buNone/>
+                        <a:tabLst/>
+                      </a:pPr>
+                      <a:r>
+                        <a:rPr kumimoji="1" lang="en-US" altLang="zh-TW" sz="1700" b="1" i="0" u="none" strike="noStrike" cap="none" normalizeH="0" baseline="0" dirty="0">
+                          <a:ln>
+                            <a:noFill/>
+                          </a:ln>
+                          <a:solidFill>
+                            <a:schemeClr val="tx1"/>
+                          </a:solidFill>
+                          <a:effectLst/>
+                          <a:latin typeface="Microsoft YaHei" panose="020B0503020204020204" pitchFamily="34" charset="-122"/>
+                          <a:ea typeface="Microsoft YaHei" panose="020B0503020204020204" pitchFamily="34" charset="-122"/>
+                          <a:cs typeface="Arial Unicode MS" pitchFamily="34" charset="-120"/>
+                        </a:rPr>
+                        <a:t>1</a:t>
+                      </a:r>
+                    </a:p>
+                  </a:txBody>
+                  <a:tcPr marL="36000" marR="36000" marT="18000" marB="18000" anchor="ctr" horzOverflow="overflow">
+                    <a:solidFill>
+                      <a:schemeClr val="accent6">
+                        <a:lumMod val="20000"/>
+                        <a:lumOff val="80000"/>
+                      </a:schemeClr>
+                    </a:solidFill>
+                  </a:tcPr>
+                </a:tc>
+                <a:tc>
+                  <a:txBody>
+                    <a:bodyPr/>
+                    <a:lstStyle/>
+                    <a:p>
+                      <a:pPr marL="0" marR="0" lvl="0" indent="0" algn="ctr" defTabSz="914400" rtl="0" eaLnBrk="1" fontAlgn="base" latinLnBrk="0" hangingPunct="1">
+                        <a:lnSpc>
+                          <a:spcPct val="100000"/>
+                        </a:lnSpc>
+                        <a:spcBef>
+                          <a:spcPct val="20000"/>
+                        </a:spcBef>
+                        <a:spcAft>
+                          <a:spcPct val="0"/>
+                        </a:spcAft>
+                        <a:buClrTx/>
+                        <a:buSzTx/>
+                        <a:buFontTx/>
+                        <a:buNone/>
+                        <a:tabLst/>
+                      </a:pPr>
+                      <a:r>
+                        <a:rPr kumimoji="1" lang="en-US" altLang="zh-TW" sz="1700" b="1" i="0" u="none" strike="noStrike" cap="none" normalizeH="0" baseline="0" dirty="0">
+                          <a:ln>
+                            <a:noFill/>
+                          </a:ln>
+                          <a:solidFill>
+                            <a:schemeClr val="tx1"/>
+                          </a:solidFill>
+                          <a:effectLst/>
+                          <a:latin typeface="Microsoft YaHei" panose="020B0503020204020204" pitchFamily="34" charset="-122"/>
+                          <a:ea typeface="Microsoft YaHei" panose="020B0503020204020204" pitchFamily="34" charset="-122"/>
+                          <a:cs typeface="Arial Unicode MS" pitchFamily="34" charset="-120"/>
+                        </a:rPr>
+                        <a:t>2</a:t>
+                      </a:r>
+                    </a:p>
+                  </a:txBody>
+                  <a:tcPr marL="36000" marR="36000" marT="18000" marB="18000" anchor="ctr" horzOverflow="overflow">
+                    <a:solidFill>
+                      <a:schemeClr val="accent6">
+                        <a:lumMod val="20000"/>
+                        <a:lumOff val="80000"/>
+                      </a:schemeClr>
+                    </a:solidFill>
+                  </a:tcPr>
+                </a:tc>
+                <a:tc>
+                  <a:txBody>
+                    <a:bodyPr/>
+                    <a:lstStyle/>
+                    <a:p>
+                      <a:pPr marL="0" marR="0" lvl="0" indent="0" algn="ctr" defTabSz="914400" rtl="0" eaLnBrk="1" fontAlgn="base" latinLnBrk="0" hangingPunct="1">
+                        <a:lnSpc>
+                          <a:spcPct val="100000"/>
+                        </a:lnSpc>
+                        <a:spcBef>
+                          <a:spcPct val="20000"/>
+                        </a:spcBef>
+                        <a:spcAft>
+                          <a:spcPct val="0"/>
+                        </a:spcAft>
+                        <a:buClrTx/>
+                        <a:buSzTx/>
+                        <a:buFontTx/>
+                        <a:buNone/>
+                        <a:tabLst/>
+                      </a:pPr>
+                      <a:r>
+                        <a:rPr kumimoji="1" lang="en-US" altLang="zh-TW" sz="1700" b="1" i="0" u="none" strike="noStrike" cap="none" normalizeH="0" baseline="0" dirty="0">
+                          <a:ln>
+                            <a:noFill/>
+                          </a:ln>
+                          <a:solidFill>
+                            <a:schemeClr val="tx1"/>
+                          </a:solidFill>
+                          <a:effectLst/>
+                          <a:latin typeface="Microsoft YaHei" panose="020B0503020204020204" pitchFamily="34" charset="-122"/>
+                          <a:ea typeface="Microsoft YaHei" panose="020B0503020204020204" pitchFamily="34" charset="-122"/>
+                          <a:cs typeface="Arial Unicode MS" pitchFamily="34" charset="-120"/>
+                        </a:rPr>
+                        <a:t>3</a:t>
+                      </a:r>
+                    </a:p>
+                  </a:txBody>
+                  <a:tcPr marL="36000" marR="36000" marT="18000" marB="18000" anchor="ctr" horzOverflow="overflow">
+                    <a:solidFill>
+                      <a:schemeClr val="accent6">
+                        <a:lumMod val="20000"/>
+                        <a:lumOff val="80000"/>
+                      </a:schemeClr>
+                    </a:solidFill>
+                  </a:tcPr>
+                </a:tc>
+                <a:tc>
+                  <a:txBody>
+                    <a:bodyPr/>
+                    <a:lstStyle/>
+                    <a:p>
+                      <a:pPr marL="0" marR="0" lvl="0" indent="0" algn="ctr" defTabSz="914400" rtl="0" eaLnBrk="1" fontAlgn="base" latinLnBrk="0" hangingPunct="1">
+                        <a:lnSpc>
+                          <a:spcPct val="100000"/>
+                        </a:lnSpc>
+                        <a:spcBef>
+                          <a:spcPct val="20000"/>
+                        </a:spcBef>
+                        <a:spcAft>
+                          <a:spcPct val="0"/>
+                        </a:spcAft>
+                        <a:buClrTx/>
+                        <a:buSzTx/>
+                        <a:buFontTx/>
+                        <a:buNone/>
+                        <a:tabLst/>
+                      </a:pPr>
+                      <a:r>
+                        <a:rPr kumimoji="1" lang="en-US" altLang="zh-TW" sz="1700" b="1" i="0" u="none" strike="noStrike" cap="none" normalizeH="0" baseline="0" dirty="0">
+                          <a:ln>
+                            <a:noFill/>
+                          </a:ln>
+                          <a:solidFill>
+                            <a:schemeClr val="tx1"/>
+                          </a:solidFill>
+                          <a:effectLst/>
+                          <a:latin typeface="Microsoft YaHei" panose="020B0503020204020204" pitchFamily="34" charset="-122"/>
+                          <a:ea typeface="Microsoft YaHei" panose="020B0503020204020204" pitchFamily="34" charset="-122"/>
+                          <a:cs typeface="Arial Unicode MS" pitchFamily="34" charset="-120"/>
+                        </a:rPr>
+                        <a:t>2</a:t>
+                      </a:r>
+                    </a:p>
+                  </a:txBody>
+                  <a:tcPr marL="36000" marR="36000" marT="18000" marB="18000" anchor="ctr" horzOverflow="overflow">
+                    <a:solidFill>
+                      <a:schemeClr val="accent6">
+                        <a:lumMod val="20000"/>
+                        <a:lumOff val="80000"/>
+                      </a:schemeClr>
+                    </a:solidFill>
+                  </a:tcPr>
+                </a:tc>
+                <a:tc>
+                  <a:txBody>
+                    <a:bodyPr/>
+                    <a:lstStyle/>
+                    <a:p>
+                      <a:pPr marL="0" marR="0" lvl="0" indent="0" algn="ctr" defTabSz="914400" rtl="0" eaLnBrk="1" fontAlgn="base" latinLnBrk="0" hangingPunct="1">
+                        <a:lnSpc>
+                          <a:spcPct val="100000"/>
+                        </a:lnSpc>
+                        <a:spcBef>
+                          <a:spcPct val="20000"/>
+                        </a:spcBef>
+                        <a:spcAft>
+                          <a:spcPct val="0"/>
+                        </a:spcAft>
+                        <a:buClrTx/>
+                        <a:buSzTx/>
+                        <a:buFontTx/>
+                        <a:buNone/>
+                        <a:tabLst/>
+                      </a:pPr>
+                      <a:r>
+                        <a:rPr kumimoji="1" lang="en-US" altLang="zh-TW" sz="1700" b="1" i="0" u="none" strike="noStrike" cap="none" normalizeH="0" baseline="0" dirty="0">
+                          <a:ln>
+                            <a:noFill/>
+                          </a:ln>
+                          <a:solidFill>
+                            <a:schemeClr val="tx1"/>
+                          </a:solidFill>
+                          <a:effectLst/>
+                          <a:latin typeface="Microsoft YaHei" panose="020B0503020204020204" pitchFamily="34" charset="-122"/>
+                          <a:ea typeface="Microsoft YaHei" panose="020B0503020204020204" pitchFamily="34" charset="-122"/>
+                          <a:cs typeface="Arial Unicode MS" pitchFamily="34" charset="-120"/>
+                        </a:rPr>
+                        <a:t>1</a:t>
+                      </a:r>
+                    </a:p>
+                  </a:txBody>
+                  <a:tcPr marL="36000" marR="36000" marT="18000" marB="18000" anchor="ctr" horzOverflow="overflow">
+                    <a:solidFill>
+                      <a:schemeClr val="accent6">
+                        <a:lumMod val="20000"/>
+                        <a:lumOff val="80000"/>
+                      </a:schemeClr>
+                    </a:solidFill>
+                  </a:tcPr>
+                </a:tc>
+                <a:tc>
+                  <a:txBody>
+                    <a:bodyPr/>
+                    <a:lstStyle/>
+                    <a:p>
+                      <a:pPr marL="0" marR="0" lvl="0" indent="0" algn="ctr" defTabSz="914400" rtl="0" eaLnBrk="1" fontAlgn="base" latinLnBrk="0" hangingPunct="1">
+                        <a:lnSpc>
+                          <a:spcPct val="100000"/>
+                        </a:lnSpc>
+                        <a:spcBef>
+                          <a:spcPct val="20000"/>
+                        </a:spcBef>
+                        <a:spcAft>
+                          <a:spcPct val="0"/>
+                        </a:spcAft>
+                        <a:buClrTx/>
+                        <a:buSzTx/>
+                        <a:buFontTx/>
+                        <a:buNone/>
+                        <a:tabLst/>
+                      </a:pPr>
+                      <a:r>
+                        <a:rPr kumimoji="1" lang="en-US" altLang="zh-TW" sz="1700" b="1" i="0" u="none" strike="noStrike" cap="none" normalizeH="0" baseline="0" dirty="0">
+                          <a:ln>
+                            <a:noFill/>
+                          </a:ln>
+                          <a:solidFill>
+                            <a:schemeClr val="tx1"/>
+                          </a:solidFill>
+                          <a:effectLst/>
+                          <a:latin typeface="Microsoft YaHei" panose="020B0503020204020204" pitchFamily="34" charset="-122"/>
+                          <a:ea typeface="Microsoft YaHei" panose="020B0503020204020204" pitchFamily="34" charset="-122"/>
+                          <a:cs typeface="Arial Unicode MS" pitchFamily="34" charset="-120"/>
+                        </a:rPr>
+                        <a:t>2</a:t>
+                      </a:r>
+                    </a:p>
+                  </a:txBody>
+                  <a:tcPr marL="36000" marR="36000" marT="18000" marB="18000" anchor="ctr" horzOverflow="overflow">
+                    <a:solidFill>
+                      <a:schemeClr val="accent6">
+                        <a:lumMod val="20000"/>
+                        <a:lumOff val="80000"/>
+                      </a:schemeClr>
+                    </a:solidFill>
+                  </a:tcPr>
+                </a:tc>
+                <a:extLst>
+                  <a:ext uri="{0D108BD9-81ED-4DB2-BD59-A6C34878D82A}">
+                    <a16:rowId xmlns:a16="http://schemas.microsoft.com/office/drawing/2014/main" val="3812269708"/>
+                  </a:ext>
+                </a:extLst>
+              </a:tr>
+              <a:tr h="328740">
+                <a:tc vMerge="1">
+                  <a:txBody>
+                    <a:bodyPr/>
+                    <a:lstStyle/>
+                    <a:p>
+                      <a:endParaRPr lang="zh-TW" altLang="en-US"/>
+                    </a:p>
+                  </a:txBody>
+                  <a:tcPr/>
+                </a:tc>
+                <a:tc rowSpan="3">
+                  <a:txBody>
+                    <a:bodyPr/>
+                    <a:lstStyle/>
+                    <a:p>
+                      <a:pPr marL="0" marR="0" lvl="0" indent="0" algn="ctr" defTabSz="914400" rtl="0" eaLnBrk="1" fontAlgn="base" latinLnBrk="0" hangingPunct="1">
+                        <a:lnSpc>
+                          <a:spcPct val="80000"/>
+                        </a:lnSpc>
+                        <a:spcBef>
+                          <a:spcPct val="0"/>
+                        </a:spcBef>
+                        <a:spcAft>
+                          <a:spcPct val="0"/>
+                        </a:spcAft>
+                        <a:buClrTx/>
+                        <a:buSzTx/>
+                        <a:buFontTx/>
+                        <a:buNone/>
+                        <a:tabLst/>
+                      </a:pPr>
+                      <a:r>
+                        <a:rPr kumimoji="1" lang="zh-TW" altLang="en-US" sz="1700" b="1" i="0" u="none" strike="noStrike" cap="none" normalizeH="0" baseline="0" dirty="0">
+                          <a:ln>
+                            <a:noFill/>
+                          </a:ln>
+                          <a:solidFill>
+                            <a:schemeClr val="tx1"/>
+                          </a:solidFill>
+                          <a:effectLst/>
+                          <a:latin typeface="Microsoft YaHei" panose="020B0503020204020204" pitchFamily="34" charset="-122"/>
+                          <a:ea typeface="Microsoft YaHei" panose="020B0503020204020204" pitchFamily="34" charset="-122"/>
+                        </a:rPr>
+                        <a:t>品管</a:t>
+                      </a:r>
+                      <a:endParaRPr kumimoji="1" lang="en-US" altLang="zh-TW" sz="1700" b="1" i="0" u="none" strike="noStrike" cap="none" normalizeH="0" baseline="0" dirty="0">
+                        <a:ln>
+                          <a:noFill/>
+                        </a:ln>
+                        <a:solidFill>
+                          <a:schemeClr val="tx1"/>
+                        </a:solidFill>
+                        <a:effectLst/>
+                        <a:latin typeface="Microsoft YaHei" panose="020B0503020204020204" pitchFamily="34" charset="-122"/>
+                        <a:ea typeface="Microsoft YaHei" panose="020B0503020204020204" pitchFamily="34" charset="-122"/>
+                      </a:endParaRPr>
+                    </a:p>
+                  </a:txBody>
+                  <a:tcPr marL="36000" marR="36000" marT="18000" marB="18000" anchor="ctr" horzOverflow="overflow">
+                    <a:solidFill>
+                      <a:schemeClr val="accent2">
+                        <a:lumMod val="20000"/>
+                        <a:lumOff val="80000"/>
+                      </a:schemeClr>
+                    </a:solidFill>
+                  </a:tcPr>
+                </a:tc>
+                <a:tc>
+                  <a:txBody>
+                    <a:bodyPr/>
+                    <a:lstStyle/>
+                    <a:p>
+                      <a:pPr marL="0" marR="0" lvl="0" indent="0" algn="ctr" defTabSz="914400" rtl="0" eaLnBrk="1" fontAlgn="base" latinLnBrk="0" hangingPunct="1">
+                        <a:lnSpc>
+                          <a:spcPct val="80000"/>
+                        </a:lnSpc>
+                        <a:spcBef>
+                          <a:spcPct val="0"/>
+                        </a:spcBef>
+                        <a:spcAft>
+                          <a:spcPct val="0"/>
+                        </a:spcAft>
+                        <a:buClrTx/>
+                        <a:buSzTx/>
+                        <a:buFontTx/>
+                        <a:buNone/>
+                        <a:tabLst/>
+                      </a:pPr>
+                      <a:r>
+                        <a:rPr kumimoji="1" lang="zh-TW" altLang="en-US" sz="1700" b="1" i="0" u="none" strike="noStrike" kern="1200" cap="none" normalizeH="0" baseline="0">
+                          <a:ln>
+                            <a:noFill/>
+                          </a:ln>
+                          <a:solidFill>
+                            <a:schemeClr val="tx1"/>
+                          </a:solidFill>
+                          <a:effectLst/>
+                          <a:latin typeface="Microsoft YaHei" panose="020B0503020204020204" pitchFamily="34" charset="-122"/>
+                          <a:ea typeface="Microsoft YaHei" panose="020B0503020204020204" pitchFamily="34" charset="-122"/>
+                          <a:cs typeface="+mn-cs"/>
+                        </a:rPr>
+                        <a:t>品管</a:t>
+                      </a:r>
+                      <a:endParaRPr kumimoji="1" lang="en-US" altLang="zh-TW" sz="1700" b="1" i="0" u="none" strike="noStrike" cap="none" normalizeH="0" baseline="0" dirty="0">
+                        <a:ln>
+                          <a:noFill/>
+                        </a:ln>
+                        <a:solidFill>
+                          <a:schemeClr val="tx1"/>
+                        </a:solidFill>
+                        <a:effectLst/>
+                        <a:latin typeface="Microsoft YaHei" panose="020B0503020204020204" pitchFamily="34" charset="-122"/>
+                        <a:ea typeface="Microsoft YaHei" panose="020B0503020204020204" pitchFamily="34" charset="-122"/>
+                      </a:endParaRPr>
+                    </a:p>
+                  </a:txBody>
+                  <a:tcPr marL="36000" marR="36000" marT="18000" marB="18000" anchor="ctr" horzOverflow="overflow">
+                    <a:solidFill>
+                      <a:schemeClr val="accent2">
+                        <a:lumMod val="20000"/>
+                        <a:lumOff val="80000"/>
+                      </a:schemeClr>
+                    </a:solidFill>
+                  </a:tcPr>
+                </a:tc>
+                <a:tc>
+                  <a:txBody>
+                    <a:bodyPr/>
+                    <a:lstStyle/>
+                    <a:p>
+                      <a:pPr marL="0" marR="0" lvl="0" indent="0" algn="ctr" defTabSz="914400" rtl="0" eaLnBrk="1" fontAlgn="base" latinLnBrk="0" hangingPunct="1">
+                        <a:lnSpc>
+                          <a:spcPct val="100000"/>
+                        </a:lnSpc>
+                        <a:spcBef>
+                          <a:spcPct val="20000"/>
+                        </a:spcBef>
+                        <a:spcAft>
+                          <a:spcPct val="0"/>
+                        </a:spcAft>
+                        <a:buClrTx/>
+                        <a:buSzTx/>
+                        <a:buFontTx/>
+                        <a:buNone/>
+                        <a:tabLst/>
+                      </a:pPr>
+                      <a:r>
+                        <a:rPr kumimoji="1" lang="en-US" altLang="zh-TW" sz="1700" b="1" i="0" u="none" strike="noStrike" cap="none" normalizeH="0" baseline="0" dirty="0">
+                          <a:ln>
+                            <a:noFill/>
+                          </a:ln>
+                          <a:solidFill>
+                            <a:schemeClr val="tx1"/>
+                          </a:solidFill>
+                          <a:effectLst/>
+                          <a:latin typeface="Microsoft YaHei" panose="020B0503020204020204" pitchFamily="34" charset="-122"/>
+                          <a:ea typeface="Microsoft YaHei" panose="020B0503020204020204" pitchFamily="34" charset="-122"/>
+                          <a:cs typeface="Arial Unicode MS" pitchFamily="34" charset="-120"/>
+                        </a:rPr>
+                        <a:t>2</a:t>
+                      </a:r>
+                    </a:p>
+                  </a:txBody>
+                  <a:tcPr marL="36000" marR="36000" marT="18000" marB="18000" anchor="ctr" horzOverflow="overflow"/>
+                </a:tc>
+                <a:tc>
+                  <a:txBody>
+                    <a:bodyPr/>
+                    <a:lstStyle/>
+                    <a:p>
+                      <a:pPr marL="0" marR="0" lvl="0" indent="0" algn="ctr" defTabSz="914400" rtl="0" eaLnBrk="1" fontAlgn="base" latinLnBrk="0" hangingPunct="1">
+                        <a:lnSpc>
+                          <a:spcPct val="100000"/>
+                        </a:lnSpc>
+                        <a:spcBef>
+                          <a:spcPct val="20000"/>
+                        </a:spcBef>
+                        <a:spcAft>
+                          <a:spcPct val="0"/>
+                        </a:spcAft>
+                        <a:buClrTx/>
+                        <a:buSzTx/>
+                        <a:buFontTx/>
+                        <a:buNone/>
+                        <a:tabLst/>
+                      </a:pPr>
+                      <a:r>
+                        <a:rPr kumimoji="1" lang="en-US" altLang="zh-TW" sz="1700" b="1" i="0" u="none" strike="noStrike" cap="none" normalizeH="0" baseline="0" dirty="0">
+                          <a:ln>
+                            <a:noFill/>
+                          </a:ln>
+                          <a:solidFill>
+                            <a:schemeClr val="tx1"/>
+                          </a:solidFill>
+                          <a:effectLst/>
+                          <a:latin typeface="Microsoft YaHei" panose="020B0503020204020204" pitchFamily="34" charset="-122"/>
+                          <a:ea typeface="Microsoft YaHei" panose="020B0503020204020204" pitchFamily="34" charset="-122"/>
+                          <a:cs typeface="Arial Unicode MS" pitchFamily="34" charset="-120"/>
+                        </a:rPr>
+                        <a:t>2</a:t>
+                      </a:r>
+                    </a:p>
+                  </a:txBody>
+                  <a:tcPr marL="36000" marR="36000" marT="18000" marB="18000" anchor="ctr" horzOverflow="overflow"/>
+                </a:tc>
+                <a:tc>
+                  <a:txBody>
+                    <a:bodyPr/>
+                    <a:lstStyle/>
+                    <a:p>
+                      <a:pPr marL="0" marR="0" lvl="0" indent="0" algn="ctr" defTabSz="914400" rtl="0" eaLnBrk="1" fontAlgn="base" latinLnBrk="0" hangingPunct="1">
+                        <a:lnSpc>
+                          <a:spcPct val="100000"/>
+                        </a:lnSpc>
+                        <a:spcBef>
+                          <a:spcPct val="20000"/>
+                        </a:spcBef>
+                        <a:spcAft>
+                          <a:spcPct val="0"/>
+                        </a:spcAft>
+                        <a:buClrTx/>
+                        <a:buSzTx/>
+                        <a:buFontTx/>
+                        <a:buNone/>
+                        <a:tabLst/>
+                      </a:pPr>
+                      <a:r>
+                        <a:rPr kumimoji="1" lang="en-US" altLang="zh-TW" sz="1700" b="1" i="0" u="none" strike="noStrike" cap="none" normalizeH="0" baseline="0" dirty="0">
+                          <a:ln>
+                            <a:noFill/>
+                          </a:ln>
+                          <a:solidFill>
+                            <a:schemeClr val="tx1"/>
+                          </a:solidFill>
+                          <a:effectLst/>
+                          <a:latin typeface="Microsoft YaHei" panose="020B0503020204020204" pitchFamily="34" charset="-122"/>
+                          <a:ea typeface="Microsoft YaHei" panose="020B0503020204020204" pitchFamily="34" charset="-122"/>
+                          <a:cs typeface="Arial Unicode MS" pitchFamily="34" charset="-120"/>
+                        </a:rPr>
+                        <a:t>3</a:t>
+                      </a:r>
+                    </a:p>
+                  </a:txBody>
+                  <a:tcPr marL="36000" marR="36000" marT="18000" marB="18000" anchor="ctr" horzOverflow="overflow"/>
+                </a:tc>
+                <a:tc>
+                  <a:txBody>
+                    <a:bodyPr/>
+                    <a:lstStyle/>
+                    <a:p>
+                      <a:pPr marL="0" marR="0" lvl="0" indent="0" algn="ctr" defTabSz="914400" rtl="0" eaLnBrk="1" fontAlgn="base" latinLnBrk="0" hangingPunct="1">
+                        <a:lnSpc>
+                          <a:spcPct val="100000"/>
+                        </a:lnSpc>
+                        <a:spcBef>
+                          <a:spcPct val="20000"/>
+                        </a:spcBef>
+                        <a:spcAft>
+                          <a:spcPct val="0"/>
+                        </a:spcAft>
+                        <a:buClrTx/>
+                        <a:buSzTx/>
+                        <a:buFontTx/>
+                        <a:buNone/>
+                        <a:tabLst/>
+                      </a:pPr>
+                      <a:r>
+                        <a:rPr kumimoji="1" lang="en-US" altLang="zh-TW" sz="1700" b="1" i="0" u="none" strike="noStrike" cap="none" normalizeH="0" baseline="0" dirty="0">
+                          <a:ln>
+                            <a:noFill/>
+                          </a:ln>
+                          <a:solidFill>
+                            <a:schemeClr val="tx1"/>
+                          </a:solidFill>
+                          <a:effectLst/>
+                          <a:latin typeface="Microsoft YaHei" panose="020B0503020204020204" pitchFamily="34" charset="-122"/>
+                          <a:ea typeface="Microsoft YaHei" panose="020B0503020204020204" pitchFamily="34" charset="-122"/>
+                          <a:cs typeface="Arial Unicode MS" pitchFamily="34" charset="-120"/>
+                        </a:rPr>
+                        <a:t>3</a:t>
+                      </a:r>
+                    </a:p>
+                  </a:txBody>
+                  <a:tcPr marL="36000" marR="36000" marT="18000" marB="18000" anchor="ctr" horzOverflow="overflow">
+                    <a:solidFill>
+                      <a:schemeClr val="bg1"/>
+                    </a:solidFill>
+                  </a:tcPr>
+                </a:tc>
+                <a:tc>
+                  <a:txBody>
+                    <a:bodyPr/>
+                    <a:lstStyle/>
+                    <a:p>
+                      <a:pPr marL="0" marR="0" lvl="0" indent="0" algn="ctr" defTabSz="914400" rtl="0" eaLnBrk="1" fontAlgn="base" latinLnBrk="0" hangingPunct="1">
+                        <a:lnSpc>
+                          <a:spcPct val="100000"/>
+                        </a:lnSpc>
+                        <a:spcBef>
+                          <a:spcPct val="20000"/>
+                        </a:spcBef>
+                        <a:spcAft>
+                          <a:spcPct val="0"/>
+                        </a:spcAft>
+                        <a:buClrTx/>
+                        <a:buSzTx/>
+                        <a:buFontTx/>
+                        <a:buNone/>
+                        <a:tabLst/>
+                      </a:pPr>
+                      <a:r>
+                        <a:rPr kumimoji="1" lang="en-US" altLang="zh-TW" sz="1700" b="1" i="0" u="none" strike="noStrike" cap="none" normalizeH="0" baseline="0" dirty="0">
+                          <a:ln>
+                            <a:noFill/>
+                          </a:ln>
+                          <a:solidFill>
+                            <a:schemeClr val="tx1"/>
+                          </a:solidFill>
+                          <a:effectLst/>
+                          <a:latin typeface="Microsoft YaHei" panose="020B0503020204020204" pitchFamily="34" charset="-122"/>
+                          <a:ea typeface="Microsoft YaHei" panose="020B0503020204020204" pitchFamily="34" charset="-122"/>
+                          <a:cs typeface="Arial Unicode MS" pitchFamily="34" charset="-120"/>
+                        </a:rPr>
+                        <a:t>3</a:t>
+                      </a:r>
+                    </a:p>
+                  </a:txBody>
+                  <a:tcPr marL="36000" marR="36000" marT="18000" marB="18000" anchor="ctr" horzOverflow="overflow">
+                    <a:solidFill>
+                      <a:schemeClr val="bg1"/>
+                    </a:solidFill>
+                  </a:tcPr>
+                </a:tc>
+                <a:tc>
+                  <a:txBody>
+                    <a:bodyPr/>
+                    <a:lstStyle/>
+                    <a:p>
+                      <a:pPr marL="0" marR="0" lvl="0" indent="0" algn="ctr" defTabSz="914400" rtl="0" eaLnBrk="1" fontAlgn="base" latinLnBrk="0" hangingPunct="1">
+                        <a:lnSpc>
+                          <a:spcPct val="100000"/>
+                        </a:lnSpc>
+                        <a:spcBef>
+                          <a:spcPct val="20000"/>
+                        </a:spcBef>
+                        <a:spcAft>
+                          <a:spcPct val="0"/>
+                        </a:spcAft>
+                        <a:buClrTx/>
+                        <a:buSzTx/>
+                        <a:buFontTx/>
+                        <a:buNone/>
+                        <a:tabLst/>
+                      </a:pPr>
+                      <a:r>
+                        <a:rPr kumimoji="1" lang="en-US" altLang="zh-TW" sz="1700" b="1" i="0" u="none" strike="noStrike" cap="none" normalizeH="0" baseline="0" dirty="0">
+                          <a:ln>
+                            <a:noFill/>
+                          </a:ln>
+                          <a:solidFill>
+                            <a:schemeClr val="tx1"/>
+                          </a:solidFill>
+                          <a:effectLst/>
+                          <a:latin typeface="Microsoft YaHei" panose="020B0503020204020204" pitchFamily="34" charset="-122"/>
+                          <a:ea typeface="Microsoft YaHei" panose="020B0503020204020204" pitchFamily="34" charset="-122"/>
+                          <a:cs typeface="Arial Unicode MS" pitchFamily="34" charset="-120"/>
+                        </a:rPr>
+                        <a:t>5</a:t>
+                      </a:r>
+                    </a:p>
+                  </a:txBody>
+                  <a:tcPr marL="36000" marR="36000" marT="18000" marB="18000" anchor="ctr" horzOverflow="overflow">
+                    <a:solidFill>
+                      <a:schemeClr val="bg1"/>
+                    </a:solidFill>
+                  </a:tcPr>
+                </a:tc>
+                <a:tc>
+                  <a:txBody>
+                    <a:bodyPr/>
+                    <a:lstStyle/>
+                    <a:p>
+                      <a:pPr marL="0" marR="0" lvl="0" indent="0" algn="ctr" defTabSz="914400" rtl="0" eaLnBrk="1" fontAlgn="base" latinLnBrk="0" hangingPunct="1">
+                        <a:lnSpc>
+                          <a:spcPct val="100000"/>
+                        </a:lnSpc>
+                        <a:spcBef>
+                          <a:spcPct val="20000"/>
+                        </a:spcBef>
+                        <a:spcAft>
+                          <a:spcPct val="0"/>
+                        </a:spcAft>
+                        <a:buClrTx/>
+                        <a:buSzTx/>
+                        <a:buFontTx/>
+                        <a:buNone/>
+                        <a:tabLst/>
+                      </a:pPr>
+                      <a:r>
+                        <a:rPr kumimoji="1" lang="en-US" altLang="zh-TW" sz="1700" b="1" i="0" u="none" strike="noStrike" cap="none" normalizeH="0" baseline="0" dirty="0">
+                          <a:ln>
+                            <a:noFill/>
+                          </a:ln>
+                          <a:solidFill>
+                            <a:schemeClr val="tx1"/>
+                          </a:solidFill>
+                          <a:effectLst/>
+                          <a:latin typeface="Microsoft YaHei" panose="020B0503020204020204" pitchFamily="34" charset="-122"/>
+                          <a:ea typeface="Microsoft YaHei" panose="020B0503020204020204" pitchFamily="34" charset="-122"/>
+                          <a:cs typeface="Arial Unicode MS" pitchFamily="34" charset="-120"/>
+                        </a:rPr>
+                        <a:t>3</a:t>
+                      </a:r>
+                    </a:p>
+                  </a:txBody>
+                  <a:tcPr marL="36000" marR="36000" marT="18000" marB="18000" anchor="ctr" horzOverflow="overflow">
+                    <a:solidFill>
+                      <a:schemeClr val="bg1"/>
+                    </a:solidFill>
+                  </a:tcPr>
+                </a:tc>
+                <a:extLst>
+                  <a:ext uri="{0D108BD9-81ED-4DB2-BD59-A6C34878D82A}">
+                    <a16:rowId xmlns:a16="http://schemas.microsoft.com/office/drawing/2014/main" val="1257243216"/>
+                  </a:ext>
+                </a:extLst>
+              </a:tr>
+              <a:tr h="328740">
+                <a:tc vMerge="1">
+                  <a:txBody>
+                    <a:bodyPr/>
+                    <a:lstStyle/>
+                    <a:p>
+                      <a:endParaRPr lang="zh-TW" altLang="en-US"/>
+                    </a:p>
+                  </a:txBody>
+                  <a:tcPr/>
+                </a:tc>
+                <a:tc vMerge="1">
                   <a:txBody>
                     <a:bodyPr/>
                     <a:lstStyle/>
@@ -11171,6 +12705,31 @@
                     <a:bodyPr/>
                     <a:lstStyle/>
                     <a:p>
+                      <a:r>
+                        <a:rPr kumimoji="1" lang="zh-TW" altLang="en-US" sz="1700" b="1" i="0" u="none" strike="noStrike" kern="1200" cap="none" normalizeH="0" baseline="0">
+                          <a:ln>
+                            <a:noFill/>
+                          </a:ln>
+                          <a:solidFill>
+                            <a:schemeClr val="tx1"/>
+                          </a:solidFill>
+                          <a:effectLst/>
+                          <a:latin typeface="Microsoft YaHei" panose="020B0503020204020204" pitchFamily="34" charset="-122"/>
+                          <a:ea typeface="Microsoft YaHei" panose="020B0503020204020204" pitchFamily="34" charset="-122"/>
+                          <a:cs typeface="+mn-cs"/>
+                        </a:rPr>
+                        <a:t>移工</a:t>
+                      </a:r>
+                      <a:endParaRPr lang="zh-TW" altLang="en-US"/>
+                    </a:p>
+                  </a:txBody>
+                  <a:tcPr marL="36000" marR="36000" marT="18000" marB="18000" anchor="ctr" horzOverflow="overflow"/>
+                </a:tc>
+                <a:tc>
+                  <a:txBody>
+                    <a:bodyPr/>
+                    <a:lstStyle/>
+                    <a:p>
                       <a:pPr marL="0" marR="0" lvl="0" indent="0" algn="ctr" defTabSz="914400" rtl="0" eaLnBrk="1" fontAlgn="base" latinLnBrk="0" hangingPunct="1">
                         <a:lnSpc>
                           <a:spcPct val="100000"/>
@@ -11200,18 +12759,11 @@
                           <a:ea typeface="Microsoft YaHei" panose="020B0503020204020204" pitchFamily="34" charset="-122"/>
                           <a:cs typeface="Arial Unicode MS" pitchFamily="34" charset="-120"/>
                         </a:rPr>
-                        <a:t>2</a:t>
-                      </a:r>
-                    </a:p>
-                  </a:txBody>
-                  <a:tcPr marL="36000" marR="36000" marT="18000" marB="18000" anchor="ctr" horzOverflow="overflow">
-                    <a:solidFill>
-                      <a:schemeClr val="accent6">
-                        <a:lumMod val="20000"/>
-                        <a:lumOff val="80000"/>
-                      </a:schemeClr>
-                    </a:solidFill>
-                  </a:tcPr>
+                        <a:t>0</a:t>
+                      </a:r>
+                    </a:p>
+                  </a:txBody>
+                  <a:tcPr marL="36000" marR="36000" marT="18000" marB="18000" anchor="ctr" horzOverflow="overflow"/>
                 </a:tc>
                 <a:tc>
                   <a:txBody>
@@ -11247,18 +12799,11 @@
                           <a:ea typeface="Microsoft YaHei" panose="020B0503020204020204" pitchFamily="34" charset="-122"/>
                           <a:cs typeface="Arial Unicode MS" pitchFamily="34" charset="-120"/>
                         </a:rPr>
-                        <a:t>1</a:t>
-                      </a:r>
-                    </a:p>
-                  </a:txBody>
-                  <a:tcPr marL="36000" marR="36000" marT="18000" marB="18000" anchor="ctr" horzOverflow="overflow">
-                    <a:solidFill>
-                      <a:schemeClr val="accent6">
-                        <a:lumMod val="20000"/>
-                        <a:lumOff val="80000"/>
-                      </a:schemeClr>
-                    </a:solidFill>
-                  </a:tcPr>
+                        <a:t>0</a:t>
+                      </a:r>
+                    </a:p>
+                  </a:txBody>
+                  <a:tcPr marL="36000" marR="36000" marT="18000" marB="18000" anchor="ctr" horzOverflow="overflow"/>
                 </a:tc>
                 <a:tc>
                   <a:txBody>
@@ -11294,18 +12839,11 @@
                           <a:ea typeface="Microsoft YaHei" panose="020B0503020204020204" pitchFamily="34" charset="-122"/>
                           <a:cs typeface="Arial Unicode MS" pitchFamily="34" charset="-120"/>
                         </a:rPr>
-                        <a:t>2</a:t>
-                      </a:r>
-                    </a:p>
-                  </a:txBody>
-                  <a:tcPr marL="36000" marR="36000" marT="18000" marB="18000" anchor="ctr" horzOverflow="overflow">
-                    <a:solidFill>
-                      <a:schemeClr val="accent6">
-                        <a:lumMod val="20000"/>
-                        <a:lumOff val="80000"/>
-                      </a:schemeClr>
-                    </a:solidFill>
-                  </a:tcPr>
+                        <a:t>0</a:t>
+                      </a:r>
+                    </a:p>
+                  </a:txBody>
+                  <a:tcPr marL="36000" marR="36000" marT="18000" marB="18000" anchor="ctr" horzOverflow="overflow"/>
                 </a:tc>
                 <a:tc>
                   <a:txBody>
@@ -11341,16 +12879,13 @@
                           <a:ea typeface="Microsoft YaHei" panose="020B0503020204020204" pitchFamily="34" charset="-122"/>
                           <a:cs typeface="Arial Unicode MS" pitchFamily="34" charset="-120"/>
                         </a:rPr>
-                        <a:t>3</a:t>
+                        <a:t>1</a:t>
                       </a:r>
                     </a:p>
                   </a:txBody>
                   <a:tcPr marL="36000" marR="36000" marT="18000" marB="18000" anchor="ctr" horzOverflow="overflow">
                     <a:solidFill>
-                      <a:schemeClr val="accent6">
-                        <a:lumMod val="20000"/>
-                        <a:lumOff val="80000"/>
-                      </a:schemeClr>
+                      <a:schemeClr val="bg1"/>
                     </a:solidFill>
                   </a:tcPr>
                 </a:tc>
@@ -11388,16 +12923,13 @@
                           <a:ea typeface="Microsoft YaHei" panose="020B0503020204020204" pitchFamily="34" charset="-122"/>
                           <a:cs typeface="Arial Unicode MS" pitchFamily="34" charset="-120"/>
                         </a:rPr>
-                        <a:t>2</a:t>
+                        <a:t>1</a:t>
                       </a:r>
                     </a:p>
                   </a:txBody>
                   <a:tcPr marL="36000" marR="36000" marT="18000" marB="18000" anchor="ctr" horzOverflow="overflow">
                     <a:solidFill>
-                      <a:schemeClr val="accent6">
-                        <a:lumMod val="20000"/>
-                        <a:lumOff val="80000"/>
-                      </a:schemeClr>
+                      <a:schemeClr val="bg1"/>
                     </a:solidFill>
                   </a:tcPr>
                 </a:tc>
@@ -11435,47 +12967,27 @@
                           <a:ea typeface="Microsoft YaHei" panose="020B0503020204020204" pitchFamily="34" charset="-122"/>
                           <a:cs typeface="Arial Unicode MS" pitchFamily="34" charset="-120"/>
                         </a:rPr>
-                        <a:t>1</a:t>
+                        <a:t>0</a:t>
                       </a:r>
                     </a:p>
                   </a:txBody>
                   <a:tcPr marL="36000" marR="36000" marT="18000" marB="18000" anchor="ctr" horzOverflow="overflow">
                     <a:solidFill>
-                      <a:schemeClr val="accent6">
-                        <a:lumMod val="20000"/>
-                        <a:lumOff val="80000"/>
-                      </a:schemeClr>
+                      <a:schemeClr val="bg1"/>
                     </a:solidFill>
                   </a:tcPr>
                 </a:tc>
-                <a:extLst>
-                  <a:ext uri="{0D108BD9-81ED-4DB2-BD59-A6C34878D82A}">
-                    <a16:rowId xmlns:a16="http://schemas.microsoft.com/office/drawing/2014/main" val="3812269708"/>
-                  </a:ext>
-                </a:extLst>
-              </a:tr>
-              <a:tr h="328740">
-                <a:tc vMerge="1">
-                  <a:txBody>
-                    <a:bodyPr/>
-                    <a:lstStyle/>
-                    <a:p>
-                      <a:endParaRPr lang="zh-TW" altLang="en-US"/>
-                    </a:p>
-                  </a:txBody>
-                  <a:tcPr/>
-                </a:tc>
-                <a:tc rowSpan="3">
+                <a:tc>
                   <a:txBody>
                     <a:bodyPr/>
                     <a:lstStyle/>
                     <a:p>
                       <a:pPr marL="0" marR="0" lvl="0" indent="0" algn="ctr" defTabSz="914400" rtl="0" eaLnBrk="1" fontAlgn="base" latinLnBrk="0" hangingPunct="1">
                         <a:lnSpc>
-                          <a:spcPct val="80000"/>
+                          <a:spcPct val="100000"/>
                         </a:lnSpc>
                         <a:spcBef>
-                          <a:spcPct val="0"/>
+                          <a:spcPct val="20000"/>
                         </a:spcBef>
                         <a:spcAft>
                           <a:spcPct val="0"/>
@@ -11487,99 +12999,6 @@
                         <a:tabLst/>
                       </a:pPr>
                       <a:r>
-                        <a:rPr kumimoji="1" lang="zh-TW" altLang="en-US" sz="1700" b="1" i="0" u="none" strike="noStrike" cap="none" normalizeH="0" baseline="0" dirty="0">
-                          <a:ln>
-                            <a:noFill/>
-                          </a:ln>
-                          <a:solidFill>
-                            <a:schemeClr val="tx1"/>
-                          </a:solidFill>
-                          <a:effectLst/>
-                          <a:latin typeface="Microsoft YaHei" panose="020B0503020204020204" pitchFamily="34" charset="-122"/>
-                          <a:ea typeface="Microsoft YaHei" panose="020B0503020204020204" pitchFamily="34" charset="-122"/>
-                        </a:rPr>
-                        <a:t>品管</a:t>
-                      </a:r>
-                      <a:endParaRPr kumimoji="1" lang="en-US" altLang="zh-TW" sz="1700" b="1" i="0" u="none" strike="noStrike" cap="none" normalizeH="0" baseline="0" dirty="0">
-                        <a:ln>
-                          <a:noFill/>
-                        </a:ln>
-                        <a:solidFill>
-                          <a:schemeClr val="tx1"/>
-                        </a:solidFill>
-                        <a:effectLst/>
-                        <a:latin typeface="Microsoft YaHei" panose="020B0503020204020204" pitchFamily="34" charset="-122"/>
-                        <a:ea typeface="Microsoft YaHei" panose="020B0503020204020204" pitchFamily="34" charset="-122"/>
-                      </a:endParaRPr>
-                    </a:p>
-                  </a:txBody>
-                  <a:tcPr marL="36000" marR="36000" marT="18000" marB="18000" anchor="ctr" horzOverflow="overflow">
-                    <a:solidFill>
-                      <a:schemeClr val="accent2">
-                        <a:lumMod val="20000"/>
-                        <a:lumOff val="80000"/>
-                      </a:schemeClr>
-                    </a:solidFill>
-                  </a:tcPr>
-                </a:tc>
-                <a:tc>
-                  <a:txBody>
-                    <a:bodyPr/>
-                    <a:lstStyle/>
-                    <a:p>
-                      <a:r>
-                        <a:rPr kumimoji="1" lang="zh-TW" altLang="en-US" sz="1700" b="1" i="0" u="none" strike="noStrike" kern="1200" cap="none" normalizeH="0" baseline="0">
-                          <a:ln>
-                            <a:noFill/>
-                          </a:ln>
-                          <a:solidFill>
-                            <a:schemeClr val="tx1"/>
-                          </a:solidFill>
-                          <a:effectLst/>
-                          <a:latin typeface="Microsoft YaHei" panose="020B0503020204020204" pitchFamily="34" charset="-122"/>
-                          <a:ea typeface="Microsoft YaHei" panose="020B0503020204020204" pitchFamily="34" charset="-122"/>
-                          <a:cs typeface="+mn-cs"/>
-                        </a:rPr>
-                        <a:t>品管</a:t>
-                      </a:r>
-                      <a:endParaRPr kumimoji="1" lang="zh-TW" altLang="en-US" sz="1700" b="1" i="0" u="none" strike="noStrike" kern="1200" cap="none" normalizeH="0" baseline="0" dirty="0">
-                        <a:ln>
-                          <a:noFill/>
-                        </a:ln>
-                        <a:solidFill>
-                          <a:schemeClr val="tx1"/>
-                        </a:solidFill>
-                        <a:effectLst/>
-                        <a:latin typeface="Microsoft YaHei" panose="020B0503020204020204" pitchFamily="34" charset="-122"/>
-                        <a:ea typeface="Microsoft YaHei" panose="020B0503020204020204" pitchFamily="34" charset="-122"/>
-                        <a:cs typeface="+mn-cs"/>
-                      </a:endParaRPr>
-                    </a:p>
-                  </a:txBody>
-                  <a:tcPr marL="36000" marR="36000" marT="18000" marB="18000" anchor="ctr" horzOverflow="overflow"/>
-                </a:tc>
-                <a:tc>
-                  <a:txBody>
-                    <a:bodyPr/>
-                    <a:lstStyle/>
-                    <a:p>
-                      <a:pPr marL="0" marR="0" lvl="0" indent="0" algn="ctr" defTabSz="914400" rtl="0" eaLnBrk="1" fontAlgn="base" latinLnBrk="0" hangingPunct="1">
-                        <a:lnSpc>
-                          <a:spcPct val="100000"/>
-                        </a:lnSpc>
-                        <a:spcBef>
-                          <a:spcPct val="20000"/>
-                        </a:spcBef>
-                        <a:spcAft>
-                          <a:spcPct val="0"/>
-                        </a:spcAft>
-                        <a:buClrTx/>
-                        <a:buSzTx/>
-                        <a:buFontTx/>
-                        <a:buNone/>
-                        <a:tabLst/>
-                      </a:pPr>
-                      <a:r>
                         <a:rPr kumimoji="1" lang="en-US" altLang="zh-TW" sz="1700" b="1" i="0" u="none" strike="noStrike" cap="none" normalizeH="0" baseline="0" dirty="0">
                           <a:ln>
                             <a:noFill/>
@@ -11592,127 +13011,7 @@
                           <a:ea typeface="Microsoft YaHei" panose="020B0503020204020204" pitchFamily="34" charset="-122"/>
                           <a:cs typeface="Arial Unicode MS" pitchFamily="34" charset="-120"/>
                         </a:rPr>
-                        <a:t>2</a:t>
-                      </a:r>
-                    </a:p>
-                  </a:txBody>
-                  <a:tcPr marL="36000" marR="36000" marT="18000" marB="18000" anchor="ctr" horzOverflow="overflow"/>
-                </a:tc>
-                <a:tc>
-                  <a:txBody>
-                    <a:bodyPr/>
-                    <a:lstStyle/>
-                    <a:p>
-                      <a:pPr marL="0" marR="0" lvl="0" indent="0" algn="ctr" defTabSz="914400" rtl="0" eaLnBrk="1" fontAlgn="base" latinLnBrk="0" hangingPunct="1">
-                        <a:lnSpc>
-                          <a:spcPct val="100000"/>
-                        </a:lnSpc>
-                        <a:spcBef>
-                          <a:spcPct val="20000"/>
-                        </a:spcBef>
-                        <a:spcAft>
-                          <a:spcPct val="0"/>
-                        </a:spcAft>
-                        <a:buClrTx/>
-                        <a:buSzTx/>
-                        <a:buFontTx/>
-                        <a:buNone/>
-                        <a:tabLst/>
-                      </a:pPr>
-                      <a:r>
-                        <a:rPr kumimoji="1" lang="en-US" altLang="zh-TW" sz="1700" b="1" i="0" u="none" strike="noStrike" cap="none" normalizeH="0" baseline="0" dirty="0">
-                          <a:ln>
-                            <a:noFill/>
-                          </a:ln>
-                          <a:solidFill>
-                            <a:schemeClr val="tx1"/>
-                          </a:solidFill>
-                          <a:effectLst/>
-                          <a:latin typeface="Microsoft YaHei" panose="020B0503020204020204" pitchFamily="34" charset="-122"/>
-                          <a:ea typeface="Microsoft YaHei" panose="020B0503020204020204" pitchFamily="34" charset="-122"/>
-                          <a:cs typeface="Arial Unicode MS" pitchFamily="34" charset="-120"/>
-                        </a:rPr>
-                        <a:t>2</a:t>
-                      </a:r>
-                    </a:p>
-                  </a:txBody>
-                  <a:tcPr marL="36000" marR="36000" marT="18000" marB="18000" anchor="ctr" horzOverflow="overflow"/>
-                </a:tc>
-                <a:tc>
-                  <a:txBody>
-                    <a:bodyPr/>
-                    <a:lstStyle/>
-                    <a:p>
-                      <a:pPr marL="0" marR="0" lvl="0" indent="0" algn="ctr" defTabSz="914400" rtl="0" eaLnBrk="1" fontAlgn="base" latinLnBrk="0" hangingPunct="1">
-                        <a:lnSpc>
-                          <a:spcPct val="100000"/>
-                        </a:lnSpc>
-                        <a:spcBef>
-                          <a:spcPct val="20000"/>
-                        </a:spcBef>
-                        <a:spcAft>
-                          <a:spcPct val="0"/>
-                        </a:spcAft>
-                        <a:buClrTx/>
-                        <a:buSzTx/>
-                        <a:buFontTx/>
-                        <a:buNone/>
-                        <a:tabLst/>
-                      </a:pPr>
-                      <a:r>
-                        <a:rPr kumimoji="1" lang="en-US" altLang="zh-TW" sz="1700" b="1" i="0" u="none" strike="noStrike" cap="none" normalizeH="0" baseline="0" dirty="0">
-                          <a:ln>
-                            <a:noFill/>
-                          </a:ln>
-                          <a:solidFill>
-                            <a:schemeClr val="tx1"/>
-                          </a:solidFill>
-                          <a:effectLst/>
-                          <a:latin typeface="Microsoft YaHei" panose="020B0503020204020204" pitchFamily="34" charset="-122"/>
-                          <a:ea typeface="Microsoft YaHei" panose="020B0503020204020204" pitchFamily="34" charset="-122"/>
-                          <a:cs typeface="Arial Unicode MS" pitchFamily="34" charset="-120"/>
-                        </a:rPr>
-                        <a:t>3</a:t>
-                      </a:r>
-                    </a:p>
-                  </a:txBody>
-                  <a:tcPr marL="36000" marR="36000" marT="18000" marB="18000" anchor="ctr" horzOverflow="overflow"/>
-                </a:tc>
-                <a:tc>
-                  <a:txBody>
-                    <a:bodyPr/>
-                    <a:lstStyle/>
-                    <a:p>
-                      <a:pPr marL="0" marR="0" lvl="0" indent="0" algn="ctr" defTabSz="914400" rtl="0" eaLnBrk="1" fontAlgn="base" latinLnBrk="0" hangingPunct="1">
-                        <a:lnSpc>
-                          <a:spcPct val="100000"/>
-                        </a:lnSpc>
-                        <a:spcBef>
-                          <a:spcPct val="20000"/>
-                        </a:spcBef>
-                        <a:spcAft>
-                          <a:spcPct val="0"/>
-                        </a:spcAft>
-                        <a:buClrTx/>
-                        <a:buSzTx/>
-                        <a:buFontTx/>
-                        <a:buNone/>
-                        <a:tabLst/>
-                      </a:pPr>
-                      <a:r>
-                        <a:rPr kumimoji="1" lang="en-US" altLang="zh-TW" sz="1700" b="1" i="0" u="none" strike="noStrike" cap="none" normalizeH="0" baseline="0" dirty="0">
-                          <a:ln>
-                            <a:noFill/>
-                          </a:ln>
-                          <a:solidFill>
-                            <a:schemeClr val="tx1"/>
-                          </a:solidFill>
-                          <a:effectLst/>
-                          <a:latin typeface="Microsoft YaHei" panose="020B0503020204020204" pitchFamily="34" charset="-122"/>
-                          <a:ea typeface="Microsoft YaHei" panose="020B0503020204020204" pitchFamily="34" charset="-122"/>
-                          <a:cs typeface="Arial Unicode MS" pitchFamily="34" charset="-120"/>
-                        </a:rPr>
-                        <a:t>3</a:t>
+                        <a:t>0</a:t>
                       </a:r>
                     </a:p>
                   </a:txBody>
@@ -11722,97 +13021,9 @@
                     </a:solidFill>
                   </a:tcPr>
                 </a:tc>
-                <a:tc>
-                  <a:txBody>
-                    <a:bodyPr/>
-                    <a:lstStyle/>
-                    <a:p>
-                      <a:pPr marL="0" marR="0" lvl="0" indent="0" algn="ctr" defTabSz="914400" rtl="0" eaLnBrk="1" fontAlgn="base" latinLnBrk="0" hangingPunct="1">
-                        <a:lnSpc>
-                          <a:spcPct val="100000"/>
-                        </a:lnSpc>
-                        <a:spcBef>
-                          <a:spcPct val="20000"/>
-                        </a:spcBef>
-                        <a:spcAft>
-                          <a:spcPct val="0"/>
-                        </a:spcAft>
-                        <a:buClrTx/>
-                        <a:buSzTx/>
-                        <a:buFontTx/>
-                        <a:buNone/>
-                        <a:tabLst/>
-                      </a:pPr>
-                      <a:r>
-                        <a:rPr kumimoji="1" lang="en-US" altLang="zh-TW" sz="1700" b="1" i="0" u="none" strike="noStrike" cap="none" normalizeH="0" baseline="0" dirty="0">
-                          <a:ln>
-                            <a:noFill/>
-                          </a:ln>
-                          <a:solidFill>
-                            <a:schemeClr val="tx1"/>
-                          </a:solidFill>
-                          <a:effectLst/>
-                          <a:latin typeface="Microsoft YaHei" panose="020B0503020204020204" pitchFamily="34" charset="-122"/>
-                          <a:ea typeface="Microsoft YaHei" panose="020B0503020204020204" pitchFamily="34" charset="-122"/>
-                          <a:cs typeface="Arial Unicode MS" pitchFamily="34" charset="-120"/>
-                        </a:rPr>
-                        <a:t>3</a:t>
-                      </a:r>
-                    </a:p>
-                  </a:txBody>
-                  <a:tcPr marL="36000" marR="36000" marT="18000" marB="18000" anchor="ctr" horzOverflow="overflow">
-                    <a:solidFill>
-                      <a:schemeClr val="bg1"/>
-                    </a:solidFill>
-                  </a:tcPr>
-                </a:tc>
-                <a:tc>
-                  <a:txBody>
-                    <a:bodyPr/>
-                    <a:lstStyle/>
-                    <a:p>
-                      <a:pPr marL="0" marR="0" lvl="0" indent="0" algn="ctr" defTabSz="914400" rtl="0" eaLnBrk="1" fontAlgn="base" latinLnBrk="0" hangingPunct="1">
-                        <a:lnSpc>
-                          <a:spcPct val="100000"/>
-                        </a:lnSpc>
-                        <a:spcBef>
-                          <a:spcPct val="20000"/>
-                        </a:spcBef>
-                        <a:spcAft>
-                          <a:spcPct val="0"/>
-                        </a:spcAft>
-                        <a:buClrTx/>
-                        <a:buSzTx/>
-                        <a:buFontTx/>
-                        <a:buNone/>
-                        <a:tabLst/>
-                      </a:pPr>
-                      <a:r>
-                        <a:rPr kumimoji="1" lang="en-US" altLang="zh-TW" sz="1700" b="1" i="0" u="none" strike="noStrike" cap="none" normalizeH="0" baseline="0" dirty="0">
-                          <a:ln>
-                            <a:noFill/>
-                          </a:ln>
-                          <a:solidFill>
-                            <a:schemeClr val="tx1"/>
-                          </a:solidFill>
-                          <a:effectLst/>
-                          <a:latin typeface="Microsoft YaHei" panose="020B0503020204020204" pitchFamily="34" charset="-122"/>
-                          <a:ea typeface="Microsoft YaHei" panose="020B0503020204020204" pitchFamily="34" charset="-122"/>
-                          <a:cs typeface="Arial Unicode MS" pitchFamily="34" charset="-120"/>
-                        </a:rPr>
-                        <a:t>5</a:t>
-                      </a:r>
-                    </a:p>
-                  </a:txBody>
-                  <a:tcPr marL="36000" marR="36000" marT="18000" marB="18000" anchor="ctr" horzOverflow="overflow">
-                    <a:solidFill>
-                      <a:schemeClr val="bg1"/>
-                    </a:solidFill>
-                  </a:tcPr>
-                </a:tc>
                 <a:extLst>
                   <a:ext uri="{0D108BD9-81ED-4DB2-BD59-A6C34878D82A}">
-                    <a16:rowId xmlns:a16="http://schemas.microsoft.com/office/drawing/2014/main" val="1257243216"/>
+                    <a16:rowId xmlns:a16="http://schemas.microsoft.com/office/drawing/2014/main" val="2330245644"/>
                   </a:ext>
                 </a:extLst>
               </a:tr>
@@ -11869,7 +13080,7 @@
                     <a:lstStyle/>
                     <a:p>
                       <a:r>
-                        <a:rPr kumimoji="1" lang="zh-TW" altLang="en-US" sz="1700" b="1" i="0" u="none" strike="noStrike" kern="1200" cap="none" normalizeH="0" baseline="0">
+                        <a:rPr kumimoji="1" lang="zh-TW" altLang="en-US" sz="1700" b="1" i="0" u="none" strike="noStrike" kern="1200" cap="none" normalizeH="0" baseline="0" dirty="0">
                           <a:ln>
                             <a:noFill/>
                           </a:ln>
@@ -11881,23 +13092,19 @@
                           <a:ea typeface="Microsoft YaHei" panose="020B0503020204020204" pitchFamily="34" charset="-122"/>
                           <a:cs typeface="+mn-cs"/>
                         </a:rPr>
-                        <a:t>移工</a:t>
-                      </a:r>
-                      <a:endParaRPr kumimoji="1" lang="zh-TW" altLang="en-US" sz="1700" b="1" i="0" u="none" strike="noStrike" kern="1200" cap="none" normalizeH="0" baseline="0" dirty="0">
-                        <a:ln>
-                          <a:noFill/>
-                        </a:ln>
-                        <a:solidFill>
-                          <a:schemeClr val="tx1"/>
-                        </a:solidFill>
-                        <a:effectLst/>
-                        <a:latin typeface="Microsoft YaHei" panose="020B0503020204020204" pitchFamily="34" charset="-122"/>
-                        <a:ea typeface="Microsoft YaHei" panose="020B0503020204020204" pitchFamily="34" charset="-122"/>
-                        <a:cs typeface="+mn-cs"/>
-                      </a:endParaRPr>
-                    </a:p>
-                  </a:txBody>
-                  <a:tcPr marL="36000" marR="36000" marT="18000" marB="18000" anchor="ctr" horzOverflow="overflow"/>
+                        <a:t>小計</a:t>
+                      </a:r>
+                      <a:endParaRPr lang="zh-TW" altLang="en-US" dirty="0"/>
+                    </a:p>
+                  </a:txBody>
+                  <a:tcPr marL="36000" marR="36000" marT="18000" marB="18000" anchor="ctr" horzOverflow="overflow">
+                    <a:solidFill>
+                      <a:schemeClr val="accent2">
+                        <a:lumMod val="20000"/>
+                        <a:lumOff val="80000"/>
+                      </a:schemeClr>
+                    </a:solidFill>
+                  </a:tcPr>
                 </a:tc>
                 <a:tc>
                   <a:txBody>
@@ -11933,11 +13140,18 @@
                           <a:ea typeface="Microsoft YaHei" panose="020B0503020204020204" pitchFamily="34" charset="-122"/>
                           <a:cs typeface="Arial Unicode MS" pitchFamily="34" charset="-120"/>
                         </a:rPr>
-                        <a:t>0</a:t>
-                      </a:r>
-                    </a:p>
-                  </a:txBody>
-                  <a:tcPr marL="36000" marR="36000" marT="18000" marB="18000" anchor="ctr" horzOverflow="overflow"/>
+                        <a:t>2</a:t>
+                      </a:r>
+                    </a:p>
+                  </a:txBody>
+                  <a:tcPr marL="36000" marR="36000" marT="18000" marB="18000" anchor="ctr" horzOverflow="overflow">
+                    <a:solidFill>
+                      <a:schemeClr val="accent2">
+                        <a:lumMod val="20000"/>
+                        <a:lumOff val="80000"/>
+                      </a:schemeClr>
+                    </a:solidFill>
+                  </a:tcPr>
                 </a:tc>
                 <a:tc>
                   <a:txBody>
@@ -11973,11 +13187,18 @@
                           <a:ea typeface="Microsoft YaHei" panose="020B0503020204020204" pitchFamily="34" charset="-122"/>
                           <a:cs typeface="Arial Unicode MS" pitchFamily="34" charset="-120"/>
                         </a:rPr>
-                        <a:t>0</a:t>
-                      </a:r>
-                    </a:p>
-                  </a:txBody>
-                  <a:tcPr marL="36000" marR="36000" marT="18000" marB="18000" anchor="ctr" horzOverflow="overflow"/>
+                        <a:t>2</a:t>
+                      </a:r>
+                    </a:p>
+                  </a:txBody>
+                  <a:tcPr marL="36000" marR="36000" marT="18000" marB="18000" anchor="ctr" horzOverflow="overflow">
+                    <a:solidFill>
+                      <a:schemeClr val="accent2">
+                        <a:lumMod val="20000"/>
+                        <a:lumOff val="80000"/>
+                      </a:schemeClr>
+                    </a:solidFill>
+                  </a:tcPr>
                 </a:tc>
                 <a:tc>
                   <a:txBody>
@@ -12013,11 +13234,18 @@
                           <a:ea typeface="Microsoft YaHei" panose="020B0503020204020204" pitchFamily="34" charset="-122"/>
                           <a:cs typeface="Arial Unicode MS" pitchFamily="34" charset="-120"/>
                         </a:rPr>
-                        <a:t>0</a:t>
-                      </a:r>
-                    </a:p>
-                  </a:txBody>
-                  <a:tcPr marL="36000" marR="36000" marT="18000" marB="18000" anchor="ctr" horzOverflow="overflow"/>
+                        <a:t>3</a:t>
+                      </a:r>
+                    </a:p>
+                  </a:txBody>
+                  <a:tcPr marL="36000" marR="36000" marT="18000" marB="18000" anchor="ctr" horzOverflow="overflow">
+                    <a:solidFill>
+                      <a:schemeClr val="accent2">
+                        <a:lumMod val="20000"/>
+                        <a:lumOff val="80000"/>
+                      </a:schemeClr>
+                    </a:solidFill>
+                  </a:tcPr>
                 </a:tc>
                 <a:tc>
                   <a:txBody>
@@ -12053,13 +13281,16 @@
                           <a:ea typeface="Microsoft YaHei" panose="020B0503020204020204" pitchFamily="34" charset="-122"/>
                           <a:cs typeface="Arial Unicode MS" pitchFamily="34" charset="-120"/>
                         </a:rPr>
-                        <a:t>1</a:t>
+                        <a:t>4</a:t>
                       </a:r>
                     </a:p>
                   </a:txBody>
                   <a:tcPr marL="36000" marR="36000" marT="18000" marB="18000" anchor="ctr" horzOverflow="overflow">
                     <a:solidFill>
-                      <a:schemeClr val="bg1"/>
+                      <a:schemeClr val="accent2">
+                        <a:lumMod val="20000"/>
+                        <a:lumOff val="80000"/>
+                      </a:schemeClr>
                     </a:solidFill>
                   </a:tcPr>
                 </a:tc>
@@ -12097,13 +13328,16 @@
                           <a:ea typeface="Microsoft YaHei" panose="020B0503020204020204" pitchFamily="34" charset="-122"/>
                           <a:cs typeface="Arial Unicode MS" pitchFamily="34" charset="-120"/>
                         </a:rPr>
-                        <a:t>1</a:t>
+                        <a:t>4</a:t>
                       </a:r>
                     </a:p>
                   </a:txBody>
                   <a:tcPr marL="36000" marR="36000" marT="18000" marB="18000" anchor="ctr" horzOverflow="overflow">
                     <a:solidFill>
-                      <a:schemeClr val="bg1"/>
+                      <a:schemeClr val="accent2">
+                        <a:lumMod val="20000"/>
+                        <a:lumOff val="80000"/>
+                      </a:schemeClr>
                     </a:solidFill>
                   </a:tcPr>
                 </a:tc>
@@ -12141,44 +13375,30 @@
                           <a:ea typeface="Microsoft YaHei" panose="020B0503020204020204" pitchFamily="34" charset="-122"/>
                           <a:cs typeface="Arial Unicode MS" pitchFamily="34" charset="-120"/>
                         </a:rPr>
-                        <a:t>0</a:t>
+                        <a:t>5</a:t>
                       </a:r>
                     </a:p>
                   </a:txBody>
                   <a:tcPr marL="36000" marR="36000" marT="18000" marB="18000" anchor="ctr" horzOverflow="overflow">
                     <a:solidFill>
-                      <a:schemeClr val="bg1"/>
+                      <a:schemeClr val="accent2">
+                        <a:lumMod val="20000"/>
+                        <a:lumOff val="80000"/>
+                      </a:schemeClr>
                     </a:solidFill>
                   </a:tcPr>
                 </a:tc>
-                <a:extLst>
-                  <a:ext uri="{0D108BD9-81ED-4DB2-BD59-A6C34878D82A}">
-                    <a16:rowId xmlns:a16="http://schemas.microsoft.com/office/drawing/2014/main" val="2330245644"/>
-                  </a:ext>
-                </a:extLst>
-              </a:tr>
-              <a:tr h="328740">
-                <a:tc vMerge="1">
-                  <a:txBody>
-                    <a:bodyPr/>
-                    <a:lstStyle/>
-                    <a:p>
-                      <a:endParaRPr lang="zh-TW" altLang="en-US"/>
-                    </a:p>
-                  </a:txBody>
-                  <a:tcPr/>
-                </a:tc>
-                <a:tc vMerge="1">
+                <a:tc>
                   <a:txBody>
                     <a:bodyPr/>
                     <a:lstStyle/>
                     <a:p>
                       <a:pPr marL="0" marR="0" lvl="0" indent="0" algn="ctr" defTabSz="914400" rtl="0" eaLnBrk="1" fontAlgn="base" latinLnBrk="0" hangingPunct="1">
                         <a:lnSpc>
-                          <a:spcPct val="80000"/>
+                          <a:spcPct val="100000"/>
                         </a:lnSpc>
                         <a:spcBef>
-                          <a:spcPct val="0"/>
+                          <a:spcPct val="20000"/>
                         </a:spcBef>
                         <a:spcAft>
                           <a:spcPct val="0"/>
@@ -12189,6 +13409,84 @@
                         <a:buNone/>
                         <a:tabLst/>
                       </a:pPr>
+                      <a:r>
+                        <a:rPr kumimoji="1" lang="en-US" altLang="zh-TW" sz="1700" b="1" i="0" u="none" strike="noStrike" cap="none" normalizeH="0" baseline="0" dirty="0">
+                          <a:ln>
+                            <a:noFill/>
+                          </a:ln>
+                          <a:solidFill>
+                            <a:schemeClr val="tx1"/>
+                          </a:solidFill>
+                          <a:effectLst/>
+                          <a:latin typeface="Microsoft YaHei" panose="020B0503020204020204" pitchFamily="34" charset="-122"/>
+                          <a:ea typeface="Microsoft YaHei" panose="020B0503020204020204" pitchFamily="34" charset="-122"/>
+                          <a:cs typeface="Arial Unicode MS" pitchFamily="34" charset="-120"/>
+                        </a:rPr>
+                        <a:t>3</a:t>
+                      </a:r>
+                    </a:p>
+                  </a:txBody>
+                  <a:tcPr marL="36000" marR="36000" marT="18000" marB="18000" anchor="ctr" horzOverflow="overflow">
+                    <a:solidFill>
+                      <a:schemeClr val="accent2">
+                        <a:lumMod val="20000"/>
+                        <a:lumOff val="80000"/>
+                      </a:schemeClr>
+                    </a:solidFill>
+                  </a:tcPr>
+                </a:tc>
+                <a:extLst>
+                  <a:ext uri="{0D108BD9-81ED-4DB2-BD59-A6C34878D82A}">
+                    <a16:rowId xmlns:a16="http://schemas.microsoft.com/office/drawing/2014/main" val="1177657068"/>
+                  </a:ext>
+                </a:extLst>
+              </a:tr>
+              <a:tr h="328740">
+                <a:tc vMerge="1">
+                  <a:txBody>
+                    <a:bodyPr/>
+                    <a:lstStyle/>
+                    <a:p>
+                      <a:endParaRPr lang="zh-TW" altLang="en-US"/>
+                    </a:p>
+                  </a:txBody>
+                  <a:tcPr/>
+                </a:tc>
+                <a:tc gridSpan="2">
+                  <a:txBody>
+                    <a:bodyPr/>
+                    <a:lstStyle/>
+                    <a:p>
+                      <a:pPr marL="0" marR="0" lvl="0" indent="0" algn="ctr" defTabSz="914400" rtl="0" eaLnBrk="1" fontAlgn="base" latinLnBrk="0" hangingPunct="1">
+                        <a:lnSpc>
+                          <a:spcPct val="80000"/>
+                        </a:lnSpc>
+                        <a:spcBef>
+                          <a:spcPct val="0"/>
+                        </a:spcBef>
+                        <a:spcAft>
+                          <a:spcPct val="0"/>
+                        </a:spcAft>
+                        <a:buClrTx/>
+                        <a:buSzTx/>
+                        <a:buFontTx/>
+                        <a:buNone/>
+                        <a:tabLst/>
+                      </a:pPr>
+                      <a:r>
+                        <a:rPr kumimoji="1" lang="zh-TW" altLang="en-US" sz="1700" b="1" i="0" u="none" strike="noStrike" cap="none" normalizeH="0" baseline="0" dirty="0">
+                          <a:ln>
+                            <a:noFill/>
+                          </a:ln>
+                          <a:solidFill>
+                            <a:schemeClr val="tx1"/>
+                          </a:solidFill>
+                          <a:effectLst/>
+                          <a:latin typeface="Microsoft YaHei" panose="020B0503020204020204" pitchFamily="34" charset="-122"/>
+                          <a:ea typeface="Microsoft YaHei" panose="020B0503020204020204" pitchFamily="34" charset="-122"/>
+                        </a:rPr>
+                        <a:t>調度</a:t>
+                      </a:r>
                       <a:endParaRPr kumimoji="1" lang="en-US" altLang="zh-TW" sz="1700" b="1" i="0" u="none" strike="noStrike" cap="none" normalizeH="0" baseline="0" dirty="0">
                         <a:ln>
                           <a:noFill/>
@@ -12204,37 +13502,15 @@
                   </a:txBody>
                   <a:tcPr marL="36000" marR="36000" marT="18000" marB="18000" anchor="ctr" horzOverflow="overflow"/>
                 </a:tc>
-                <a:tc>
+                <a:tc hMerge="1">
                   <a:txBody>
                     <a:bodyPr/>
                     <a:lstStyle/>
                     <a:p>
-                      <a:pPr marL="0" algn="l" defTabSz="914400" rtl="0" eaLnBrk="1" latinLnBrk="0" hangingPunct="1"/>
-                      <a:r>
-                        <a:rPr kumimoji="1" lang="zh-TW" altLang="en-US" sz="1700" b="1" i="0" u="none" strike="noStrike" kern="1200" cap="none" normalizeH="0" baseline="0" dirty="0">
-                          <a:ln>
-                            <a:noFill/>
-                          </a:ln>
-                          <a:solidFill>
-                            <a:schemeClr val="tx1"/>
-                          </a:solidFill>
-                          <a:effectLst/>
-                          <a:latin typeface="Microsoft YaHei" panose="020B0503020204020204" pitchFamily="34" charset="-122"/>
-                          <a:ea typeface="Microsoft YaHei" panose="020B0503020204020204" pitchFamily="34" charset="-122"/>
-                          <a:cs typeface="+mn-cs"/>
-                        </a:rPr>
-                        <a:t>小計</a:t>
-                      </a:r>
-                    </a:p>
-                  </a:txBody>
-                  <a:tcPr marL="36000" marR="36000" marT="18000" marB="18000" anchor="ctr" horzOverflow="overflow">
-                    <a:solidFill>
-                      <a:schemeClr val="accent2">
-                        <a:lumMod val="20000"/>
-                        <a:lumOff val="80000"/>
-                      </a:schemeClr>
-                    </a:solidFill>
-                  </a:tcPr>
+                      <a:endParaRPr lang="zh-TW" altLang="en-US"/>
+                    </a:p>
+                  </a:txBody>
+                  <a:tcPr/>
                 </a:tc>
                 <a:tc>
                   <a:txBody>
@@ -12270,18 +13546,11 @@
                           <a:ea typeface="Microsoft YaHei" panose="020B0503020204020204" pitchFamily="34" charset="-122"/>
                           <a:cs typeface="Arial Unicode MS" pitchFamily="34" charset="-120"/>
                         </a:rPr>
-                        <a:t>2</a:t>
-                      </a:r>
-                    </a:p>
-                  </a:txBody>
-                  <a:tcPr marL="36000" marR="36000" marT="18000" marB="18000" anchor="ctr" horzOverflow="overflow">
-                    <a:solidFill>
-                      <a:schemeClr val="accent2">
-                        <a:lumMod val="20000"/>
-                        <a:lumOff val="80000"/>
-                      </a:schemeClr>
-                    </a:solidFill>
-                  </a:tcPr>
+                        <a:t>1</a:t>
+                      </a:r>
+                    </a:p>
+                  </a:txBody>
+                  <a:tcPr marL="36000" marR="36000" marT="18000" marB="18000" anchor="ctr" horzOverflow="overflow"/>
                 </a:tc>
                 <a:tc>
                   <a:txBody>
@@ -12321,14 +13590,7 @@
                       </a:r>
                     </a:p>
                   </a:txBody>
-                  <a:tcPr marL="36000" marR="36000" marT="18000" marB="18000" anchor="ctr" horzOverflow="overflow">
-                    <a:solidFill>
-                      <a:schemeClr val="accent2">
-                        <a:lumMod val="20000"/>
-                        <a:lumOff val="80000"/>
-                      </a:schemeClr>
-                    </a:solidFill>
-                  </a:tcPr>
+                  <a:tcPr marL="36000" marR="36000" marT="18000" marB="18000" anchor="ctr" horzOverflow="overflow"/>
                 </a:tc>
                 <a:tc>
                   <a:txBody>
@@ -12364,18 +13626,11 @@
                           <a:ea typeface="Microsoft YaHei" panose="020B0503020204020204" pitchFamily="34" charset="-122"/>
                           <a:cs typeface="Arial Unicode MS" pitchFamily="34" charset="-120"/>
                         </a:rPr>
-                        <a:t>3</a:t>
-                      </a:r>
-                    </a:p>
-                  </a:txBody>
-                  <a:tcPr marL="36000" marR="36000" marT="18000" marB="18000" anchor="ctr" horzOverflow="overflow">
-                    <a:solidFill>
-                      <a:schemeClr val="accent2">
-                        <a:lumMod val="20000"/>
-                        <a:lumOff val="80000"/>
-                      </a:schemeClr>
-                    </a:solidFill>
-                  </a:tcPr>
+                        <a:t>1</a:t>
+                      </a:r>
+                    </a:p>
+                  </a:txBody>
+                  <a:tcPr marL="36000" marR="36000" marT="18000" marB="18000" anchor="ctr" horzOverflow="overflow"/>
                 </a:tc>
                 <a:tc>
                   <a:txBody>
@@ -12411,18 +13666,11 @@
                           <a:ea typeface="Microsoft YaHei" panose="020B0503020204020204" pitchFamily="34" charset="-122"/>
                           <a:cs typeface="Arial Unicode MS" pitchFamily="34" charset="-120"/>
                         </a:rPr>
-                        <a:t>4</a:t>
-                      </a:r>
-                    </a:p>
-                  </a:txBody>
-                  <a:tcPr marL="36000" marR="36000" marT="18000" marB="18000" anchor="ctr" horzOverflow="overflow">
-                    <a:solidFill>
-                      <a:schemeClr val="accent2">
-                        <a:lumMod val="20000"/>
-                        <a:lumOff val="80000"/>
-                      </a:schemeClr>
-                    </a:solidFill>
-                  </a:tcPr>
+                        <a:t>2</a:t>
+                      </a:r>
+                    </a:p>
+                  </a:txBody>
+                  <a:tcPr marL="36000" marR="36000" marT="18000" marB="18000" anchor="ctr" horzOverflow="overflow"/>
                 </a:tc>
                 <a:tc>
                   <a:txBody>
@@ -12458,18 +13706,11 @@
                           <a:ea typeface="Microsoft YaHei" panose="020B0503020204020204" pitchFamily="34" charset="-122"/>
                           <a:cs typeface="Arial Unicode MS" pitchFamily="34" charset="-120"/>
                         </a:rPr>
-                        <a:t>4</a:t>
-                      </a:r>
-                    </a:p>
-                  </a:txBody>
-                  <a:tcPr marL="36000" marR="36000" marT="18000" marB="18000" anchor="ctr" horzOverflow="overflow">
-                    <a:solidFill>
-                      <a:schemeClr val="accent2">
-                        <a:lumMod val="20000"/>
-                        <a:lumOff val="80000"/>
-                      </a:schemeClr>
-                    </a:solidFill>
-                  </a:tcPr>
+                        <a:t>2</a:t>
+                      </a:r>
+                    </a:p>
+                  </a:txBody>
+                  <a:tcPr marL="36000" marR="36000" marT="18000" marB="18000" anchor="ctr" horzOverflow="overflow"/>
                 </a:tc>
                 <a:tc>
                   <a:txBody>
@@ -12505,47 +13746,23 @@
                           <a:ea typeface="Microsoft YaHei" panose="020B0503020204020204" pitchFamily="34" charset="-122"/>
                           <a:cs typeface="Arial Unicode MS" pitchFamily="34" charset="-120"/>
                         </a:rPr>
-                        <a:t>5</a:t>
-                      </a:r>
-                    </a:p>
-                  </a:txBody>
-                  <a:tcPr marL="36000" marR="36000" marT="18000" marB="18000" anchor="ctr" horzOverflow="overflow">
-                    <a:solidFill>
-                      <a:schemeClr val="accent2">
-                        <a:lumMod val="20000"/>
-                        <a:lumOff val="80000"/>
-                      </a:schemeClr>
-                    </a:solidFill>
-                  </a:tcPr>
-                </a:tc>
-                <a:extLst>
-                  <a:ext uri="{0D108BD9-81ED-4DB2-BD59-A6C34878D82A}">
-                    <a16:rowId xmlns:a16="http://schemas.microsoft.com/office/drawing/2014/main" val="1177657068"/>
-                  </a:ext>
-                </a:extLst>
-              </a:tr>
-              <a:tr h="328740">
-                <a:tc vMerge="1">
-                  <a:txBody>
-                    <a:bodyPr/>
-                    <a:lstStyle/>
-                    <a:p>
-                      <a:endParaRPr lang="zh-TW" altLang="en-US"/>
-                    </a:p>
-                  </a:txBody>
-                  <a:tcPr/>
-                </a:tc>
-                <a:tc gridSpan="2">
+                        <a:t>1</a:t>
+                      </a:r>
+                    </a:p>
+                  </a:txBody>
+                  <a:tcPr marL="36000" marR="36000" marT="18000" marB="18000" anchor="ctr" horzOverflow="overflow"/>
+                </a:tc>
+                <a:tc>
                   <a:txBody>
                     <a:bodyPr/>
                     <a:lstStyle/>
                     <a:p>
                       <a:pPr marL="0" marR="0" lvl="0" indent="0" algn="ctr" defTabSz="914400" rtl="0" eaLnBrk="1" fontAlgn="base" latinLnBrk="0" hangingPunct="1">
                         <a:lnSpc>
-                          <a:spcPct val="80000"/>
+                          <a:spcPct val="100000"/>
                         </a:lnSpc>
                         <a:spcBef>
-                          <a:spcPct val="0"/>
+                          <a:spcPct val="20000"/>
                         </a:spcBef>
                         <a:spcAft>
                           <a:spcPct val="0"/>
@@ -12557,6 +13774,63 @@
                         <a:tabLst/>
                       </a:pPr>
                       <a:r>
+                        <a:rPr kumimoji="1" lang="en-US" altLang="zh-TW" sz="1700" b="1" i="0" u="none" strike="noStrike" cap="none" normalizeH="0" baseline="0" dirty="0">
+                          <a:ln>
+                            <a:noFill/>
+                          </a:ln>
+                          <a:solidFill>
+                            <a:schemeClr val="tx1"/>
+                          </a:solidFill>
+                          <a:effectLst/>
+                          <a:latin typeface="Microsoft YaHei" panose="020B0503020204020204" pitchFamily="34" charset="-122"/>
+                          <a:ea typeface="Microsoft YaHei" panose="020B0503020204020204" pitchFamily="34" charset="-122"/>
+                          <a:cs typeface="Arial Unicode MS" pitchFamily="34" charset="-120"/>
+                        </a:rPr>
+                        <a:t>1</a:t>
+                      </a:r>
+                    </a:p>
+                  </a:txBody>
+                  <a:tcPr marL="36000" marR="36000" marT="18000" marB="18000" anchor="ctr" horzOverflow="overflow"/>
+                </a:tc>
+                <a:extLst>
+                  <a:ext uri="{0D108BD9-81ED-4DB2-BD59-A6C34878D82A}">
+                    <a16:rowId xmlns:a16="http://schemas.microsoft.com/office/drawing/2014/main" val="3551911789"/>
+                  </a:ext>
+                </a:extLst>
+              </a:tr>
+              <a:tr h="328740">
+                <a:tc vMerge="1">
+                  <a:txBody>
+                    <a:bodyPr/>
+                    <a:lstStyle/>
+                    <a:p>
+                      <a:endParaRPr lang="zh-TW" altLang="en-US"/>
+                    </a:p>
+                  </a:txBody>
+                  <a:tcPr/>
+                </a:tc>
+                <a:tc gridSpan="2">
+                  <a:txBody>
+                    <a:bodyPr/>
+                    <a:lstStyle/>
+                    <a:p>
+                      <a:pPr marL="0" marR="0" lvl="0" indent="0" algn="ctr" defTabSz="914400" rtl="0" eaLnBrk="1" fontAlgn="base" latinLnBrk="0" hangingPunct="1">
+                        <a:lnSpc>
+                          <a:spcPct val="80000"/>
+                        </a:lnSpc>
+                        <a:spcBef>
+                          <a:spcPct val="0"/>
+                        </a:spcBef>
+                        <a:spcAft>
+                          <a:spcPct val="0"/>
+                        </a:spcAft>
+                        <a:buClrTx/>
+                        <a:buSzTx/>
+                        <a:buFontTx/>
+                        <a:buNone/>
+                        <a:tabLst/>
+                      </a:pPr>
+                      <a:r>
                         <a:rPr kumimoji="1" lang="zh-TW" altLang="en-US" sz="1700" b="1" i="0" u="none" strike="noStrike" cap="none" normalizeH="0" baseline="0" dirty="0">
                           <a:ln>
                             <a:noFill/>
@@ -12568,7 +13842,7 @@
                           <a:latin typeface="Microsoft YaHei" panose="020B0503020204020204" pitchFamily="34" charset="-122"/>
                           <a:ea typeface="Microsoft YaHei" panose="020B0503020204020204" pitchFamily="34" charset="-122"/>
                         </a:rPr>
-                        <a:t>調度</a:t>
+                        <a:t>車管</a:t>
                       </a:r>
                       <a:endParaRPr kumimoji="1" lang="en-US" altLang="zh-TW" sz="1700" b="1" i="0" u="none" strike="noStrike" cap="none" normalizeH="0" baseline="0" dirty="0">
                         <a:ln>
@@ -12590,10 +13864,10 @@
                     <a:bodyPr/>
                     <a:lstStyle/>
                     <a:p>
-                      <a:endParaRPr lang="zh-TW" altLang="en-US" dirty="0"/>
-                    </a:p>
-                  </a:txBody>
-                  <a:tcPr marL="36000" marR="36000" marT="18000" marB="18000" anchor="ctr" horzOverflow="overflow"/>
+                      <a:endParaRPr lang="zh-TW" altLang="en-US"/>
+                    </a:p>
+                  </a:txBody>
+                  <a:tcPr/>
                 </a:tc>
                 <a:tc>
                   <a:txBody>
@@ -12629,7 +13903,7 @@
                           <a:ea typeface="Microsoft YaHei" panose="020B0503020204020204" pitchFamily="34" charset="-122"/>
                           <a:cs typeface="Arial Unicode MS" pitchFamily="34" charset="-120"/>
                         </a:rPr>
-                        <a:t>1</a:t>
+                        <a:t>0</a:t>
                       </a:r>
                     </a:p>
                   </a:txBody>
@@ -12669,7 +13943,7 @@
                           <a:ea typeface="Microsoft YaHei" panose="020B0503020204020204" pitchFamily="34" charset="-122"/>
                           <a:cs typeface="Arial Unicode MS" pitchFamily="34" charset="-120"/>
                         </a:rPr>
-                        <a:t>2</a:t>
+                        <a:t>0</a:t>
                       </a:r>
                     </a:p>
                   </a:txBody>
@@ -12709,7 +13983,7 @@
                           <a:ea typeface="Microsoft YaHei" panose="020B0503020204020204" pitchFamily="34" charset="-122"/>
                           <a:cs typeface="Arial Unicode MS" pitchFamily="34" charset="-120"/>
                         </a:rPr>
-                        <a:t>1</a:t>
+                        <a:t>0</a:t>
                       </a:r>
                     </a:p>
                   </a:txBody>
@@ -12749,7 +14023,7 @@
                           <a:ea typeface="Microsoft YaHei" panose="020B0503020204020204" pitchFamily="34" charset="-122"/>
                           <a:cs typeface="Arial Unicode MS" pitchFamily="34" charset="-120"/>
                         </a:rPr>
-                        <a:t>2</a:t>
+                        <a:t>0</a:t>
                       </a:r>
                     </a:p>
                   </a:txBody>
@@ -12789,7 +14063,7 @@
                           <a:ea typeface="Microsoft YaHei" panose="020B0503020204020204" pitchFamily="34" charset="-122"/>
                           <a:cs typeface="Arial Unicode MS" pitchFamily="34" charset="-120"/>
                         </a:rPr>
-                        <a:t>2</a:t>
+                        <a:t>0</a:t>
                       </a:r>
                     </a:p>
                   </a:txBody>
@@ -12829,40 +14103,23 @@
                           <a:ea typeface="Microsoft YaHei" panose="020B0503020204020204" pitchFamily="34" charset="-122"/>
                           <a:cs typeface="Arial Unicode MS" pitchFamily="34" charset="-120"/>
                         </a:rPr>
-                        <a:t>1</a:t>
+                        <a:t>0</a:t>
                       </a:r>
                     </a:p>
                   </a:txBody>
                   <a:tcPr marL="36000" marR="36000" marT="18000" marB="18000" anchor="ctr" horzOverflow="overflow"/>
                 </a:tc>
-                <a:extLst>
-                  <a:ext uri="{0D108BD9-81ED-4DB2-BD59-A6C34878D82A}">
-                    <a16:rowId xmlns:a16="http://schemas.microsoft.com/office/drawing/2014/main" val="3551911789"/>
-                  </a:ext>
-                </a:extLst>
-              </a:tr>
-              <a:tr h="328740">
-                <a:tc vMerge="1">
-                  <a:txBody>
-                    <a:bodyPr/>
-                    <a:lstStyle/>
-                    <a:p>
-                      <a:endParaRPr lang="zh-TW" altLang="en-US"/>
-                    </a:p>
-                  </a:txBody>
-                  <a:tcPr/>
-                </a:tc>
-                <a:tc gridSpan="2">
+                <a:tc>
                   <a:txBody>
                     <a:bodyPr/>
                     <a:lstStyle/>
                     <a:p>
                       <a:pPr marL="0" marR="0" lvl="0" indent="0" algn="ctr" defTabSz="914400" rtl="0" eaLnBrk="1" fontAlgn="base" latinLnBrk="0" hangingPunct="1">
                         <a:lnSpc>
-                          <a:spcPct val="80000"/>
+                          <a:spcPct val="100000"/>
                         </a:lnSpc>
                         <a:spcBef>
-                          <a:spcPct val="0"/>
+                          <a:spcPct val="20000"/>
                         </a:spcBef>
                         <a:spcAft>
                           <a:spcPct val="0"/>
@@ -12874,66 +14131,6 @@
                         <a:tabLst/>
                       </a:pPr>
                       <a:r>
-                        <a:rPr kumimoji="1" lang="zh-TW" altLang="en-US" sz="1700" b="1" i="0" u="none" strike="noStrike" cap="none" normalizeH="0" baseline="0" dirty="0">
-                          <a:ln>
-                            <a:noFill/>
-                          </a:ln>
-                          <a:solidFill>
-                            <a:schemeClr val="tx1"/>
-                          </a:solidFill>
-                          <a:effectLst/>
-                          <a:latin typeface="Microsoft YaHei" panose="020B0503020204020204" pitchFamily="34" charset="-122"/>
-                          <a:ea typeface="Microsoft YaHei" panose="020B0503020204020204" pitchFamily="34" charset="-122"/>
-                        </a:rPr>
-                        <a:t>車管</a:t>
-                      </a:r>
-                      <a:endParaRPr kumimoji="1" lang="en-US" altLang="zh-TW" sz="1700" b="1" i="0" u="none" strike="noStrike" cap="none" normalizeH="0" baseline="0" dirty="0">
-                        <a:ln>
-                          <a:noFill/>
-                        </a:ln>
-                        <a:solidFill>
-                          <a:schemeClr val="tx1"/>
-                        </a:solidFill>
-                        <a:effectLst/>
-                        <a:latin typeface="Microsoft YaHei" panose="020B0503020204020204" pitchFamily="34" charset="-122"/>
-                        <a:ea typeface="Microsoft YaHei" panose="020B0503020204020204" pitchFamily="34" charset="-122"/>
-                      </a:endParaRPr>
-                    </a:p>
-                  </a:txBody>
-                  <a:tcPr marL="36000" marR="36000" marT="18000" marB="18000" anchor="ctr" horzOverflow="overflow"/>
-                </a:tc>
-                <a:tc hMerge="1">
-                  <a:txBody>
-                    <a:bodyPr/>
-                    <a:lstStyle/>
-                    <a:p>
-                      <a:endParaRPr lang="zh-TW" altLang="en-US" dirty="0"/>
-                    </a:p>
-                  </a:txBody>
-                  <a:tcPr marL="36000" marR="36000" marT="18000" marB="18000" anchor="ctr" horzOverflow="overflow"/>
-                </a:tc>
-                <a:tc>
-                  <a:txBody>
-                    <a:bodyPr/>
-                    <a:lstStyle/>
-                    <a:p>
-                      <a:pPr marL="0" marR="0" lvl="0" indent="0" algn="ctr" defTabSz="914400" rtl="0" eaLnBrk="1" fontAlgn="base" latinLnBrk="0" hangingPunct="1">
-                        <a:lnSpc>
-                          <a:spcPct val="100000"/>
-                        </a:lnSpc>
-                        <a:spcBef>
-                          <a:spcPct val="20000"/>
-                        </a:spcBef>
-                        <a:spcAft>
-                          <a:spcPct val="0"/>
-                        </a:spcAft>
-                        <a:buClrTx/>
-                        <a:buSzTx/>
-                        <a:buFontTx/>
-                        <a:buNone/>
-                        <a:tabLst/>
-                      </a:pPr>
-                      <a:r>
                         <a:rPr kumimoji="1" lang="en-US" altLang="zh-TW" sz="1700" b="1" i="0" u="none" strike="noStrike" cap="none" normalizeH="0" baseline="0" dirty="0">
                           <a:ln>
                             <a:noFill/>
@@ -12946,207 +14143,7 @@
                           <a:ea typeface="Microsoft YaHei" panose="020B0503020204020204" pitchFamily="34" charset="-122"/>
                           <a:cs typeface="Arial Unicode MS" pitchFamily="34" charset="-120"/>
                         </a:rPr>
-                        <a:t>0</a:t>
-                      </a:r>
-                    </a:p>
-                  </a:txBody>
-                  <a:tcPr marL="36000" marR="36000" marT="18000" marB="18000" anchor="ctr" horzOverflow="overflow"/>
-                </a:tc>
-                <a:tc>
-                  <a:txBody>
-                    <a:bodyPr/>
-                    <a:lstStyle/>
-                    <a:p>
-                      <a:pPr marL="0" marR="0" lvl="0" indent="0" algn="ctr" defTabSz="914400" rtl="0" eaLnBrk="1" fontAlgn="base" latinLnBrk="0" hangingPunct="1">
-                        <a:lnSpc>
-                          <a:spcPct val="100000"/>
-                        </a:lnSpc>
-                        <a:spcBef>
-                          <a:spcPct val="20000"/>
-                        </a:spcBef>
-                        <a:spcAft>
-                          <a:spcPct val="0"/>
-                        </a:spcAft>
-                        <a:buClrTx/>
-                        <a:buSzTx/>
-                        <a:buFontTx/>
-                        <a:buNone/>
-                        <a:tabLst/>
-                      </a:pPr>
-                      <a:r>
-                        <a:rPr kumimoji="1" lang="en-US" altLang="zh-TW" sz="1700" b="1" i="0" u="none" strike="noStrike" cap="none" normalizeH="0" baseline="0" dirty="0">
-                          <a:ln>
-                            <a:noFill/>
-                          </a:ln>
-                          <a:solidFill>
-                            <a:schemeClr val="tx1"/>
-                          </a:solidFill>
-                          <a:effectLst/>
-                          <a:latin typeface="Microsoft YaHei" panose="020B0503020204020204" pitchFamily="34" charset="-122"/>
-                          <a:ea typeface="Microsoft YaHei" panose="020B0503020204020204" pitchFamily="34" charset="-122"/>
-                          <a:cs typeface="Arial Unicode MS" pitchFamily="34" charset="-120"/>
-                        </a:rPr>
-                        <a:t>0</a:t>
-                      </a:r>
-                    </a:p>
-                  </a:txBody>
-                  <a:tcPr marL="36000" marR="36000" marT="18000" marB="18000" anchor="ctr" horzOverflow="overflow"/>
-                </a:tc>
-                <a:tc>
-                  <a:txBody>
-                    <a:bodyPr/>
-                    <a:lstStyle/>
-                    <a:p>
-                      <a:pPr marL="0" marR="0" lvl="0" indent="0" algn="ctr" defTabSz="914400" rtl="0" eaLnBrk="1" fontAlgn="base" latinLnBrk="0" hangingPunct="1">
-                        <a:lnSpc>
-                          <a:spcPct val="100000"/>
-                        </a:lnSpc>
-                        <a:spcBef>
-                          <a:spcPct val="20000"/>
-                        </a:spcBef>
-                        <a:spcAft>
-                          <a:spcPct val="0"/>
-                        </a:spcAft>
-                        <a:buClrTx/>
-                        <a:buSzTx/>
-                        <a:buFontTx/>
-                        <a:buNone/>
-                        <a:tabLst/>
-                      </a:pPr>
-                      <a:r>
-                        <a:rPr kumimoji="1" lang="en-US" altLang="zh-TW" sz="1700" b="1" i="0" u="none" strike="noStrike" cap="none" normalizeH="0" baseline="0" dirty="0">
-                          <a:ln>
-                            <a:noFill/>
-                          </a:ln>
-                          <a:solidFill>
-                            <a:schemeClr val="tx1"/>
-                          </a:solidFill>
-                          <a:effectLst/>
-                          <a:latin typeface="Microsoft YaHei" panose="020B0503020204020204" pitchFamily="34" charset="-122"/>
-                          <a:ea typeface="Microsoft YaHei" panose="020B0503020204020204" pitchFamily="34" charset="-122"/>
-                          <a:cs typeface="Arial Unicode MS" pitchFamily="34" charset="-120"/>
-                        </a:rPr>
-                        <a:t>0</a:t>
-                      </a:r>
-                    </a:p>
-                  </a:txBody>
-                  <a:tcPr marL="36000" marR="36000" marT="18000" marB="18000" anchor="ctr" horzOverflow="overflow"/>
-                </a:tc>
-                <a:tc>
-                  <a:txBody>
-                    <a:bodyPr/>
-                    <a:lstStyle/>
-                    <a:p>
-                      <a:pPr marL="0" marR="0" lvl="0" indent="0" algn="ctr" defTabSz="914400" rtl="0" eaLnBrk="1" fontAlgn="base" latinLnBrk="0" hangingPunct="1">
-                        <a:lnSpc>
-                          <a:spcPct val="100000"/>
-                        </a:lnSpc>
-                        <a:spcBef>
-                          <a:spcPct val="20000"/>
-                        </a:spcBef>
-                        <a:spcAft>
-                          <a:spcPct val="0"/>
-                        </a:spcAft>
-                        <a:buClrTx/>
-                        <a:buSzTx/>
-                        <a:buFontTx/>
-                        <a:buNone/>
-                        <a:tabLst/>
-                      </a:pPr>
-                      <a:r>
-                        <a:rPr kumimoji="1" lang="en-US" altLang="zh-TW" sz="1700" b="1" i="0" u="none" strike="noStrike" cap="none" normalizeH="0" baseline="0" dirty="0">
-                          <a:ln>
-                            <a:noFill/>
-                          </a:ln>
-                          <a:solidFill>
-                            <a:schemeClr val="tx1"/>
-                          </a:solidFill>
-                          <a:effectLst/>
-                          <a:latin typeface="Microsoft YaHei" panose="020B0503020204020204" pitchFamily="34" charset="-122"/>
-                          <a:ea typeface="Microsoft YaHei" panose="020B0503020204020204" pitchFamily="34" charset="-122"/>
-                          <a:cs typeface="Arial Unicode MS" pitchFamily="34" charset="-120"/>
-                        </a:rPr>
-                        <a:t>0</a:t>
-                      </a:r>
-                    </a:p>
-                  </a:txBody>
-                  <a:tcPr marL="36000" marR="36000" marT="18000" marB="18000" anchor="ctr" horzOverflow="overflow"/>
-                </a:tc>
-                <a:tc>
-                  <a:txBody>
-                    <a:bodyPr/>
-                    <a:lstStyle/>
-                    <a:p>
-                      <a:pPr marL="0" marR="0" lvl="0" indent="0" algn="ctr" defTabSz="914400" rtl="0" eaLnBrk="1" fontAlgn="base" latinLnBrk="0" hangingPunct="1">
-                        <a:lnSpc>
-                          <a:spcPct val="100000"/>
-                        </a:lnSpc>
-                        <a:spcBef>
-                          <a:spcPct val="20000"/>
-                        </a:spcBef>
-                        <a:spcAft>
-                          <a:spcPct val="0"/>
-                        </a:spcAft>
-                        <a:buClrTx/>
-                        <a:buSzTx/>
-                        <a:buFontTx/>
-                        <a:buNone/>
-                        <a:tabLst/>
-                      </a:pPr>
-                      <a:r>
-                        <a:rPr kumimoji="1" lang="en-US" altLang="zh-TW" sz="1700" b="1" i="0" u="none" strike="noStrike" cap="none" normalizeH="0" baseline="0" dirty="0">
-                          <a:ln>
-                            <a:noFill/>
-                          </a:ln>
-                          <a:solidFill>
-                            <a:schemeClr val="tx1"/>
-                          </a:solidFill>
-                          <a:effectLst/>
-                          <a:latin typeface="Microsoft YaHei" panose="020B0503020204020204" pitchFamily="34" charset="-122"/>
-                          <a:ea typeface="Microsoft YaHei" panose="020B0503020204020204" pitchFamily="34" charset="-122"/>
-                          <a:cs typeface="Arial Unicode MS" pitchFamily="34" charset="-120"/>
-                        </a:rPr>
-                        <a:t>0</a:t>
-                      </a:r>
-                    </a:p>
-                  </a:txBody>
-                  <a:tcPr marL="36000" marR="36000" marT="18000" marB="18000" anchor="ctr" horzOverflow="overflow"/>
-                </a:tc>
-                <a:tc>
-                  <a:txBody>
-                    <a:bodyPr/>
-                    <a:lstStyle/>
-                    <a:p>
-                      <a:pPr marL="0" marR="0" lvl="0" indent="0" algn="ctr" defTabSz="914400" rtl="0" eaLnBrk="1" fontAlgn="base" latinLnBrk="0" hangingPunct="1">
-                        <a:lnSpc>
-                          <a:spcPct val="100000"/>
-                        </a:lnSpc>
-                        <a:spcBef>
-                          <a:spcPct val="20000"/>
-                        </a:spcBef>
-                        <a:spcAft>
-                          <a:spcPct val="0"/>
-                        </a:spcAft>
-                        <a:buClrTx/>
-                        <a:buSzTx/>
-                        <a:buFontTx/>
-                        <a:buNone/>
-                        <a:tabLst/>
-                      </a:pPr>
-                      <a:r>
-                        <a:rPr kumimoji="1" lang="en-US" altLang="zh-TW" sz="1700" b="1" i="0" u="none" strike="noStrike" cap="none" normalizeH="0" baseline="0" dirty="0">
-                          <a:ln>
-                            <a:noFill/>
-                          </a:ln>
-                          <a:solidFill>
-                            <a:schemeClr val="tx1"/>
-                          </a:solidFill>
-                          <a:effectLst/>
-                          <a:latin typeface="Microsoft YaHei" panose="020B0503020204020204" pitchFamily="34" charset="-122"/>
-                          <a:ea typeface="Microsoft YaHei" panose="020B0503020204020204" pitchFamily="34" charset="-122"/>
-                          <a:cs typeface="Arial Unicode MS" pitchFamily="34" charset="-120"/>
-                        </a:rPr>
-                        <a:t>0</a:t>
+                        <a:t>1</a:t>
                       </a:r>
                     </a:p>
                   </a:txBody>
@@ -13293,10 +14290,10 @@
                     <a:bodyPr/>
                     <a:lstStyle/>
                     <a:p>
-                      <a:endParaRPr lang="zh-TW" altLang="en-US" dirty="0"/>
-                    </a:p>
-                  </a:txBody>
-                  <a:tcPr marL="36000" marR="36000" marT="18000" marB="18000" anchor="ctr" horzOverflow="overflow"/>
+                      <a:endParaRPr lang="zh-TW" altLang="en-US"/>
+                    </a:p>
+                  </a:txBody>
+                  <a:tcPr/>
                 </a:tc>
                 <a:tc>
                   <a:txBody>
@@ -13413,6 +14410,46 @@
                           <a:cs typeface="Arial Unicode MS" pitchFamily="34" charset="-120"/>
                         </a:rPr>
                         <a:t>2</a:t>
+                      </a:r>
+                    </a:p>
+                  </a:txBody>
+                  <a:tcPr marL="36000" marR="36000" marT="18000" marB="18000" anchor="ctr" horzOverflow="overflow"/>
+                </a:tc>
+                <a:tc>
+                  <a:txBody>
+                    <a:bodyPr/>
+                    <a:lstStyle/>
+                    <a:p>
+                      <a:pPr marL="0" marR="0" lvl="0" indent="0" algn="ctr" defTabSz="914400" rtl="0" eaLnBrk="1" fontAlgn="base" latinLnBrk="0" hangingPunct="1">
+                        <a:lnSpc>
+                          <a:spcPct val="100000"/>
+                        </a:lnSpc>
+                        <a:spcBef>
+                          <a:spcPct val="20000"/>
+                        </a:spcBef>
+                        <a:spcAft>
+                          <a:spcPct val="0"/>
+                        </a:spcAft>
+                        <a:buClrTx/>
+                        <a:buSzTx/>
+                        <a:buFontTx/>
+                        <a:buNone/>
+                        <a:tabLst/>
+                      </a:pPr>
+                      <a:r>
+                        <a:rPr kumimoji="1" lang="en-US" altLang="zh-TW" sz="1700" b="1" i="0" u="none" strike="noStrike" cap="none" normalizeH="0" baseline="0" dirty="0">
+                          <a:ln>
+                            <a:noFill/>
+                          </a:ln>
+                          <a:solidFill>
+                            <a:schemeClr val="tx1"/>
+                          </a:solidFill>
+                          <a:effectLst/>
+                          <a:latin typeface="Microsoft YaHei" panose="020B0503020204020204" pitchFamily="34" charset="-122"/>
+                          <a:ea typeface="Microsoft YaHei" panose="020B0503020204020204" pitchFamily="34" charset="-122"/>
+                          <a:cs typeface="Arial Unicode MS" pitchFamily="34" charset="-120"/>
+                        </a:rPr>
+                        <a:t>1</a:t>
                       </a:r>
                     </a:p>
                   </a:txBody>
@@ -13643,36 +14680,10 @@
                     <a:bodyPr/>
                     <a:lstStyle/>
                     <a:p>
-                      <a:pPr marL="0" marR="0" lvl="0" indent="0" algn="ctr" defTabSz="914400" rtl="0" eaLnBrk="1" fontAlgn="base" latinLnBrk="0" hangingPunct="1">
-                        <a:lnSpc>
-                          <a:spcPct val="80000"/>
-                        </a:lnSpc>
-                        <a:spcBef>
-                          <a:spcPct val="0"/>
-                        </a:spcBef>
-                        <a:spcAft>
-                          <a:spcPct val="0"/>
-                        </a:spcAft>
-                        <a:buClrTx/>
-                        <a:buSzTx/>
-                        <a:buFontTx/>
-                        <a:buNone/>
-                        <a:tabLst/>
-                      </a:pPr>
-                      <a:endParaRPr kumimoji="1" lang="en-US" altLang="zh-TW" sz="1700" b="1" i="0" u="none" strike="noStrike" cap="none" normalizeH="0" baseline="0" dirty="0">
-                        <a:ln>
-                          <a:noFill/>
-                        </a:ln>
-                        <a:solidFill>
-                          <a:schemeClr val="tx1"/>
-                        </a:solidFill>
-                        <a:effectLst/>
-                        <a:latin typeface="Microsoft YaHei" panose="020B0503020204020204" pitchFamily="34" charset="-122"/>
-                        <a:ea typeface="Microsoft YaHei" panose="020B0503020204020204" pitchFamily="34" charset="-122"/>
-                      </a:endParaRPr>
-                    </a:p>
-                  </a:txBody>
-                  <a:tcPr marL="36000" marR="36000" marT="18000" marB="18000" anchor="ctr" horzOverflow="overflow"/>
+                      <a:endParaRPr lang="zh-TW" altLang="en-US"/>
+                    </a:p>
+                  </a:txBody>
+                  <a:tcPr/>
                 </a:tc>
                 <a:tc>
                   <a:txBody>
@@ -13945,6 +14956,65 @@
                         </a:rPr>
                         <a:t>9</a:t>
                       </a:r>
+                    </a:p>
+                  </a:txBody>
+                  <a:tcPr marL="36000" marR="36000" marT="18000" marB="18000" anchor="ctr" horzOverflow="overflow">
+                    <a:solidFill>
+                      <a:schemeClr val="accent1">
+                        <a:lumMod val="40000"/>
+                        <a:lumOff val="60000"/>
+                      </a:schemeClr>
+                    </a:solidFill>
+                  </a:tcPr>
+                </a:tc>
+                <a:tc>
+                  <a:txBody>
+                    <a:bodyPr/>
+                    <a:lstStyle/>
+                    <a:p>
+                      <a:pPr marL="0" marR="0" lvl="0" indent="0" algn="ctr" defTabSz="914400" rtl="0" eaLnBrk="1" fontAlgn="base" latinLnBrk="0" hangingPunct="1">
+                        <a:lnSpc>
+                          <a:spcPct val="100000"/>
+                        </a:lnSpc>
+                        <a:spcBef>
+                          <a:spcPct val="20000"/>
+                        </a:spcBef>
+                        <a:spcAft>
+                          <a:spcPct val="0"/>
+                        </a:spcAft>
+                        <a:buClrTx/>
+                        <a:buSzTx/>
+                        <a:buFontTx/>
+                        <a:buNone/>
+                        <a:tabLst/>
+                      </a:pPr>
+                      <a:r>
+                        <a:rPr kumimoji="1" lang="en-US" altLang="zh-TW" sz="1700" b="1" i="0" u="none" strike="noStrike" cap="none" normalizeH="0" baseline="0">
+                          <a:ln>
+                            <a:noFill/>
+                          </a:ln>
+                          <a:solidFill>
+                            <a:srgbClr val="FF0000"/>
+                          </a:solidFill>
+                          <a:effectLst/>
+                          <a:latin typeface="Microsoft YaHei" panose="020B0503020204020204" pitchFamily="34" charset="-122"/>
+                          <a:ea typeface="Microsoft YaHei" panose="020B0503020204020204" pitchFamily="34" charset="-122"/>
+                          <a:cs typeface="Arial Unicode MS" pitchFamily="34" charset="-120"/>
+                        </a:rPr>
+                        <a:t>16</a:t>
+                      </a:r>
+                      <a:endParaRPr kumimoji="1" lang="en-US" altLang="zh-TW" sz="1700" b="1" i="0" u="none" strike="noStrike" cap="none" normalizeH="0" baseline="0" dirty="0">
+                        <a:ln>
+                          <a:noFill/>
+                        </a:ln>
+                        <a:solidFill>
+                          <a:srgbClr val="FF0000"/>
+                        </a:solidFill>
+                        <a:effectLst/>
+                        <a:latin typeface="Microsoft YaHei" panose="020B0503020204020204" pitchFamily="34" charset="-122"/>
+                        <a:ea typeface="Microsoft YaHei" panose="020B0503020204020204" pitchFamily="34" charset="-122"/>
+                        <a:cs typeface="Arial Unicode MS" pitchFamily="34" charset="-120"/>
+                      </a:endParaRPr>
                     </a:p>
                   </a:txBody>
                   <a:tcPr marL="36000" marR="36000" marT="18000" marB="18000" anchor="ctr" horzOverflow="overflow">
